--- a/lessons/02_deep_learning/deep_learning.pptx
+++ b/lessons/02_deep_learning/deep_learning.pptx
@@ -5,27 +5,26 @@
     <p:sldMasterId id="2147483648" r:id="rId1"/>
   </p:sldMasterIdLst>
   <p:notesMasterIdLst>
-    <p:notesMasterId r:id="rId20"/>
+    <p:notesMasterId r:id="rId19"/>
   </p:notesMasterIdLst>
   <p:sldIdLst>
     <p:sldId id="6303" r:id="rId2"/>
-    <p:sldId id="6344" r:id="rId3"/>
-    <p:sldId id="6314" r:id="rId4"/>
-    <p:sldId id="6324" r:id="rId5"/>
-    <p:sldId id="6337" r:id="rId6"/>
-    <p:sldId id="6342" r:id="rId7"/>
-    <p:sldId id="6325" r:id="rId8"/>
-    <p:sldId id="6326" r:id="rId9"/>
-    <p:sldId id="6328" r:id="rId10"/>
-    <p:sldId id="6329" r:id="rId11"/>
-    <p:sldId id="6339" r:id="rId12"/>
-    <p:sldId id="6332" r:id="rId13"/>
-    <p:sldId id="6338" r:id="rId14"/>
-    <p:sldId id="6330" r:id="rId15"/>
-    <p:sldId id="6331" r:id="rId16"/>
-    <p:sldId id="6316" r:id="rId17"/>
-    <p:sldId id="6304" r:id="rId18"/>
-    <p:sldId id="6319" r:id="rId19"/>
+    <p:sldId id="6314" r:id="rId3"/>
+    <p:sldId id="6324" r:id="rId4"/>
+    <p:sldId id="6337" r:id="rId5"/>
+    <p:sldId id="6342" r:id="rId6"/>
+    <p:sldId id="6325" r:id="rId7"/>
+    <p:sldId id="6326" r:id="rId8"/>
+    <p:sldId id="6328" r:id="rId9"/>
+    <p:sldId id="6329" r:id="rId10"/>
+    <p:sldId id="6339" r:id="rId11"/>
+    <p:sldId id="6332" r:id="rId12"/>
+    <p:sldId id="6338" r:id="rId13"/>
+    <p:sldId id="6330" r:id="rId14"/>
+    <p:sldId id="6331" r:id="rId15"/>
+    <p:sldId id="6316" r:id="rId16"/>
+    <p:sldId id="6304" r:id="rId17"/>
+    <p:sldId id="6319" r:id="rId18"/>
   </p:sldIdLst>
   <p:sldSz cx="12192000" cy="6858000"/>
   <p:notesSz cx="6858000" cy="9144000"/>
@@ -214,7 +213,7 @@
           <a:p>
             <a:fld id="{99D4630A-6D3B-4C97-A7DC-509EB0048625}" type="datetimeFigureOut">
               <a:rPr lang="it-CH" smtClean="0"/>
-              <a:t>04.06.2026</a:t>
+              <a:t>14.06.2026</a:t>
             </a:fld>
             <a:endParaRPr lang="it-CH"/>
           </a:p>
@@ -674,7 +673,7 @@
     </p:spTree>
     <p:extLst>
       <p:ext uri="{BB962C8B-B14F-4D97-AF65-F5344CB8AC3E}">
-        <p14:creationId xmlns:p14="http://schemas.microsoft.com/office/powerpoint/2010/main" val="883274434"/>
+        <p14:creationId xmlns:p14="http://schemas.microsoft.com/office/powerpoint/2010/main" val="1594569553"/>
       </p:ext>
     </p:extLst>
   </p:cSld>
@@ -775,7 +774,7 @@
     </p:spTree>
     <p:extLst>
       <p:ext uri="{BB962C8B-B14F-4D97-AF65-F5344CB8AC3E}">
-        <p14:creationId xmlns:p14="http://schemas.microsoft.com/office/powerpoint/2010/main" val="1594569553"/>
+        <p14:creationId xmlns:p14="http://schemas.microsoft.com/office/powerpoint/2010/main" val="3376920128"/>
       </p:ext>
     </p:extLst>
   </p:cSld>
@@ -876,7 +875,7 @@
     </p:spTree>
     <p:extLst>
       <p:ext uri="{BB962C8B-B14F-4D97-AF65-F5344CB8AC3E}">
-        <p14:creationId xmlns:p14="http://schemas.microsoft.com/office/powerpoint/2010/main" val="3376920128"/>
+        <p14:creationId xmlns:p14="http://schemas.microsoft.com/office/powerpoint/2010/main" val="2069734267"/>
       </p:ext>
     </p:extLst>
   </p:cSld>
@@ -977,7 +976,7 @@
     </p:spTree>
     <p:extLst>
       <p:ext uri="{BB962C8B-B14F-4D97-AF65-F5344CB8AC3E}">
-        <p14:creationId xmlns:p14="http://schemas.microsoft.com/office/powerpoint/2010/main" val="2069734267"/>
+        <p14:creationId xmlns:p14="http://schemas.microsoft.com/office/powerpoint/2010/main" val="1551811962"/>
       </p:ext>
     </p:extLst>
   </p:cSld>
@@ -1078,7 +1077,7 @@
     </p:spTree>
     <p:extLst>
       <p:ext uri="{BB962C8B-B14F-4D97-AF65-F5344CB8AC3E}">
-        <p14:creationId xmlns:p14="http://schemas.microsoft.com/office/powerpoint/2010/main" val="1551811962"/>
+        <p14:creationId xmlns:p14="http://schemas.microsoft.com/office/powerpoint/2010/main" val="917019626"/>
       </p:ext>
     </p:extLst>
   </p:cSld>
@@ -1179,7 +1178,7 @@
     </p:spTree>
     <p:extLst>
       <p:ext uri="{BB962C8B-B14F-4D97-AF65-F5344CB8AC3E}">
-        <p14:creationId xmlns:p14="http://schemas.microsoft.com/office/powerpoint/2010/main" val="917019626"/>
+        <p14:creationId xmlns:p14="http://schemas.microsoft.com/office/powerpoint/2010/main" val="1020528201"/>
       </p:ext>
     </p:extLst>
   </p:cSld>
@@ -1280,7 +1279,7 @@
     </p:spTree>
     <p:extLst>
       <p:ext uri="{BB962C8B-B14F-4D97-AF65-F5344CB8AC3E}">
-        <p14:creationId xmlns:p14="http://schemas.microsoft.com/office/powerpoint/2010/main" val="1020528201"/>
+        <p14:creationId xmlns:p14="http://schemas.microsoft.com/office/powerpoint/2010/main" val="3781039782"/>
       </p:ext>
     </p:extLst>
   </p:cSld>
@@ -1381,7 +1380,7 @@
     </p:spTree>
     <p:extLst>
       <p:ext uri="{BB962C8B-B14F-4D97-AF65-F5344CB8AC3E}">
-        <p14:creationId xmlns:p14="http://schemas.microsoft.com/office/powerpoint/2010/main" val="3781039782"/>
+        <p14:creationId xmlns:p14="http://schemas.microsoft.com/office/powerpoint/2010/main" val="1903138455"/>
       </p:ext>
     </p:extLst>
   </p:cSld>
@@ -1391,7 +1390,7 @@
 </p:notes>
 </file>
 
-<file path=ppt/notesSlides/notesSlide18.xml><?xml version="1.0" encoding="utf-8"?>
+<file path=ppt/notesSlides/notesSlide2.xml><?xml version="1.0" encoding="utf-8"?>
 <p:notes xmlns:a="http://schemas.openxmlformats.org/drawingml/2006/main" xmlns:r="http://schemas.openxmlformats.org/officeDocument/2006/relationships" xmlns:p="http://schemas.openxmlformats.org/presentationml/2006/main">
   <p:cSld>
     <p:spTree>
@@ -1473,7 +1472,7 @@
           <a:p>
             <a:fld id="{B6A6F0FA-31D0-AB4D-9BAD-FF9E467B93C7}" type="slidenum">
               <a:rPr lang="it-CH" smtClean="0"/>
-              <a:t>18</a:t>
+              <a:t>2</a:t>
             </a:fld>
             <a:endParaRPr lang="it-CH"/>
           </a:p>
@@ -1482,132 +1481,7 @@
     </p:spTree>
     <p:extLst>
       <p:ext uri="{BB962C8B-B14F-4D97-AF65-F5344CB8AC3E}">
-        <p14:creationId xmlns:p14="http://schemas.microsoft.com/office/powerpoint/2010/main" val="1903138455"/>
-      </p:ext>
-    </p:extLst>
-  </p:cSld>
-  <p:clrMapOvr>
-    <a:masterClrMapping/>
-  </p:clrMapOvr>
-</p:notes>
-</file>
-
-<file path=ppt/notesSlides/notesSlide2.xml><?xml version="1.0" encoding="utf-8"?>
-<p:notes xmlns:a="http://schemas.openxmlformats.org/drawingml/2006/main" xmlns:r="http://schemas.openxmlformats.org/officeDocument/2006/relationships" xmlns:p="http://schemas.openxmlformats.org/presentationml/2006/main">
-  <p:cSld>
-    <p:spTree>
-      <p:nvGrpSpPr>
-        <p:cNvPr id="1" name="">
-          <a:extLst>
-            <a:ext uri="{FF2B5EF4-FFF2-40B4-BE49-F238E27FC236}">
-              <a16:creationId xmlns:a16="http://schemas.microsoft.com/office/drawing/2014/main" id="{5B0E5DF0-8DC2-4965-5948-44FCA7F7F9CD}"/>
-            </a:ext>
-          </a:extLst>
-        </p:cNvPr>
-        <p:cNvGrpSpPr/>
-        <p:nvPr/>
-      </p:nvGrpSpPr>
-      <p:grpSpPr>
-        <a:xfrm>
-          <a:off x="0" y="0"/>
-          <a:ext cx="0" cy="0"/>
-          <a:chOff x="0" y="0"/>
-          <a:chExt cx="0" cy="0"/>
-        </a:xfrm>
-      </p:grpSpPr>
-      <p:sp>
-        <p:nvSpPr>
-          <p:cNvPr id="2" name="Segnaposto immagine diapositiva 1">
-            <a:extLst>
-              <a:ext uri="{FF2B5EF4-FFF2-40B4-BE49-F238E27FC236}">
-                <a16:creationId xmlns:a16="http://schemas.microsoft.com/office/drawing/2014/main" id="{F30BFA78-E93B-D831-2BEC-B8DDA201D799}"/>
-              </a:ext>
-            </a:extLst>
-          </p:cNvPr>
-          <p:cNvSpPr>
-            <a:spLocks noGrp="1" noRot="1" noChangeAspect="1"/>
-          </p:cNvSpPr>
-          <p:nvPr>
-            <p:ph type="sldImg"/>
-          </p:nvPr>
-        </p:nvSpPr>
-        <p:spPr/>
-      </p:sp>
-      <p:sp>
-        <p:nvSpPr>
-          <p:cNvPr id="3" name="Segnaposto note 2">
-            <a:extLst>
-              <a:ext uri="{FF2B5EF4-FFF2-40B4-BE49-F238E27FC236}">
-                <a16:creationId xmlns:a16="http://schemas.microsoft.com/office/drawing/2014/main" id="{BD368C33-6EEB-C5CC-0AE4-B80140F927A4}"/>
-              </a:ext>
-            </a:extLst>
-          </p:cNvPr>
-          <p:cNvSpPr>
-            <a:spLocks noGrp="1"/>
-          </p:cNvSpPr>
-          <p:nvPr>
-            <p:ph type="body" idx="1"/>
-          </p:nvPr>
-        </p:nvSpPr>
-        <p:spPr/>
-        <p:txBody>
-          <a:bodyPr/>
-          <a:lstStyle/>
-          <a:p>
-            <a:pPr marL="0" marR="0" lvl="0" indent="0" algn="l" defTabSz="914400" rtl="0" eaLnBrk="1" fontAlgn="auto" latinLnBrk="0" hangingPunct="1">
-              <a:lnSpc>
-                <a:spcPct val="100000"/>
-              </a:lnSpc>
-              <a:spcBef>
-                <a:spcPts val="0"/>
-              </a:spcBef>
-              <a:spcAft>
-                <a:spcPts val="0"/>
-              </a:spcAft>
-              <a:buClrTx/>
-              <a:buSzTx/>
-              <a:buFontTx/>
-              <a:buNone/>
-              <a:tabLst/>
-              <a:defRPr/>
-            </a:pPr>
-            <a:endParaRPr lang="it-CH" dirty="0"/>
-          </a:p>
-        </p:txBody>
-      </p:sp>
-      <p:sp>
-        <p:nvSpPr>
-          <p:cNvPr id="4" name="Segnaposto numero diapositiva 3">
-            <a:extLst>
-              <a:ext uri="{FF2B5EF4-FFF2-40B4-BE49-F238E27FC236}">
-                <a16:creationId xmlns:a16="http://schemas.microsoft.com/office/drawing/2014/main" id="{E60B5B64-F0DF-111E-25B7-C6AF7CF2C6EC}"/>
-              </a:ext>
-            </a:extLst>
-          </p:cNvPr>
-          <p:cNvSpPr>
-            <a:spLocks noGrp="1"/>
-          </p:cNvSpPr>
-          <p:nvPr>
-            <p:ph type="sldNum" sz="quarter" idx="5"/>
-          </p:nvPr>
-        </p:nvSpPr>
-        <p:spPr/>
-        <p:txBody>
-          <a:bodyPr/>
-          <a:lstStyle/>
-          <a:p>
-            <a:fld id="{B6A6F0FA-31D0-AB4D-9BAD-FF9E467B93C7}" type="slidenum">
-              <a:rPr lang="it-CH" smtClean="0"/>
-              <a:t>2</a:t>
-            </a:fld>
-            <a:endParaRPr lang="it-CH"/>
-          </a:p>
-        </p:txBody>
-      </p:sp>
-    </p:spTree>
-    <p:extLst>
-      <p:ext uri="{BB962C8B-B14F-4D97-AF65-F5344CB8AC3E}">
-        <p14:creationId xmlns:p14="http://schemas.microsoft.com/office/powerpoint/2010/main" val="2603053524"/>
+        <p14:creationId xmlns:p14="http://schemas.microsoft.com/office/powerpoint/2010/main" val="3490604513"/>
       </p:ext>
     </p:extLst>
   </p:cSld>
@@ -1708,7 +1582,7 @@
     </p:spTree>
     <p:extLst>
       <p:ext uri="{BB962C8B-B14F-4D97-AF65-F5344CB8AC3E}">
-        <p14:creationId xmlns:p14="http://schemas.microsoft.com/office/powerpoint/2010/main" val="3490604513"/>
+        <p14:creationId xmlns:p14="http://schemas.microsoft.com/office/powerpoint/2010/main" val="168487677"/>
       </p:ext>
     </p:extLst>
   </p:cSld>
@@ -1809,7 +1683,7 @@
     </p:spTree>
     <p:extLst>
       <p:ext uri="{BB962C8B-B14F-4D97-AF65-F5344CB8AC3E}">
-        <p14:creationId xmlns:p14="http://schemas.microsoft.com/office/powerpoint/2010/main" val="168487677"/>
+        <p14:creationId xmlns:p14="http://schemas.microsoft.com/office/powerpoint/2010/main" val="352630792"/>
       </p:ext>
     </p:extLst>
   </p:cSld>
@@ -1910,7 +1784,7 @@
     </p:spTree>
     <p:extLst>
       <p:ext uri="{BB962C8B-B14F-4D97-AF65-F5344CB8AC3E}">
-        <p14:creationId xmlns:p14="http://schemas.microsoft.com/office/powerpoint/2010/main" val="352630792"/>
+        <p14:creationId xmlns:p14="http://schemas.microsoft.com/office/powerpoint/2010/main" val="4044284921"/>
       </p:ext>
     </p:extLst>
   </p:cSld>
@@ -2011,7 +1885,7 @@
     </p:spTree>
     <p:extLst>
       <p:ext uri="{BB962C8B-B14F-4D97-AF65-F5344CB8AC3E}">
-        <p14:creationId xmlns:p14="http://schemas.microsoft.com/office/powerpoint/2010/main" val="4044284921"/>
+        <p14:creationId xmlns:p14="http://schemas.microsoft.com/office/powerpoint/2010/main" val="1669219879"/>
       </p:ext>
     </p:extLst>
   </p:cSld>
@@ -2112,7 +1986,7 @@
     </p:spTree>
     <p:extLst>
       <p:ext uri="{BB962C8B-B14F-4D97-AF65-F5344CB8AC3E}">
-        <p14:creationId xmlns:p14="http://schemas.microsoft.com/office/powerpoint/2010/main" val="1669219879"/>
+        <p14:creationId xmlns:p14="http://schemas.microsoft.com/office/powerpoint/2010/main" val="4279161581"/>
       </p:ext>
     </p:extLst>
   </p:cSld>
@@ -2213,7 +2087,7 @@
     </p:spTree>
     <p:extLst>
       <p:ext uri="{BB962C8B-B14F-4D97-AF65-F5344CB8AC3E}">
-        <p14:creationId xmlns:p14="http://schemas.microsoft.com/office/powerpoint/2010/main" val="4279161581"/>
+        <p14:creationId xmlns:p14="http://schemas.microsoft.com/office/powerpoint/2010/main" val="2072386885"/>
       </p:ext>
     </p:extLst>
   </p:cSld>
@@ -2314,7 +2188,7 @@
     </p:spTree>
     <p:extLst>
       <p:ext uri="{BB962C8B-B14F-4D97-AF65-F5344CB8AC3E}">
-        <p14:creationId xmlns:p14="http://schemas.microsoft.com/office/powerpoint/2010/main" val="2072386885"/>
+        <p14:creationId xmlns:p14="http://schemas.microsoft.com/office/powerpoint/2010/main" val="883274434"/>
       </p:ext>
     </p:extLst>
   </p:cSld>
@@ -2473,7 +2347,7 @@
           <a:p>
             <a:fld id="{2A147C38-CC24-4E9D-9FE1-BE5105214113}" type="datetimeFigureOut">
               <a:rPr lang="it-CH" smtClean="0"/>
-              <a:t>04.06.2026</a:t>
+              <a:t>14.06.2026</a:t>
             </a:fld>
             <a:endParaRPr lang="it-CH"/>
           </a:p>
@@ -2673,7 +2547,7 @@
           <a:p>
             <a:fld id="{2A147C38-CC24-4E9D-9FE1-BE5105214113}" type="datetimeFigureOut">
               <a:rPr lang="it-CH" smtClean="0"/>
-              <a:t>04.06.2026</a:t>
+              <a:t>14.06.2026</a:t>
             </a:fld>
             <a:endParaRPr lang="it-CH"/>
           </a:p>
@@ -2883,7 +2757,7 @@
           <a:p>
             <a:fld id="{2A147C38-CC24-4E9D-9FE1-BE5105214113}" type="datetimeFigureOut">
               <a:rPr lang="it-CH" smtClean="0"/>
-              <a:t>04.06.2026</a:t>
+              <a:t>14.06.2026</a:t>
             </a:fld>
             <a:endParaRPr lang="it-CH"/>
           </a:p>
@@ -3083,7 +2957,7 @@
           <a:p>
             <a:fld id="{2A147C38-CC24-4E9D-9FE1-BE5105214113}" type="datetimeFigureOut">
               <a:rPr lang="it-CH" smtClean="0"/>
-              <a:t>04.06.2026</a:t>
+              <a:t>14.06.2026</a:t>
             </a:fld>
             <a:endParaRPr lang="it-CH"/>
           </a:p>
@@ -3359,7 +3233,7 @@
           <a:p>
             <a:fld id="{2A147C38-CC24-4E9D-9FE1-BE5105214113}" type="datetimeFigureOut">
               <a:rPr lang="it-CH" smtClean="0"/>
-              <a:t>04.06.2026</a:t>
+              <a:t>14.06.2026</a:t>
             </a:fld>
             <a:endParaRPr lang="it-CH"/>
           </a:p>
@@ -3627,7 +3501,7 @@
           <a:p>
             <a:fld id="{2A147C38-CC24-4E9D-9FE1-BE5105214113}" type="datetimeFigureOut">
               <a:rPr lang="it-CH" smtClean="0"/>
-              <a:t>04.06.2026</a:t>
+              <a:t>14.06.2026</a:t>
             </a:fld>
             <a:endParaRPr lang="it-CH"/>
           </a:p>
@@ -4042,7 +3916,7 @@
           <a:p>
             <a:fld id="{2A147C38-CC24-4E9D-9FE1-BE5105214113}" type="datetimeFigureOut">
               <a:rPr lang="it-CH" smtClean="0"/>
-              <a:t>04.06.2026</a:t>
+              <a:t>14.06.2026</a:t>
             </a:fld>
             <a:endParaRPr lang="it-CH"/>
           </a:p>
@@ -4184,7 +4058,7 @@
           <a:p>
             <a:fld id="{2A147C38-CC24-4E9D-9FE1-BE5105214113}" type="datetimeFigureOut">
               <a:rPr lang="it-CH" smtClean="0"/>
-              <a:t>04.06.2026</a:t>
+              <a:t>14.06.2026</a:t>
             </a:fld>
             <a:endParaRPr lang="it-CH"/>
           </a:p>
@@ -4297,7 +4171,7 @@
           <a:p>
             <a:fld id="{2A147C38-CC24-4E9D-9FE1-BE5105214113}" type="datetimeFigureOut">
               <a:rPr lang="it-CH" smtClean="0"/>
-              <a:t>04.06.2026</a:t>
+              <a:t>14.06.2026</a:t>
             </a:fld>
             <a:endParaRPr lang="it-CH"/>
           </a:p>
@@ -4610,7 +4484,7 @@
           <a:p>
             <a:fld id="{2A147C38-CC24-4E9D-9FE1-BE5105214113}" type="datetimeFigureOut">
               <a:rPr lang="it-CH" smtClean="0"/>
-              <a:t>04.06.2026</a:t>
+              <a:t>14.06.2026</a:t>
             </a:fld>
             <a:endParaRPr lang="it-CH"/>
           </a:p>
@@ -4899,7 +4773,7 @@
           <a:p>
             <a:fld id="{2A147C38-CC24-4E9D-9FE1-BE5105214113}" type="datetimeFigureOut">
               <a:rPr lang="it-CH" smtClean="0"/>
-              <a:t>04.06.2026</a:t>
+              <a:t>14.06.2026</a:t>
             </a:fld>
             <a:endParaRPr lang="it-CH"/>
           </a:p>
@@ -5142,7 +5016,7 @@
           <a:p>
             <a:fld id="{2A147C38-CC24-4E9D-9FE1-BE5105214113}" type="datetimeFigureOut">
               <a:rPr lang="it-CH" smtClean="0"/>
-              <a:t>04.06.2026</a:t>
+              <a:t>14.06.2026</a:t>
             </a:fld>
             <a:endParaRPr lang="it-CH"/>
           </a:p>
@@ -9029,3593 +8903,6 @@
                   <a:schemeClr val="accent1"/>
                 </a:solidFill>
               </a:rPr>
-              <a:t>Multi-layer RNN</a:t>
-            </a:r>
-          </a:p>
-        </p:txBody>
-      </p:sp>
-      <p:sp>
-        <p:nvSpPr>
-          <p:cNvPr id="106" name="CasellaDiTesto 105">
-            <a:extLst>
-              <a:ext uri="{FF2B5EF4-FFF2-40B4-BE49-F238E27FC236}">
-                <a16:creationId xmlns:a16="http://schemas.microsoft.com/office/drawing/2014/main" id="{A3376D07-F390-4720-984F-C859E602CC46}"/>
-              </a:ext>
-            </a:extLst>
-          </p:cNvPr>
-          <p:cNvSpPr txBox="1"/>
-          <p:nvPr/>
-        </p:nvSpPr>
-        <p:spPr>
-          <a:xfrm>
-            <a:off x="1349908" y="3093200"/>
-            <a:ext cx="572301" cy="707886"/>
-          </a:xfrm>
-          <a:prstGeom prst="rect">
-            <a:avLst/>
-          </a:prstGeom>
-          <a:noFill/>
-        </p:spPr>
-        <p:txBody>
-          <a:bodyPr wrap="square" rtlCol="0">
-            <a:spAutoFit/>
-          </a:bodyPr>
-          <a:lstStyle/>
-          <a:p>
-            <a:r>
-              <a:rPr lang="en-GB" sz="4000" dirty="0"/>
-              <a:t>…</a:t>
-            </a:r>
-            <a:endParaRPr lang="en-GB" sz="1200" dirty="0"/>
-          </a:p>
-        </p:txBody>
-      </p:sp>
-      <p:sp>
-        <p:nvSpPr>
-          <p:cNvPr id="107" name="CasellaDiTesto 106">
-            <a:extLst>
-              <a:ext uri="{FF2B5EF4-FFF2-40B4-BE49-F238E27FC236}">
-                <a16:creationId xmlns:a16="http://schemas.microsoft.com/office/drawing/2014/main" id="{7E1103BE-BB6F-6430-9714-AA69C846FC6C}"/>
-              </a:ext>
-            </a:extLst>
-          </p:cNvPr>
-          <p:cNvSpPr txBox="1"/>
-          <p:nvPr/>
-        </p:nvSpPr>
-        <p:spPr>
-          <a:xfrm>
-            <a:off x="2748628" y="3093200"/>
-            <a:ext cx="572301" cy="707886"/>
-          </a:xfrm>
-          <a:prstGeom prst="rect">
-            <a:avLst/>
-          </a:prstGeom>
-          <a:noFill/>
-        </p:spPr>
-        <p:txBody>
-          <a:bodyPr wrap="square" rtlCol="0">
-            <a:spAutoFit/>
-          </a:bodyPr>
-          <a:lstStyle/>
-          <a:p>
-            <a:r>
-              <a:rPr lang="en-GB" sz="4000" dirty="0"/>
-              <a:t>…</a:t>
-            </a:r>
-            <a:endParaRPr lang="en-GB" sz="1200" dirty="0"/>
-          </a:p>
-        </p:txBody>
-      </p:sp>
-      <p:sp>
-        <p:nvSpPr>
-          <p:cNvPr id="108" name="CasellaDiTesto 107">
-            <a:extLst>
-              <a:ext uri="{FF2B5EF4-FFF2-40B4-BE49-F238E27FC236}">
-                <a16:creationId xmlns:a16="http://schemas.microsoft.com/office/drawing/2014/main" id="{4184E08F-BF90-141C-CDDB-733637694C4C}"/>
-              </a:ext>
-            </a:extLst>
-          </p:cNvPr>
-          <p:cNvSpPr txBox="1"/>
-          <p:nvPr/>
-        </p:nvSpPr>
-        <p:spPr>
-          <a:xfrm>
-            <a:off x="4204868" y="3093200"/>
-            <a:ext cx="572301" cy="707886"/>
-          </a:xfrm>
-          <a:prstGeom prst="rect">
-            <a:avLst/>
-          </a:prstGeom>
-          <a:noFill/>
-        </p:spPr>
-        <p:txBody>
-          <a:bodyPr wrap="square" rtlCol="0">
-            <a:spAutoFit/>
-          </a:bodyPr>
-          <a:lstStyle/>
-          <a:p>
-            <a:r>
-              <a:rPr lang="en-GB" sz="4000" dirty="0"/>
-              <a:t>…</a:t>
-            </a:r>
-            <a:endParaRPr lang="en-GB" sz="1200" dirty="0"/>
-          </a:p>
-        </p:txBody>
-      </p:sp>
-      <p:sp>
-        <p:nvSpPr>
-          <p:cNvPr id="109" name="CasellaDiTesto 108">
-            <a:extLst>
-              <a:ext uri="{FF2B5EF4-FFF2-40B4-BE49-F238E27FC236}">
-                <a16:creationId xmlns:a16="http://schemas.microsoft.com/office/drawing/2014/main" id="{68ED7663-5FD7-F9AD-954D-AAEC1B940198}"/>
-              </a:ext>
-            </a:extLst>
-          </p:cNvPr>
-          <p:cNvSpPr txBox="1"/>
-          <p:nvPr/>
-        </p:nvSpPr>
-        <p:spPr>
-          <a:xfrm>
-            <a:off x="6261355" y="3093200"/>
-            <a:ext cx="572301" cy="707886"/>
-          </a:xfrm>
-          <a:prstGeom prst="rect">
-            <a:avLst/>
-          </a:prstGeom>
-          <a:noFill/>
-        </p:spPr>
-        <p:txBody>
-          <a:bodyPr wrap="square" rtlCol="0">
-            <a:spAutoFit/>
-          </a:bodyPr>
-          <a:lstStyle/>
-          <a:p>
-            <a:r>
-              <a:rPr lang="en-GB" sz="4000" dirty="0"/>
-              <a:t>…</a:t>
-            </a:r>
-            <a:endParaRPr lang="en-GB" sz="1200" dirty="0"/>
-          </a:p>
-        </p:txBody>
-      </p:sp>
-      <p:sp>
-        <p:nvSpPr>
-          <p:cNvPr id="110" name="CasellaDiTesto 109">
-            <a:extLst>
-              <a:ext uri="{FF2B5EF4-FFF2-40B4-BE49-F238E27FC236}">
-                <a16:creationId xmlns:a16="http://schemas.microsoft.com/office/drawing/2014/main" id="{B89967CC-A785-0875-74A8-1B6620829025}"/>
-              </a:ext>
-            </a:extLst>
-          </p:cNvPr>
-          <p:cNvSpPr txBox="1"/>
-          <p:nvPr/>
-        </p:nvSpPr>
-        <p:spPr>
-          <a:xfrm>
-            <a:off x="8317842" y="3349132"/>
-            <a:ext cx="3179329" cy="707886"/>
-          </a:xfrm>
-          <a:prstGeom prst="rect">
-            <a:avLst/>
-          </a:prstGeom>
-          <a:noFill/>
-          <a:ln>
-            <a:solidFill>
-              <a:srgbClr val="0070C0"/>
-            </a:solidFill>
-          </a:ln>
-        </p:spPr>
-        <p:txBody>
-          <a:bodyPr wrap="square" rtlCol="0">
-            <a:spAutoFit/>
-          </a:bodyPr>
-          <a:lstStyle/>
-          <a:p>
-            <a:pPr algn="ctr"/>
-            <a:r>
-              <a:rPr lang="en-GB" sz="2000" dirty="0"/>
-              <a:t>Hidden states of a layer are also inputs of the next layer</a:t>
-            </a:r>
-          </a:p>
-        </p:txBody>
-      </p:sp>
-      <p:sp>
-        <p:nvSpPr>
-          <p:cNvPr id="111" name="CasellaDiTesto 110">
-            <a:extLst>
-              <a:ext uri="{FF2B5EF4-FFF2-40B4-BE49-F238E27FC236}">
-                <a16:creationId xmlns:a16="http://schemas.microsoft.com/office/drawing/2014/main" id="{B6DB941B-AB33-D6CF-455F-202EB0392D77}"/>
-              </a:ext>
-            </a:extLst>
-          </p:cNvPr>
-          <p:cNvSpPr txBox="1"/>
-          <p:nvPr/>
-        </p:nvSpPr>
-        <p:spPr>
-          <a:xfrm>
-            <a:off x="4503210" y="6220155"/>
-            <a:ext cx="892061" cy="259632"/>
-          </a:xfrm>
-          <a:prstGeom prst="rect">
-            <a:avLst/>
-          </a:prstGeom>
-          <a:noFill/>
-        </p:spPr>
-        <p:txBody>
-          <a:bodyPr wrap="square" rtlCol="0">
-            <a:spAutoFit/>
-          </a:bodyPr>
-          <a:lstStyle/>
-          <a:p>
-            <a:r>
-              <a:rPr lang="en-GB" dirty="0"/>
-              <a:t>u(t+2)</a:t>
-            </a:r>
-          </a:p>
-        </p:txBody>
-      </p:sp>
-      <p:sp>
-        <p:nvSpPr>
-          <p:cNvPr id="112" name="CasellaDiTesto 111">
-            <a:extLst>
-              <a:ext uri="{FF2B5EF4-FFF2-40B4-BE49-F238E27FC236}">
-                <a16:creationId xmlns:a16="http://schemas.microsoft.com/office/drawing/2014/main" id="{1AEC2042-E58C-DA7A-4FAF-C7B5175329A2}"/>
-              </a:ext>
-            </a:extLst>
-          </p:cNvPr>
-          <p:cNvSpPr txBox="1"/>
-          <p:nvPr/>
-        </p:nvSpPr>
-        <p:spPr>
-          <a:xfrm>
-            <a:off x="6606628" y="6226201"/>
-            <a:ext cx="892061" cy="369332"/>
-          </a:xfrm>
-          <a:prstGeom prst="rect">
-            <a:avLst/>
-          </a:prstGeom>
-          <a:noFill/>
-        </p:spPr>
-        <p:txBody>
-          <a:bodyPr wrap="square" rtlCol="0">
-            <a:spAutoFit/>
-          </a:bodyPr>
-          <a:lstStyle/>
-          <a:p>
-            <a:r>
-              <a:rPr lang="en-GB" dirty="0"/>
-              <a:t>u(</a:t>
-            </a:r>
-            <a:r>
-              <a:rPr lang="en-GB" dirty="0" err="1"/>
-              <a:t>t+T</a:t>
-            </a:r>
-            <a:r>
-              <a:rPr lang="en-GB" dirty="0"/>
-              <a:t>)</a:t>
-            </a:r>
-          </a:p>
-        </p:txBody>
-      </p:sp>
-    </p:spTree>
-    <p:extLst>
-      <p:ext uri="{BB962C8B-B14F-4D97-AF65-F5344CB8AC3E}">
-        <p14:creationId xmlns:p14="http://schemas.microsoft.com/office/powerpoint/2010/main" val="2801019353"/>
-      </p:ext>
-    </p:extLst>
-  </p:cSld>
-  <p:clrMapOvr>
-    <a:masterClrMapping/>
-  </p:clrMapOvr>
-</p:sld>
-</file>
-
-<file path=ppt/slides/slide11.xml><?xml version="1.0" encoding="utf-8"?>
-<p:sld xmlns:a="http://schemas.openxmlformats.org/drawingml/2006/main" xmlns:r="http://schemas.openxmlformats.org/officeDocument/2006/relationships" xmlns:p="http://schemas.openxmlformats.org/presentationml/2006/main">
-  <p:cSld>
-    <p:spTree>
-      <p:nvGrpSpPr>
-        <p:cNvPr id="1" name=""/>
-        <p:cNvGrpSpPr/>
-        <p:nvPr/>
-      </p:nvGrpSpPr>
-      <p:grpSpPr>
-        <a:xfrm>
-          <a:off x="0" y="0"/>
-          <a:ext cx="0" cy="0"/>
-          <a:chOff x="0" y="0"/>
-          <a:chExt cx="0" cy="0"/>
-        </a:xfrm>
-      </p:grpSpPr>
-      <p:sp>
-        <p:nvSpPr>
-          <p:cNvPr id="15" name="Rettangolo 14">
-            <a:extLst>
-              <a:ext uri="{FF2B5EF4-FFF2-40B4-BE49-F238E27FC236}">
-                <a16:creationId xmlns:a16="http://schemas.microsoft.com/office/drawing/2014/main" id="{7E5E5FE8-2860-6D76-9470-7E03FE4923A6}"/>
-              </a:ext>
-            </a:extLst>
-          </p:cNvPr>
-          <p:cNvSpPr/>
-          <p:nvPr/>
-        </p:nvSpPr>
-        <p:spPr>
-          <a:xfrm flipV="1">
-            <a:off x="154112" y="647878"/>
-            <a:ext cx="12037888" cy="45719"/>
-          </a:xfrm>
-          <a:prstGeom prst="rect">
-            <a:avLst/>
-          </a:prstGeom>
-          <a:solidFill>
-            <a:srgbClr val="C00000"/>
-          </a:solidFill>
-          <a:ln>
-            <a:noFill/>
-          </a:ln>
-        </p:spPr>
-        <p:style>
-          <a:lnRef idx="2">
-            <a:schemeClr val="accent1">
-              <a:shade val="50000"/>
-            </a:schemeClr>
-          </a:lnRef>
-          <a:fillRef idx="1">
-            <a:schemeClr val="accent1"/>
-          </a:fillRef>
-          <a:effectRef idx="0">
-            <a:schemeClr val="accent1"/>
-          </a:effectRef>
-          <a:fontRef idx="minor">
-            <a:schemeClr val="lt1"/>
-          </a:fontRef>
-        </p:style>
-        <p:txBody>
-          <a:bodyPr rtlCol="0" anchor="ctr"/>
-          <a:lstStyle/>
-          <a:p>
-            <a:pPr algn="ctr"/>
-            <a:endParaRPr lang="it-IT"/>
-          </a:p>
-        </p:txBody>
-      </p:sp>
-      <p:cxnSp>
-        <p:nvCxnSpPr>
-          <p:cNvPr id="19" name="Connettore 2 18">
-            <a:extLst>
-              <a:ext uri="{FF2B5EF4-FFF2-40B4-BE49-F238E27FC236}">
-                <a16:creationId xmlns:a16="http://schemas.microsoft.com/office/drawing/2014/main" id="{A988E337-B88E-98BA-1A78-0E337BFDEFA5}"/>
-              </a:ext>
-            </a:extLst>
-          </p:cNvPr>
-          <p:cNvCxnSpPr/>
-          <p:nvPr/>
-        </p:nvCxnSpPr>
-        <p:spPr>
-          <a:xfrm flipV="1">
-            <a:off x="0" y="6610350"/>
-            <a:ext cx="12192000" cy="0"/>
-          </a:xfrm>
-          <a:prstGeom prst="straightConnector1">
-            <a:avLst/>
-          </a:prstGeom>
-          <a:ln>
-            <a:solidFill>
-              <a:schemeClr val="accent1">
-                <a:lumMod val="50000"/>
-              </a:schemeClr>
-            </a:solidFill>
-          </a:ln>
-        </p:spPr>
-        <p:style>
-          <a:lnRef idx="1">
-            <a:schemeClr val="accent1"/>
-          </a:lnRef>
-          <a:fillRef idx="0">
-            <a:schemeClr val="accent1"/>
-          </a:fillRef>
-          <a:effectRef idx="0">
-            <a:schemeClr val="accent1"/>
-          </a:effectRef>
-          <a:fontRef idx="minor">
-            <a:schemeClr val="tx1"/>
-          </a:fontRef>
-        </p:style>
-      </p:cxnSp>
-      <mc:AlternateContent xmlns:mc="http://schemas.openxmlformats.org/markup-compatibility/2006" xmlns:a14="http://schemas.microsoft.com/office/drawing/2010/main">
-        <mc:Choice Requires="a14">
-          <p:sp>
-            <p:nvSpPr>
-              <p:cNvPr id="3" name="CasellaDiTesto 2">
-                <a:extLst>
-                  <a:ext uri="{FF2B5EF4-FFF2-40B4-BE49-F238E27FC236}">
-                    <a16:creationId xmlns:a16="http://schemas.microsoft.com/office/drawing/2014/main" id="{317EC68D-63E8-98B6-4742-C38CFD54117A}"/>
-                  </a:ext>
-                </a:extLst>
-              </p:cNvPr>
-              <p:cNvSpPr txBox="1"/>
-              <p:nvPr/>
-            </p:nvSpPr>
-            <p:spPr>
-              <a:xfrm>
-                <a:off x="1636054" y="772502"/>
-                <a:ext cx="530457" cy="259632"/>
-              </a:xfrm>
-              <a:prstGeom prst="rect">
-                <a:avLst/>
-              </a:prstGeom>
-              <a:noFill/>
-            </p:spPr>
-            <p:txBody>
-              <a:bodyPr wrap="square" rtlCol="0">
-                <a:spAutoFit/>
-              </a:bodyPr>
-              <a:lstStyle/>
-              <a:p>
-                <a:pPr/>
-                <a14:m>
-                  <m:oMathPara xmlns:m="http://schemas.openxmlformats.org/officeDocument/2006/math">
-                    <m:oMathParaPr>
-                      <m:jc m:val="centerGroup"/>
-                    </m:oMathParaPr>
-                    <m:oMath xmlns:m="http://schemas.openxmlformats.org/officeDocument/2006/math">
-                      <m:acc>
-                        <m:accPr>
-                          <m:chr m:val="̂"/>
-                          <m:ctrlPr>
-                            <a:rPr lang="en-GB" i="1" dirty="0" smtClean="0">
-                              <a:latin typeface="Cambria Math" panose="02040503050406030204" pitchFamily="18" charset="0"/>
-                            </a:rPr>
-                          </m:ctrlPr>
-                        </m:accPr>
-                        <m:e>
-                          <m:r>
-                            <a:rPr lang="it-CH" b="0" i="1" dirty="0" smtClean="0">
-                              <a:latin typeface="Cambria Math" panose="02040503050406030204" pitchFamily="18" charset="0"/>
-                            </a:rPr>
-                            <m:t>𝑦</m:t>
-                          </m:r>
-                        </m:e>
-                      </m:acc>
-                      <m:r>
-                        <a:rPr lang="it-CH" b="0" i="1" dirty="0" smtClean="0">
-                          <a:latin typeface="Cambria Math" panose="02040503050406030204" pitchFamily="18" charset="0"/>
-                        </a:rPr>
-                        <m:t>(</m:t>
-                      </m:r>
-                      <m:r>
-                        <a:rPr lang="it-CH" b="0" i="1" dirty="0" smtClean="0">
-                          <a:latin typeface="Cambria Math" panose="02040503050406030204" pitchFamily="18" charset="0"/>
-                        </a:rPr>
-                        <m:t>𝑡</m:t>
-                      </m:r>
-                      <m:r>
-                        <a:rPr lang="it-CH" b="0" i="1" dirty="0" smtClean="0">
-                          <a:latin typeface="Cambria Math" panose="02040503050406030204" pitchFamily="18" charset="0"/>
-                        </a:rPr>
-                        <m:t>)</m:t>
-                      </m:r>
-                    </m:oMath>
-                  </m:oMathPara>
-                </a14:m>
-                <a:endParaRPr lang="en-GB" dirty="0"/>
-              </a:p>
-            </p:txBody>
-          </p:sp>
-        </mc:Choice>
-        <mc:Fallback xmlns="">
-          <p:sp>
-            <p:nvSpPr>
-              <p:cNvPr id="3" name="CasellaDiTesto 2">
-                <a:extLst>
-                  <a:ext uri="{FF2B5EF4-FFF2-40B4-BE49-F238E27FC236}">
-                    <a16:creationId xmlns:a16="http://schemas.microsoft.com/office/drawing/2014/main" id="{317EC68D-63E8-98B6-4742-C38CFD54117A}"/>
-                  </a:ext>
-                </a:extLst>
-              </p:cNvPr>
-              <p:cNvSpPr txBox="1">
-                <a:spLocks noRot="1" noChangeAspect="1" noMove="1" noResize="1" noEditPoints="1" noAdjustHandles="1" noChangeArrowheads="1" noChangeShapeType="1" noTextEdit="1"/>
-              </p:cNvSpPr>
-              <p:nvPr/>
-            </p:nvSpPr>
-            <p:spPr>
-              <a:xfrm>
-                <a:off x="1636054" y="772502"/>
-                <a:ext cx="530457" cy="259632"/>
-              </a:xfrm>
-              <a:prstGeom prst="rect">
-                <a:avLst/>
-              </a:prstGeom>
-              <a:blipFill>
-                <a:blip r:embed="rId3"/>
-                <a:stretch>
-                  <a:fillRect t="-9524" r="-17241" b="-61905"/>
-                </a:stretch>
-              </a:blipFill>
-            </p:spPr>
-            <p:txBody>
-              <a:bodyPr/>
-              <a:lstStyle/>
-              <a:p>
-                <a:r>
-                  <a:rPr lang="en-GB">
-                    <a:noFill/>
-                  </a:rPr>
-                  <a:t> </a:t>
-                </a:r>
-              </a:p>
-            </p:txBody>
-          </p:sp>
-        </mc:Fallback>
-      </mc:AlternateContent>
-      <mc:AlternateContent xmlns:mc="http://schemas.openxmlformats.org/markup-compatibility/2006" xmlns:a14="http://schemas.microsoft.com/office/drawing/2010/main">
-        <mc:Choice Requires="a14">
-          <p:sp>
-            <p:nvSpPr>
-              <p:cNvPr id="5" name="CasellaDiTesto 4">
-                <a:extLst>
-                  <a:ext uri="{FF2B5EF4-FFF2-40B4-BE49-F238E27FC236}">
-                    <a16:creationId xmlns:a16="http://schemas.microsoft.com/office/drawing/2014/main" id="{6175D555-4B7D-B325-182B-95D678A246E2}"/>
-                  </a:ext>
-                </a:extLst>
-              </p:cNvPr>
-              <p:cNvSpPr txBox="1"/>
-              <p:nvPr/>
-            </p:nvSpPr>
-            <p:spPr>
-              <a:xfrm>
-                <a:off x="3050547" y="772502"/>
-                <a:ext cx="1201613" cy="369332"/>
-              </a:xfrm>
-              <a:prstGeom prst="rect">
-                <a:avLst/>
-              </a:prstGeom>
-              <a:noFill/>
-            </p:spPr>
-            <p:txBody>
-              <a:bodyPr wrap="square" rtlCol="0">
-                <a:spAutoFit/>
-              </a:bodyPr>
-              <a:lstStyle/>
-              <a:p>
-                <a:pPr/>
-                <a14:m>
-                  <m:oMathPara xmlns:m="http://schemas.openxmlformats.org/officeDocument/2006/math">
-                    <m:oMathParaPr>
-                      <m:jc m:val="centerGroup"/>
-                    </m:oMathParaPr>
-                    <m:oMath xmlns:m="http://schemas.openxmlformats.org/officeDocument/2006/math">
-                      <m:acc>
-                        <m:accPr>
-                          <m:chr m:val="̂"/>
-                          <m:ctrlPr>
-                            <a:rPr lang="en-GB" i="1" dirty="0" smtClean="0">
-                              <a:latin typeface="Cambria Math" panose="02040503050406030204" pitchFamily="18" charset="0"/>
-                            </a:rPr>
-                          </m:ctrlPr>
-                        </m:accPr>
-                        <m:e>
-                          <m:r>
-                            <a:rPr lang="it-CH" b="0" i="1" dirty="0" smtClean="0">
-                              <a:latin typeface="Cambria Math" panose="02040503050406030204" pitchFamily="18" charset="0"/>
-                            </a:rPr>
-                            <m:t>𝑦</m:t>
-                          </m:r>
-                        </m:e>
-                      </m:acc>
-                      <m:r>
-                        <a:rPr lang="it-CH" b="0" i="1" dirty="0" smtClean="0">
-                          <a:latin typeface="Cambria Math" panose="02040503050406030204" pitchFamily="18" charset="0"/>
-                        </a:rPr>
-                        <m:t>(</m:t>
-                      </m:r>
-                      <m:r>
-                        <a:rPr lang="it-CH" b="0" i="1" dirty="0" smtClean="0">
-                          <a:latin typeface="Cambria Math" panose="02040503050406030204" pitchFamily="18" charset="0"/>
-                        </a:rPr>
-                        <m:t>𝑡</m:t>
-                      </m:r>
-                      <m:r>
-                        <a:rPr lang="it-CH" b="0" i="1" dirty="0" smtClean="0">
-                          <a:latin typeface="Cambria Math" panose="02040503050406030204" pitchFamily="18" charset="0"/>
-                        </a:rPr>
-                        <m:t>+1)</m:t>
-                      </m:r>
-                    </m:oMath>
-                  </m:oMathPara>
-                </a14:m>
-                <a:endParaRPr lang="en-GB" dirty="0"/>
-              </a:p>
-            </p:txBody>
-          </p:sp>
-        </mc:Choice>
-        <mc:Fallback xmlns="">
-          <p:sp>
-            <p:nvSpPr>
-              <p:cNvPr id="5" name="CasellaDiTesto 4">
-                <a:extLst>
-                  <a:ext uri="{FF2B5EF4-FFF2-40B4-BE49-F238E27FC236}">
-                    <a16:creationId xmlns:a16="http://schemas.microsoft.com/office/drawing/2014/main" id="{6175D555-4B7D-B325-182B-95D678A246E2}"/>
-                  </a:ext>
-                </a:extLst>
-              </p:cNvPr>
-              <p:cNvSpPr txBox="1">
-                <a:spLocks noRot="1" noChangeAspect="1" noMove="1" noResize="1" noEditPoints="1" noAdjustHandles="1" noChangeArrowheads="1" noChangeShapeType="1" noTextEdit="1"/>
-              </p:cNvSpPr>
-              <p:nvPr/>
-            </p:nvSpPr>
-            <p:spPr>
-              <a:xfrm>
-                <a:off x="3050547" y="772502"/>
-                <a:ext cx="1201613" cy="369332"/>
-              </a:xfrm>
-              <a:prstGeom prst="rect">
-                <a:avLst/>
-              </a:prstGeom>
-              <a:blipFill>
-                <a:blip r:embed="rId4"/>
-                <a:stretch>
-                  <a:fillRect t="-6667" b="-13333"/>
-                </a:stretch>
-              </a:blipFill>
-            </p:spPr>
-            <p:txBody>
-              <a:bodyPr/>
-              <a:lstStyle/>
-              <a:p>
-                <a:r>
-                  <a:rPr lang="en-GB">
-                    <a:noFill/>
-                  </a:rPr>
-                  <a:t> </a:t>
-                </a:r>
-              </a:p>
-            </p:txBody>
-          </p:sp>
-        </mc:Fallback>
-      </mc:AlternateContent>
-      <mc:AlternateContent xmlns:mc="http://schemas.openxmlformats.org/markup-compatibility/2006" xmlns:a14="http://schemas.microsoft.com/office/drawing/2010/main">
-        <mc:Choice Requires="a14">
-          <p:sp>
-            <p:nvSpPr>
-              <p:cNvPr id="7" name="CasellaDiTesto 6">
-                <a:extLst>
-                  <a:ext uri="{FF2B5EF4-FFF2-40B4-BE49-F238E27FC236}">
-                    <a16:creationId xmlns:a16="http://schemas.microsoft.com/office/drawing/2014/main" id="{369FA63A-DA77-1F7E-AC2A-E9818AA0904F}"/>
-                  </a:ext>
-                </a:extLst>
-              </p:cNvPr>
-              <p:cNvSpPr txBox="1"/>
-              <p:nvPr/>
-            </p:nvSpPr>
-            <p:spPr>
-              <a:xfrm>
-                <a:off x="4446344" y="772502"/>
-                <a:ext cx="1177657" cy="369332"/>
-              </a:xfrm>
-              <a:prstGeom prst="rect">
-                <a:avLst/>
-              </a:prstGeom>
-              <a:noFill/>
-            </p:spPr>
-            <p:txBody>
-              <a:bodyPr wrap="square" rtlCol="0">
-                <a:spAutoFit/>
-              </a:bodyPr>
-              <a:lstStyle/>
-              <a:p>
-                <a:pPr/>
-                <a14:m>
-                  <m:oMathPara xmlns:m="http://schemas.openxmlformats.org/officeDocument/2006/math">
-                    <m:oMathParaPr>
-                      <m:jc m:val="centerGroup"/>
-                    </m:oMathParaPr>
-                    <m:oMath xmlns:m="http://schemas.openxmlformats.org/officeDocument/2006/math">
-                      <m:acc>
-                        <m:accPr>
-                          <m:chr m:val="̂"/>
-                          <m:ctrlPr>
-                            <a:rPr lang="en-GB" i="1" dirty="0" smtClean="0">
-                              <a:latin typeface="Cambria Math" panose="02040503050406030204" pitchFamily="18" charset="0"/>
-                            </a:rPr>
-                          </m:ctrlPr>
-                        </m:accPr>
-                        <m:e>
-                          <m:r>
-                            <a:rPr lang="it-CH" b="0" i="1" dirty="0" smtClean="0">
-                              <a:latin typeface="Cambria Math" panose="02040503050406030204" pitchFamily="18" charset="0"/>
-                            </a:rPr>
-                            <m:t>𝑦</m:t>
-                          </m:r>
-                        </m:e>
-                      </m:acc>
-                      <m:r>
-                        <a:rPr lang="it-CH" b="0" i="1" dirty="0" smtClean="0">
-                          <a:latin typeface="Cambria Math" panose="02040503050406030204" pitchFamily="18" charset="0"/>
-                        </a:rPr>
-                        <m:t>(</m:t>
-                      </m:r>
-                      <m:r>
-                        <a:rPr lang="it-CH" b="0" i="1" dirty="0" smtClean="0">
-                          <a:latin typeface="Cambria Math" panose="02040503050406030204" pitchFamily="18" charset="0"/>
-                        </a:rPr>
-                        <m:t>𝑡</m:t>
-                      </m:r>
-                      <m:r>
-                        <a:rPr lang="it-CH" b="0" i="1" dirty="0" smtClean="0">
-                          <a:latin typeface="Cambria Math" panose="02040503050406030204" pitchFamily="18" charset="0"/>
-                        </a:rPr>
-                        <m:t>+2)</m:t>
-                      </m:r>
-                    </m:oMath>
-                  </m:oMathPara>
-                </a14:m>
-                <a:endParaRPr lang="en-GB" dirty="0"/>
-              </a:p>
-            </p:txBody>
-          </p:sp>
-        </mc:Choice>
-        <mc:Fallback xmlns="">
-          <p:sp>
-            <p:nvSpPr>
-              <p:cNvPr id="7" name="CasellaDiTesto 6">
-                <a:extLst>
-                  <a:ext uri="{FF2B5EF4-FFF2-40B4-BE49-F238E27FC236}">
-                    <a16:creationId xmlns:a16="http://schemas.microsoft.com/office/drawing/2014/main" id="{369FA63A-DA77-1F7E-AC2A-E9818AA0904F}"/>
-                  </a:ext>
-                </a:extLst>
-              </p:cNvPr>
-              <p:cNvSpPr txBox="1">
-                <a:spLocks noRot="1" noChangeAspect="1" noMove="1" noResize="1" noEditPoints="1" noAdjustHandles="1" noChangeArrowheads="1" noChangeShapeType="1" noTextEdit="1"/>
-              </p:cNvSpPr>
-              <p:nvPr/>
-            </p:nvSpPr>
-            <p:spPr>
-              <a:xfrm>
-                <a:off x="4446344" y="772502"/>
-                <a:ext cx="1177657" cy="369332"/>
-              </a:xfrm>
-              <a:prstGeom prst="rect">
-                <a:avLst/>
-              </a:prstGeom>
-              <a:blipFill>
-                <a:blip r:embed="rId5"/>
-                <a:stretch>
-                  <a:fillRect t="-6667" b="-13333"/>
-                </a:stretch>
-              </a:blipFill>
-            </p:spPr>
-            <p:txBody>
-              <a:bodyPr/>
-              <a:lstStyle/>
-              <a:p>
-                <a:r>
-                  <a:rPr lang="en-GB">
-                    <a:noFill/>
-                  </a:rPr>
-                  <a:t> </a:t>
-                </a:r>
-              </a:p>
-            </p:txBody>
-          </p:sp>
-        </mc:Fallback>
-      </mc:AlternateContent>
-      <mc:AlternateContent xmlns:mc="http://schemas.openxmlformats.org/markup-compatibility/2006" xmlns:a14="http://schemas.microsoft.com/office/drawing/2010/main">
-        <mc:Choice Requires="a14">
-          <p:sp>
-            <p:nvSpPr>
-              <p:cNvPr id="8" name="CasellaDiTesto 7">
-                <a:extLst>
-                  <a:ext uri="{FF2B5EF4-FFF2-40B4-BE49-F238E27FC236}">
-                    <a16:creationId xmlns:a16="http://schemas.microsoft.com/office/drawing/2014/main" id="{0F4D00FA-1802-5716-AA53-F0574048998C}"/>
-                  </a:ext>
-                </a:extLst>
-              </p:cNvPr>
-              <p:cNvSpPr txBox="1"/>
-              <p:nvPr/>
-            </p:nvSpPr>
-            <p:spPr>
-              <a:xfrm>
-                <a:off x="6489506" y="772502"/>
-                <a:ext cx="1201614" cy="369332"/>
-              </a:xfrm>
-              <a:prstGeom prst="rect">
-                <a:avLst/>
-              </a:prstGeom>
-              <a:noFill/>
-            </p:spPr>
-            <p:txBody>
-              <a:bodyPr wrap="square" rtlCol="0">
-                <a:spAutoFit/>
-              </a:bodyPr>
-              <a:lstStyle/>
-              <a:p>
-                <a:pPr/>
-                <a14:m>
-                  <m:oMathPara xmlns:m="http://schemas.openxmlformats.org/officeDocument/2006/math">
-                    <m:oMathParaPr>
-                      <m:jc m:val="centerGroup"/>
-                    </m:oMathParaPr>
-                    <m:oMath xmlns:m="http://schemas.openxmlformats.org/officeDocument/2006/math">
-                      <m:acc>
-                        <m:accPr>
-                          <m:chr m:val="̂"/>
-                          <m:ctrlPr>
-                            <a:rPr lang="en-GB" i="1" dirty="0" smtClean="0">
-                              <a:latin typeface="Cambria Math" panose="02040503050406030204" pitchFamily="18" charset="0"/>
-                            </a:rPr>
-                          </m:ctrlPr>
-                        </m:accPr>
-                        <m:e>
-                          <m:r>
-                            <a:rPr lang="it-CH" b="0" i="1" dirty="0" smtClean="0">
-                              <a:latin typeface="Cambria Math" panose="02040503050406030204" pitchFamily="18" charset="0"/>
-                            </a:rPr>
-                            <m:t>𝑦</m:t>
-                          </m:r>
-                        </m:e>
-                      </m:acc>
-                      <m:r>
-                        <a:rPr lang="it-CH" b="0" i="1" dirty="0" smtClean="0">
-                          <a:latin typeface="Cambria Math" panose="02040503050406030204" pitchFamily="18" charset="0"/>
-                        </a:rPr>
-                        <m:t>(</m:t>
-                      </m:r>
-                      <m:r>
-                        <a:rPr lang="it-CH" b="0" i="1" dirty="0" smtClean="0">
-                          <a:latin typeface="Cambria Math" panose="02040503050406030204" pitchFamily="18" charset="0"/>
-                        </a:rPr>
-                        <m:t>𝑡</m:t>
-                      </m:r>
-                      <m:r>
-                        <a:rPr lang="it-CH" b="0" i="1" dirty="0" smtClean="0">
-                          <a:latin typeface="Cambria Math" panose="02040503050406030204" pitchFamily="18" charset="0"/>
-                        </a:rPr>
-                        <m:t>+</m:t>
-                      </m:r>
-                      <m:r>
-                        <a:rPr lang="it-CH" b="0" i="1" dirty="0" smtClean="0">
-                          <a:latin typeface="Cambria Math" panose="02040503050406030204" pitchFamily="18" charset="0"/>
-                        </a:rPr>
-                        <m:t>𝑇</m:t>
-                      </m:r>
-                      <m:r>
-                        <a:rPr lang="it-CH" b="0" i="1" dirty="0" smtClean="0">
-                          <a:latin typeface="Cambria Math" panose="02040503050406030204" pitchFamily="18" charset="0"/>
-                        </a:rPr>
-                        <m:t>)</m:t>
-                      </m:r>
-                    </m:oMath>
-                  </m:oMathPara>
-                </a14:m>
-                <a:endParaRPr lang="en-GB" dirty="0"/>
-              </a:p>
-            </p:txBody>
-          </p:sp>
-        </mc:Choice>
-        <mc:Fallback xmlns="">
-          <p:sp>
-            <p:nvSpPr>
-              <p:cNvPr id="8" name="CasellaDiTesto 7">
-                <a:extLst>
-                  <a:ext uri="{FF2B5EF4-FFF2-40B4-BE49-F238E27FC236}">
-                    <a16:creationId xmlns:a16="http://schemas.microsoft.com/office/drawing/2014/main" id="{0F4D00FA-1802-5716-AA53-F0574048998C}"/>
-                  </a:ext>
-                </a:extLst>
-              </p:cNvPr>
-              <p:cNvSpPr txBox="1">
-                <a:spLocks noRot="1" noChangeAspect="1" noMove="1" noResize="1" noEditPoints="1" noAdjustHandles="1" noChangeArrowheads="1" noChangeShapeType="1" noTextEdit="1"/>
-              </p:cNvSpPr>
-              <p:nvPr/>
-            </p:nvSpPr>
-            <p:spPr>
-              <a:xfrm>
-                <a:off x="6489506" y="772502"/>
-                <a:ext cx="1201614" cy="369332"/>
-              </a:xfrm>
-              <a:prstGeom prst="rect">
-                <a:avLst/>
-              </a:prstGeom>
-              <a:blipFill>
-                <a:blip r:embed="rId6"/>
-                <a:stretch>
-                  <a:fillRect t="-6667" b="-13333"/>
-                </a:stretch>
-              </a:blipFill>
-            </p:spPr>
-            <p:txBody>
-              <a:bodyPr/>
-              <a:lstStyle/>
-              <a:p>
-                <a:r>
-                  <a:rPr lang="en-GB">
-                    <a:noFill/>
-                  </a:rPr>
-                  <a:t> </a:t>
-                </a:r>
-              </a:p>
-            </p:txBody>
-          </p:sp>
-        </mc:Fallback>
-      </mc:AlternateContent>
-      <p:sp>
-        <p:nvSpPr>
-          <p:cNvPr id="9" name="Ovale 8">
-            <a:extLst>
-              <a:ext uri="{FF2B5EF4-FFF2-40B4-BE49-F238E27FC236}">
-                <a16:creationId xmlns:a16="http://schemas.microsoft.com/office/drawing/2014/main" id="{B1D0EA6E-1C9E-7956-A3CC-3D7E8E590779}"/>
-              </a:ext>
-            </a:extLst>
-          </p:cNvPr>
-          <p:cNvSpPr/>
-          <p:nvPr/>
-        </p:nvSpPr>
-        <p:spPr>
-          <a:xfrm>
-            <a:off x="1304937" y="5373942"/>
-            <a:ext cx="636549" cy="616018"/>
-          </a:xfrm>
-          <a:prstGeom prst="ellipse">
-            <a:avLst/>
-          </a:prstGeom>
-        </p:spPr>
-        <p:style>
-          <a:lnRef idx="2">
-            <a:schemeClr val="accent1">
-              <a:shade val="15000"/>
-            </a:schemeClr>
-          </a:lnRef>
-          <a:fillRef idx="1">
-            <a:schemeClr val="accent1"/>
-          </a:fillRef>
-          <a:effectRef idx="0">
-            <a:schemeClr val="accent1"/>
-          </a:effectRef>
-          <a:fontRef idx="minor">
-            <a:schemeClr val="lt1"/>
-          </a:fontRef>
-        </p:style>
-        <p:txBody>
-          <a:bodyPr rtlCol="0" anchor="ctr"/>
-          <a:lstStyle/>
-          <a:p>
-            <a:pPr algn="ctr"/>
-            <a:endParaRPr lang="en-GB"/>
-          </a:p>
-        </p:txBody>
-      </p:sp>
-      <p:cxnSp>
-        <p:nvCxnSpPr>
-          <p:cNvPr id="10" name="Connettore 2 9">
-            <a:extLst>
-              <a:ext uri="{FF2B5EF4-FFF2-40B4-BE49-F238E27FC236}">
-                <a16:creationId xmlns:a16="http://schemas.microsoft.com/office/drawing/2014/main" id="{506667CE-65B0-D5AC-AA3B-D7A8D905E729}"/>
-              </a:ext>
-            </a:extLst>
-          </p:cNvPr>
-          <p:cNvCxnSpPr>
-            <a:cxnSpLocks/>
-            <a:endCxn id="9" idx="4"/>
-          </p:cNvCxnSpPr>
-          <p:nvPr/>
-        </p:nvCxnSpPr>
-        <p:spPr>
-          <a:xfrm flipV="1">
-            <a:off x="1623211" y="5989960"/>
-            <a:ext cx="0" cy="528973"/>
-          </a:xfrm>
-          <a:prstGeom prst="straightConnector1">
-            <a:avLst/>
-          </a:prstGeom>
-          <a:ln w="19050">
-            <a:tailEnd type="triangle"/>
-          </a:ln>
-        </p:spPr>
-        <p:style>
-          <a:lnRef idx="1">
-            <a:schemeClr val="accent1"/>
-          </a:lnRef>
-          <a:fillRef idx="0">
-            <a:schemeClr val="accent1"/>
-          </a:fillRef>
-          <a:effectRef idx="0">
-            <a:schemeClr val="accent1"/>
-          </a:effectRef>
-          <a:fontRef idx="minor">
-            <a:schemeClr val="tx1"/>
-          </a:fontRef>
-        </p:style>
-      </p:cxnSp>
-      <p:cxnSp>
-        <p:nvCxnSpPr>
-          <p:cNvPr id="13" name="Connettore 2 12">
-            <a:extLst>
-              <a:ext uri="{FF2B5EF4-FFF2-40B4-BE49-F238E27FC236}">
-                <a16:creationId xmlns:a16="http://schemas.microsoft.com/office/drawing/2014/main" id="{0ED892D5-E29B-20B3-95C3-C77B0E5F3F5E}"/>
-              </a:ext>
-            </a:extLst>
-          </p:cNvPr>
-          <p:cNvCxnSpPr>
-            <a:cxnSpLocks/>
-          </p:cNvCxnSpPr>
-          <p:nvPr/>
-        </p:nvCxnSpPr>
-        <p:spPr>
-          <a:xfrm flipV="1">
-            <a:off x="1614944" y="4836528"/>
-            <a:ext cx="0" cy="528973"/>
-          </a:xfrm>
-          <a:prstGeom prst="straightConnector1">
-            <a:avLst/>
-          </a:prstGeom>
-          <a:ln w="19050">
-            <a:tailEnd type="triangle"/>
-          </a:ln>
-        </p:spPr>
-        <p:style>
-          <a:lnRef idx="1">
-            <a:schemeClr val="accent1"/>
-          </a:lnRef>
-          <a:fillRef idx="0">
-            <a:schemeClr val="accent1"/>
-          </a:fillRef>
-          <a:effectRef idx="0">
-            <a:schemeClr val="accent1"/>
-          </a:effectRef>
-          <a:fontRef idx="minor">
-            <a:schemeClr val="tx1"/>
-          </a:fontRef>
-        </p:style>
-      </p:cxnSp>
-      <p:cxnSp>
-        <p:nvCxnSpPr>
-          <p:cNvPr id="14" name="Connettore curvo 13">
-            <a:extLst>
-              <a:ext uri="{FF2B5EF4-FFF2-40B4-BE49-F238E27FC236}">
-                <a16:creationId xmlns:a16="http://schemas.microsoft.com/office/drawing/2014/main" id="{CD6A3638-C415-98B1-C34A-869828DA6C85}"/>
-              </a:ext>
-            </a:extLst>
-          </p:cNvPr>
-          <p:cNvCxnSpPr>
-            <a:cxnSpLocks/>
-          </p:cNvCxnSpPr>
-          <p:nvPr/>
-        </p:nvCxnSpPr>
-        <p:spPr>
-          <a:xfrm>
-            <a:off x="1851400" y="5468619"/>
-            <a:ext cx="946073" cy="384256"/>
-          </a:xfrm>
-          <a:prstGeom prst="curvedConnector4">
-            <a:avLst>
-              <a:gd name="adj1" fmla="val 45073"/>
-              <a:gd name="adj2" fmla="val 141821"/>
-            </a:avLst>
-          </a:prstGeom>
-          <a:ln>
-            <a:tailEnd type="triangle"/>
-          </a:ln>
-        </p:spPr>
-        <p:style>
-          <a:lnRef idx="1">
-            <a:schemeClr val="accent1"/>
-          </a:lnRef>
-          <a:fillRef idx="0">
-            <a:schemeClr val="accent1"/>
-          </a:fillRef>
-          <a:effectRef idx="0">
-            <a:schemeClr val="accent1"/>
-          </a:effectRef>
-          <a:fontRef idx="minor">
-            <a:schemeClr val="tx1"/>
-          </a:fontRef>
-        </p:style>
-      </p:cxnSp>
-      <p:sp>
-        <p:nvSpPr>
-          <p:cNvPr id="18" name="CasellaDiTesto 17">
-            <a:extLst>
-              <a:ext uri="{FF2B5EF4-FFF2-40B4-BE49-F238E27FC236}">
-                <a16:creationId xmlns:a16="http://schemas.microsoft.com/office/drawing/2014/main" id="{4A3F4A75-A9ED-BCB1-D0E4-8BD3C16EE56D}"/>
-              </a:ext>
-            </a:extLst>
-          </p:cNvPr>
-          <p:cNvSpPr txBox="1"/>
-          <p:nvPr/>
-        </p:nvSpPr>
-        <p:spPr>
-          <a:xfrm>
-            <a:off x="1672812" y="6220155"/>
-            <a:ext cx="530457" cy="259632"/>
-          </a:xfrm>
-          <a:prstGeom prst="rect">
-            <a:avLst/>
-          </a:prstGeom>
-          <a:noFill/>
-        </p:spPr>
-        <p:txBody>
-          <a:bodyPr wrap="square" rtlCol="0">
-            <a:spAutoFit/>
-          </a:bodyPr>
-          <a:lstStyle/>
-          <a:p>
-            <a:r>
-              <a:rPr lang="en-GB" dirty="0"/>
-              <a:t>u(t)</a:t>
-            </a:r>
-          </a:p>
-        </p:txBody>
-      </p:sp>
-      <p:sp>
-        <p:nvSpPr>
-          <p:cNvPr id="23" name="Ovale 22">
-            <a:extLst>
-              <a:ext uri="{FF2B5EF4-FFF2-40B4-BE49-F238E27FC236}">
-                <a16:creationId xmlns:a16="http://schemas.microsoft.com/office/drawing/2014/main" id="{8EE62AFA-70A9-43A6-C63B-317CAFBCB9C4}"/>
-              </a:ext>
-            </a:extLst>
-          </p:cNvPr>
-          <p:cNvSpPr/>
-          <p:nvPr/>
-        </p:nvSpPr>
-        <p:spPr>
-          <a:xfrm>
-            <a:off x="2696526" y="5327071"/>
-            <a:ext cx="636549" cy="616018"/>
-          </a:xfrm>
-          <a:prstGeom prst="ellipse">
-            <a:avLst/>
-          </a:prstGeom>
-        </p:spPr>
-        <p:style>
-          <a:lnRef idx="2">
-            <a:schemeClr val="accent1">
-              <a:shade val="15000"/>
-            </a:schemeClr>
-          </a:lnRef>
-          <a:fillRef idx="1">
-            <a:schemeClr val="accent1"/>
-          </a:fillRef>
-          <a:effectRef idx="0">
-            <a:schemeClr val="accent1"/>
-          </a:effectRef>
-          <a:fontRef idx="minor">
-            <a:schemeClr val="lt1"/>
-          </a:fontRef>
-        </p:style>
-        <p:txBody>
-          <a:bodyPr rtlCol="0" anchor="ctr"/>
-          <a:lstStyle/>
-          <a:p>
-            <a:pPr algn="ctr"/>
-            <a:endParaRPr lang="en-GB"/>
-          </a:p>
-        </p:txBody>
-      </p:sp>
-      <p:cxnSp>
-        <p:nvCxnSpPr>
-          <p:cNvPr id="24" name="Connettore 2 23">
-            <a:extLst>
-              <a:ext uri="{FF2B5EF4-FFF2-40B4-BE49-F238E27FC236}">
-                <a16:creationId xmlns:a16="http://schemas.microsoft.com/office/drawing/2014/main" id="{3F1A18D5-6FE1-55DA-87B4-BFB20DB7FD52}"/>
-              </a:ext>
-            </a:extLst>
-          </p:cNvPr>
-          <p:cNvCxnSpPr>
-            <a:cxnSpLocks/>
-            <a:endCxn id="23" idx="4"/>
-          </p:cNvCxnSpPr>
-          <p:nvPr/>
-        </p:nvCxnSpPr>
-        <p:spPr>
-          <a:xfrm flipV="1">
-            <a:off x="3014800" y="5943089"/>
-            <a:ext cx="0" cy="528973"/>
-          </a:xfrm>
-          <a:prstGeom prst="straightConnector1">
-            <a:avLst/>
-          </a:prstGeom>
-          <a:ln w="19050">
-            <a:tailEnd type="triangle"/>
-          </a:ln>
-        </p:spPr>
-        <p:style>
-          <a:lnRef idx="1">
-            <a:schemeClr val="accent1"/>
-          </a:lnRef>
-          <a:fillRef idx="0">
-            <a:schemeClr val="accent1"/>
-          </a:fillRef>
-          <a:effectRef idx="0">
-            <a:schemeClr val="accent1"/>
-          </a:effectRef>
-          <a:fontRef idx="minor">
-            <a:schemeClr val="tx1"/>
-          </a:fontRef>
-        </p:style>
-      </p:cxnSp>
-      <p:cxnSp>
-        <p:nvCxnSpPr>
-          <p:cNvPr id="25" name="Connettore 2 24">
-            <a:extLst>
-              <a:ext uri="{FF2B5EF4-FFF2-40B4-BE49-F238E27FC236}">
-                <a16:creationId xmlns:a16="http://schemas.microsoft.com/office/drawing/2014/main" id="{6F835C3D-4ECF-D9A7-9C5C-FBBDA9D0A097}"/>
-              </a:ext>
-            </a:extLst>
-          </p:cNvPr>
-          <p:cNvCxnSpPr>
-            <a:cxnSpLocks/>
-          </p:cNvCxnSpPr>
-          <p:nvPr/>
-        </p:nvCxnSpPr>
-        <p:spPr>
-          <a:xfrm flipV="1">
-            <a:off x="3006533" y="4836528"/>
-            <a:ext cx="0" cy="528973"/>
-          </a:xfrm>
-          <a:prstGeom prst="straightConnector1">
-            <a:avLst/>
-          </a:prstGeom>
-          <a:ln w="19050">
-            <a:tailEnd type="triangle"/>
-          </a:ln>
-        </p:spPr>
-        <p:style>
-          <a:lnRef idx="1">
-            <a:schemeClr val="accent1"/>
-          </a:lnRef>
-          <a:fillRef idx="0">
-            <a:schemeClr val="accent1"/>
-          </a:fillRef>
-          <a:effectRef idx="0">
-            <a:schemeClr val="accent1"/>
-          </a:effectRef>
-          <a:fontRef idx="minor">
-            <a:schemeClr val="tx1"/>
-          </a:fontRef>
-        </p:style>
-      </p:cxnSp>
-      <p:sp>
-        <p:nvSpPr>
-          <p:cNvPr id="27" name="CasellaDiTesto 26">
-            <a:extLst>
-              <a:ext uri="{FF2B5EF4-FFF2-40B4-BE49-F238E27FC236}">
-                <a16:creationId xmlns:a16="http://schemas.microsoft.com/office/drawing/2014/main" id="{E73EFEC8-E6ED-2282-1972-0A915E85455C}"/>
-              </a:ext>
-            </a:extLst>
-          </p:cNvPr>
-          <p:cNvSpPr txBox="1"/>
-          <p:nvPr/>
-        </p:nvSpPr>
-        <p:spPr>
-          <a:xfrm>
-            <a:off x="3064401" y="6220155"/>
-            <a:ext cx="892061" cy="259632"/>
-          </a:xfrm>
-          <a:prstGeom prst="rect">
-            <a:avLst/>
-          </a:prstGeom>
-          <a:noFill/>
-        </p:spPr>
-        <p:txBody>
-          <a:bodyPr wrap="square" rtlCol="0">
-            <a:spAutoFit/>
-          </a:bodyPr>
-          <a:lstStyle/>
-          <a:p>
-            <a:r>
-              <a:rPr lang="en-GB" dirty="0"/>
-              <a:t>u(t+1)</a:t>
-            </a:r>
-          </a:p>
-        </p:txBody>
-      </p:sp>
-      <p:sp>
-        <p:nvSpPr>
-          <p:cNvPr id="30" name="Ovale 29">
-            <a:extLst>
-              <a:ext uri="{FF2B5EF4-FFF2-40B4-BE49-F238E27FC236}">
-                <a16:creationId xmlns:a16="http://schemas.microsoft.com/office/drawing/2014/main" id="{E5587CEA-CD4B-C0A6-8B26-20151AD219CC}"/>
-              </a:ext>
-            </a:extLst>
-          </p:cNvPr>
-          <p:cNvSpPr/>
-          <p:nvPr/>
-        </p:nvSpPr>
-        <p:spPr>
-          <a:xfrm>
-            <a:off x="4136338" y="5333767"/>
-            <a:ext cx="636549" cy="616018"/>
-          </a:xfrm>
-          <a:prstGeom prst="ellipse">
-            <a:avLst/>
-          </a:prstGeom>
-        </p:spPr>
-        <p:style>
-          <a:lnRef idx="2">
-            <a:schemeClr val="accent1">
-              <a:shade val="15000"/>
-            </a:schemeClr>
-          </a:lnRef>
-          <a:fillRef idx="1">
-            <a:schemeClr val="accent1"/>
-          </a:fillRef>
-          <a:effectRef idx="0">
-            <a:schemeClr val="accent1"/>
-          </a:effectRef>
-          <a:fontRef idx="minor">
-            <a:schemeClr val="lt1"/>
-          </a:fontRef>
-        </p:style>
-        <p:txBody>
-          <a:bodyPr rtlCol="0" anchor="ctr"/>
-          <a:lstStyle/>
-          <a:p>
-            <a:pPr algn="ctr"/>
-            <a:endParaRPr lang="en-GB"/>
-          </a:p>
-        </p:txBody>
-      </p:sp>
-      <p:cxnSp>
-        <p:nvCxnSpPr>
-          <p:cNvPr id="32" name="Connettore 2 31">
-            <a:extLst>
-              <a:ext uri="{FF2B5EF4-FFF2-40B4-BE49-F238E27FC236}">
-                <a16:creationId xmlns:a16="http://schemas.microsoft.com/office/drawing/2014/main" id="{B81771DF-C952-C83F-3A46-A10564EFC41F}"/>
-              </a:ext>
-            </a:extLst>
-          </p:cNvPr>
-          <p:cNvCxnSpPr>
-            <a:cxnSpLocks/>
-            <a:endCxn id="30" idx="4"/>
-          </p:cNvCxnSpPr>
-          <p:nvPr/>
-        </p:nvCxnSpPr>
-        <p:spPr>
-          <a:xfrm flipV="1">
-            <a:off x="4454612" y="5949785"/>
-            <a:ext cx="0" cy="528973"/>
-          </a:xfrm>
-          <a:prstGeom prst="straightConnector1">
-            <a:avLst/>
-          </a:prstGeom>
-          <a:ln w="19050">
-            <a:tailEnd type="triangle"/>
-          </a:ln>
-        </p:spPr>
-        <p:style>
-          <a:lnRef idx="1">
-            <a:schemeClr val="accent1"/>
-          </a:lnRef>
-          <a:fillRef idx="0">
-            <a:schemeClr val="accent1"/>
-          </a:fillRef>
-          <a:effectRef idx="0">
-            <a:schemeClr val="accent1"/>
-          </a:effectRef>
-          <a:fontRef idx="minor">
-            <a:schemeClr val="tx1"/>
-          </a:fontRef>
-        </p:style>
-      </p:cxnSp>
-      <p:sp>
-        <p:nvSpPr>
-          <p:cNvPr id="34" name="CasellaDiTesto 33">
-            <a:extLst>
-              <a:ext uri="{FF2B5EF4-FFF2-40B4-BE49-F238E27FC236}">
-                <a16:creationId xmlns:a16="http://schemas.microsoft.com/office/drawing/2014/main" id="{8DAA5697-0FC3-0AF8-9C00-34022021247C}"/>
-              </a:ext>
-            </a:extLst>
-          </p:cNvPr>
-          <p:cNvSpPr txBox="1"/>
-          <p:nvPr/>
-        </p:nvSpPr>
-        <p:spPr>
-          <a:xfrm>
-            <a:off x="4504213" y="6220155"/>
-            <a:ext cx="892061" cy="259632"/>
-          </a:xfrm>
-          <a:prstGeom prst="rect">
-            <a:avLst/>
-          </a:prstGeom>
-          <a:noFill/>
-        </p:spPr>
-        <p:txBody>
-          <a:bodyPr wrap="square" rtlCol="0">
-            <a:spAutoFit/>
-          </a:bodyPr>
-          <a:lstStyle/>
-          <a:p>
-            <a:r>
-              <a:rPr lang="en-GB" dirty="0"/>
-              <a:t>u(t+2)</a:t>
-            </a:r>
-          </a:p>
-        </p:txBody>
-      </p:sp>
-      <p:cxnSp>
-        <p:nvCxnSpPr>
-          <p:cNvPr id="36" name="Connettore curvo 35">
-            <a:extLst>
-              <a:ext uri="{FF2B5EF4-FFF2-40B4-BE49-F238E27FC236}">
-                <a16:creationId xmlns:a16="http://schemas.microsoft.com/office/drawing/2014/main" id="{B7981AED-CE43-3F28-6033-F3EA51B85562}"/>
-              </a:ext>
-            </a:extLst>
-          </p:cNvPr>
-          <p:cNvCxnSpPr>
-            <a:cxnSpLocks/>
-          </p:cNvCxnSpPr>
-          <p:nvPr/>
-        </p:nvCxnSpPr>
-        <p:spPr>
-          <a:xfrm>
-            <a:off x="3225917" y="5416224"/>
-            <a:ext cx="946073" cy="384256"/>
-          </a:xfrm>
-          <a:prstGeom prst="curvedConnector4">
-            <a:avLst>
-              <a:gd name="adj1" fmla="val 45073"/>
-              <a:gd name="adj2" fmla="val 141821"/>
-            </a:avLst>
-          </a:prstGeom>
-          <a:ln>
-            <a:tailEnd type="triangle"/>
-          </a:ln>
-        </p:spPr>
-        <p:style>
-          <a:lnRef idx="1">
-            <a:schemeClr val="accent1"/>
-          </a:lnRef>
-          <a:fillRef idx="0">
-            <a:schemeClr val="accent1"/>
-          </a:fillRef>
-          <a:effectRef idx="0">
-            <a:schemeClr val="accent1"/>
-          </a:effectRef>
-          <a:fontRef idx="minor">
-            <a:schemeClr val="tx1"/>
-          </a:fontRef>
-        </p:style>
-      </p:cxnSp>
-      <p:sp>
-        <p:nvSpPr>
-          <p:cNvPr id="37" name="Ovale 36">
-            <a:extLst>
-              <a:ext uri="{FF2B5EF4-FFF2-40B4-BE49-F238E27FC236}">
-                <a16:creationId xmlns:a16="http://schemas.microsoft.com/office/drawing/2014/main" id="{B22C2DC9-C0EB-803A-DBA5-1DDAFD387EA7}"/>
-              </a:ext>
-            </a:extLst>
-          </p:cNvPr>
-          <p:cNvSpPr/>
-          <p:nvPr/>
-        </p:nvSpPr>
-        <p:spPr>
-          <a:xfrm>
-            <a:off x="6237499" y="5293592"/>
-            <a:ext cx="636549" cy="616018"/>
-          </a:xfrm>
-          <a:prstGeom prst="ellipse">
-            <a:avLst/>
-          </a:prstGeom>
-        </p:spPr>
-        <p:style>
-          <a:lnRef idx="2">
-            <a:schemeClr val="accent1">
-              <a:shade val="15000"/>
-            </a:schemeClr>
-          </a:lnRef>
-          <a:fillRef idx="1">
-            <a:schemeClr val="accent1"/>
-          </a:fillRef>
-          <a:effectRef idx="0">
-            <a:schemeClr val="accent1"/>
-          </a:effectRef>
-          <a:fontRef idx="minor">
-            <a:schemeClr val="lt1"/>
-          </a:fontRef>
-        </p:style>
-        <p:txBody>
-          <a:bodyPr rtlCol="0" anchor="ctr"/>
-          <a:lstStyle/>
-          <a:p>
-            <a:pPr algn="ctr"/>
-            <a:endParaRPr lang="en-GB"/>
-          </a:p>
-        </p:txBody>
-      </p:sp>
-      <p:cxnSp>
-        <p:nvCxnSpPr>
-          <p:cNvPr id="38" name="Connettore 2 37">
-            <a:extLst>
-              <a:ext uri="{FF2B5EF4-FFF2-40B4-BE49-F238E27FC236}">
-                <a16:creationId xmlns:a16="http://schemas.microsoft.com/office/drawing/2014/main" id="{D274A3E3-134E-5963-5B23-375C2F17363C}"/>
-              </a:ext>
-            </a:extLst>
-          </p:cNvPr>
-          <p:cNvCxnSpPr>
-            <a:cxnSpLocks/>
-            <a:endCxn id="37" idx="4"/>
-          </p:cNvCxnSpPr>
-          <p:nvPr/>
-        </p:nvCxnSpPr>
-        <p:spPr>
-          <a:xfrm flipV="1">
-            <a:off x="6555773" y="5909610"/>
-            <a:ext cx="0" cy="528973"/>
-          </a:xfrm>
-          <a:prstGeom prst="straightConnector1">
-            <a:avLst/>
-          </a:prstGeom>
-          <a:ln w="19050">
-            <a:tailEnd type="triangle"/>
-          </a:ln>
-        </p:spPr>
-        <p:style>
-          <a:lnRef idx="1">
-            <a:schemeClr val="accent1"/>
-          </a:lnRef>
-          <a:fillRef idx="0">
-            <a:schemeClr val="accent1"/>
-          </a:fillRef>
-          <a:effectRef idx="0">
-            <a:schemeClr val="accent1"/>
-          </a:effectRef>
-          <a:fontRef idx="minor">
-            <a:schemeClr val="tx1"/>
-          </a:fontRef>
-        </p:style>
-      </p:cxnSp>
-      <p:cxnSp>
-        <p:nvCxnSpPr>
-          <p:cNvPr id="39" name="Connettore 2 38">
-            <a:extLst>
-              <a:ext uri="{FF2B5EF4-FFF2-40B4-BE49-F238E27FC236}">
-                <a16:creationId xmlns:a16="http://schemas.microsoft.com/office/drawing/2014/main" id="{C4E21A79-4349-D129-D4FD-0FA16DBD9349}"/>
-              </a:ext>
-            </a:extLst>
-          </p:cNvPr>
-          <p:cNvCxnSpPr>
-            <a:cxnSpLocks/>
-          </p:cNvCxnSpPr>
-          <p:nvPr/>
-        </p:nvCxnSpPr>
-        <p:spPr>
-          <a:xfrm flipV="1">
-            <a:off x="6547506" y="4836528"/>
-            <a:ext cx="0" cy="528973"/>
-          </a:xfrm>
-          <a:prstGeom prst="straightConnector1">
-            <a:avLst/>
-          </a:prstGeom>
-          <a:ln w="19050">
-            <a:tailEnd type="triangle"/>
-          </a:ln>
-        </p:spPr>
-        <p:style>
-          <a:lnRef idx="1">
-            <a:schemeClr val="accent1"/>
-          </a:lnRef>
-          <a:fillRef idx="0">
-            <a:schemeClr val="accent1"/>
-          </a:fillRef>
-          <a:effectRef idx="0">
-            <a:schemeClr val="accent1"/>
-          </a:effectRef>
-          <a:fontRef idx="minor">
-            <a:schemeClr val="tx1"/>
-          </a:fontRef>
-        </p:style>
-      </p:cxnSp>
-      <p:cxnSp>
-        <p:nvCxnSpPr>
-          <p:cNvPr id="40" name="Connettore curvo 39">
-            <a:extLst>
-              <a:ext uri="{FF2B5EF4-FFF2-40B4-BE49-F238E27FC236}">
-                <a16:creationId xmlns:a16="http://schemas.microsoft.com/office/drawing/2014/main" id="{C978EC2D-C56F-528B-9CC6-C349BE3DEC61}"/>
-              </a:ext>
-            </a:extLst>
-          </p:cNvPr>
-          <p:cNvCxnSpPr>
-            <a:cxnSpLocks/>
-          </p:cNvCxnSpPr>
-          <p:nvPr/>
-        </p:nvCxnSpPr>
-        <p:spPr>
-          <a:xfrm flipV="1">
-            <a:off x="6033830" y="5805019"/>
-            <a:ext cx="282725" cy="144765"/>
-          </a:xfrm>
-          <a:prstGeom prst="curvedConnector3">
-            <a:avLst>
-              <a:gd name="adj1" fmla="val 50000"/>
-            </a:avLst>
-          </a:prstGeom>
-          <a:ln>
-            <a:tailEnd type="triangle"/>
-          </a:ln>
-        </p:spPr>
-        <p:style>
-          <a:lnRef idx="1">
-            <a:schemeClr val="accent1"/>
-          </a:lnRef>
-          <a:fillRef idx="0">
-            <a:schemeClr val="accent1"/>
-          </a:fillRef>
-          <a:effectRef idx="0">
-            <a:schemeClr val="accent1"/>
-          </a:effectRef>
-          <a:fontRef idx="minor">
-            <a:schemeClr val="tx1"/>
-          </a:fontRef>
-        </p:style>
-      </p:cxnSp>
-      <p:cxnSp>
-        <p:nvCxnSpPr>
-          <p:cNvPr id="41" name="Connettore curvo 40">
-            <a:extLst>
-              <a:ext uri="{FF2B5EF4-FFF2-40B4-BE49-F238E27FC236}">
-                <a16:creationId xmlns:a16="http://schemas.microsoft.com/office/drawing/2014/main" id="{69949907-95B6-42B7-7A8F-49A4F3DA2B80}"/>
-              </a:ext>
-            </a:extLst>
-          </p:cNvPr>
-          <p:cNvCxnSpPr>
-            <a:stCxn id="30" idx="7"/>
-          </p:cNvCxnSpPr>
-          <p:nvPr/>
-        </p:nvCxnSpPr>
-        <p:spPr>
-          <a:xfrm>
-            <a:off x="4732240" y="5451191"/>
-            <a:ext cx="661349" cy="642802"/>
-          </a:xfrm>
-          <a:prstGeom prst="curvedConnector3">
-            <a:avLst/>
-          </a:prstGeom>
-        </p:spPr>
-        <p:style>
-          <a:lnRef idx="1">
-            <a:schemeClr val="accent1"/>
-          </a:lnRef>
-          <a:fillRef idx="0">
-            <a:schemeClr val="accent1"/>
-          </a:fillRef>
-          <a:effectRef idx="0">
-            <a:schemeClr val="accent1"/>
-          </a:effectRef>
-          <a:fontRef idx="minor">
-            <a:schemeClr val="tx1"/>
-          </a:fontRef>
-        </p:style>
-      </p:cxnSp>
-      <p:sp>
-        <p:nvSpPr>
-          <p:cNvPr id="42" name="CasellaDiTesto 41">
-            <a:extLst>
-              <a:ext uri="{FF2B5EF4-FFF2-40B4-BE49-F238E27FC236}">
-                <a16:creationId xmlns:a16="http://schemas.microsoft.com/office/drawing/2014/main" id="{AE6620FA-A605-C136-B163-C595037A7E4B}"/>
-              </a:ext>
-            </a:extLst>
-          </p:cNvPr>
-          <p:cNvSpPr txBox="1"/>
-          <p:nvPr/>
-        </p:nvSpPr>
-        <p:spPr>
-          <a:xfrm>
-            <a:off x="5555992" y="5641776"/>
-            <a:ext cx="365119" cy="584172"/>
-          </a:xfrm>
-          <a:prstGeom prst="rect">
-            <a:avLst/>
-          </a:prstGeom>
-          <a:noFill/>
-        </p:spPr>
-        <p:txBody>
-          <a:bodyPr wrap="square" rtlCol="0">
-            <a:spAutoFit/>
-          </a:bodyPr>
-          <a:lstStyle/>
-          <a:p>
-            <a:endParaRPr lang="en-GB" sz="2400" dirty="0"/>
-          </a:p>
-          <a:p>
-            <a:r>
-              <a:rPr lang="en-GB" sz="2400" dirty="0">
-                <a:solidFill>
-                  <a:schemeClr val="accent1"/>
-                </a:solidFill>
-              </a:rPr>
-              <a:t>…</a:t>
-            </a:r>
-          </a:p>
-        </p:txBody>
-      </p:sp>
-      <p:cxnSp>
-        <p:nvCxnSpPr>
-          <p:cNvPr id="44" name="Connettore curvo 43">
-            <a:extLst>
-              <a:ext uri="{FF2B5EF4-FFF2-40B4-BE49-F238E27FC236}">
-                <a16:creationId xmlns:a16="http://schemas.microsoft.com/office/drawing/2014/main" id="{0EECC3E6-8A6A-D92C-3D4A-716F6E79C4B7}"/>
-              </a:ext>
-            </a:extLst>
-          </p:cNvPr>
-          <p:cNvCxnSpPr>
-            <a:cxnSpLocks/>
-          </p:cNvCxnSpPr>
-          <p:nvPr/>
-        </p:nvCxnSpPr>
-        <p:spPr>
-          <a:xfrm flipV="1">
-            <a:off x="1087871" y="5885476"/>
-            <a:ext cx="282725" cy="144765"/>
-          </a:xfrm>
-          <a:prstGeom prst="curvedConnector3">
-            <a:avLst>
-              <a:gd name="adj1" fmla="val 50000"/>
-            </a:avLst>
-          </a:prstGeom>
-          <a:ln>
-            <a:tailEnd type="triangle"/>
-          </a:ln>
-        </p:spPr>
-        <p:style>
-          <a:lnRef idx="1">
-            <a:schemeClr val="accent1"/>
-          </a:lnRef>
-          <a:fillRef idx="0">
-            <a:schemeClr val="accent1"/>
-          </a:fillRef>
-          <a:effectRef idx="0">
-            <a:schemeClr val="accent1"/>
-          </a:effectRef>
-          <a:fontRef idx="minor">
-            <a:schemeClr val="tx1"/>
-          </a:fontRef>
-        </p:style>
-      </p:cxnSp>
-      <p:sp>
-        <p:nvSpPr>
-          <p:cNvPr id="45" name="Ovale 44">
-            <a:extLst>
-              <a:ext uri="{FF2B5EF4-FFF2-40B4-BE49-F238E27FC236}">
-                <a16:creationId xmlns:a16="http://schemas.microsoft.com/office/drawing/2014/main" id="{8421945D-2121-6985-5809-63916BD9766A}"/>
-              </a:ext>
-            </a:extLst>
-          </p:cNvPr>
-          <p:cNvSpPr/>
-          <p:nvPr/>
-        </p:nvSpPr>
-        <p:spPr>
-          <a:xfrm>
-            <a:off x="1285661" y="1253894"/>
-            <a:ext cx="636549" cy="616018"/>
-          </a:xfrm>
-          <a:prstGeom prst="ellipse">
-            <a:avLst/>
-          </a:prstGeom>
-          <a:solidFill>
-            <a:srgbClr val="FF0000"/>
-          </a:solidFill>
-        </p:spPr>
-        <p:style>
-          <a:lnRef idx="2">
-            <a:schemeClr val="accent1">
-              <a:shade val="15000"/>
-            </a:schemeClr>
-          </a:lnRef>
-          <a:fillRef idx="1">
-            <a:schemeClr val="accent1"/>
-          </a:fillRef>
-          <a:effectRef idx="0">
-            <a:schemeClr val="accent1"/>
-          </a:effectRef>
-          <a:fontRef idx="minor">
-            <a:schemeClr val="lt1"/>
-          </a:fontRef>
-        </p:style>
-        <p:txBody>
-          <a:bodyPr rtlCol="0" anchor="ctr"/>
-          <a:lstStyle/>
-          <a:p>
-            <a:pPr algn="ctr"/>
-            <a:endParaRPr lang="en-GB"/>
-          </a:p>
-        </p:txBody>
-      </p:sp>
-      <p:sp>
-        <p:nvSpPr>
-          <p:cNvPr id="46" name="Ovale 45">
-            <a:extLst>
-              <a:ext uri="{FF2B5EF4-FFF2-40B4-BE49-F238E27FC236}">
-                <a16:creationId xmlns:a16="http://schemas.microsoft.com/office/drawing/2014/main" id="{F59D62A3-EC04-95CC-4BE5-89E868CE7725}"/>
-              </a:ext>
-            </a:extLst>
-          </p:cNvPr>
-          <p:cNvSpPr/>
-          <p:nvPr/>
-        </p:nvSpPr>
-        <p:spPr>
-          <a:xfrm>
-            <a:off x="2670671" y="1253894"/>
-            <a:ext cx="636549" cy="616018"/>
-          </a:xfrm>
-          <a:prstGeom prst="ellipse">
-            <a:avLst/>
-          </a:prstGeom>
-          <a:solidFill>
-            <a:srgbClr val="FF0000"/>
-          </a:solidFill>
-        </p:spPr>
-        <p:style>
-          <a:lnRef idx="2">
-            <a:schemeClr val="accent1">
-              <a:shade val="15000"/>
-            </a:schemeClr>
-          </a:lnRef>
-          <a:fillRef idx="1">
-            <a:schemeClr val="accent1"/>
-          </a:fillRef>
-          <a:effectRef idx="0">
-            <a:schemeClr val="accent1"/>
-          </a:effectRef>
-          <a:fontRef idx="minor">
-            <a:schemeClr val="lt1"/>
-          </a:fontRef>
-        </p:style>
-        <p:txBody>
-          <a:bodyPr rtlCol="0" anchor="ctr"/>
-          <a:lstStyle/>
-          <a:p>
-            <a:pPr algn="ctr"/>
-            <a:endParaRPr lang="en-GB"/>
-          </a:p>
-        </p:txBody>
-      </p:sp>
-      <p:sp>
-        <p:nvSpPr>
-          <p:cNvPr id="47" name="Ovale 46">
-            <a:extLst>
-              <a:ext uri="{FF2B5EF4-FFF2-40B4-BE49-F238E27FC236}">
-                <a16:creationId xmlns:a16="http://schemas.microsoft.com/office/drawing/2014/main" id="{E662B7CD-82F1-66F7-E9D0-C10E7452E9C9}"/>
-              </a:ext>
-            </a:extLst>
-          </p:cNvPr>
-          <p:cNvSpPr/>
-          <p:nvPr/>
-        </p:nvSpPr>
-        <p:spPr>
-          <a:xfrm>
-            <a:off x="4137840" y="1253894"/>
-            <a:ext cx="636549" cy="616018"/>
-          </a:xfrm>
-          <a:prstGeom prst="ellipse">
-            <a:avLst/>
-          </a:prstGeom>
-          <a:solidFill>
-            <a:srgbClr val="FF0000"/>
-          </a:solidFill>
-        </p:spPr>
-        <p:style>
-          <a:lnRef idx="2">
-            <a:schemeClr val="accent1">
-              <a:shade val="15000"/>
-            </a:schemeClr>
-          </a:lnRef>
-          <a:fillRef idx="1">
-            <a:schemeClr val="accent1"/>
-          </a:fillRef>
-          <a:effectRef idx="0">
-            <a:schemeClr val="accent1"/>
-          </a:effectRef>
-          <a:fontRef idx="minor">
-            <a:schemeClr val="lt1"/>
-          </a:fontRef>
-        </p:style>
-        <p:txBody>
-          <a:bodyPr rtlCol="0" anchor="ctr"/>
-          <a:lstStyle/>
-          <a:p>
-            <a:pPr algn="ctr"/>
-            <a:endParaRPr lang="en-GB"/>
-          </a:p>
-        </p:txBody>
-      </p:sp>
-      <p:sp>
-        <p:nvSpPr>
-          <p:cNvPr id="48" name="Ovale 47">
-            <a:extLst>
-              <a:ext uri="{FF2B5EF4-FFF2-40B4-BE49-F238E27FC236}">
-                <a16:creationId xmlns:a16="http://schemas.microsoft.com/office/drawing/2014/main" id="{E068CB8F-2F13-64B7-044B-B2A97933F66B}"/>
-              </a:ext>
-            </a:extLst>
-          </p:cNvPr>
-          <p:cNvSpPr/>
-          <p:nvPr/>
-        </p:nvSpPr>
-        <p:spPr>
-          <a:xfrm>
-            <a:off x="6204473" y="1253894"/>
-            <a:ext cx="636549" cy="616018"/>
-          </a:xfrm>
-          <a:prstGeom prst="ellipse">
-            <a:avLst/>
-          </a:prstGeom>
-          <a:solidFill>
-            <a:srgbClr val="FF0000"/>
-          </a:solidFill>
-        </p:spPr>
-        <p:style>
-          <a:lnRef idx="2">
-            <a:schemeClr val="accent1">
-              <a:shade val="15000"/>
-            </a:schemeClr>
-          </a:lnRef>
-          <a:fillRef idx="1">
-            <a:schemeClr val="accent1"/>
-          </a:fillRef>
-          <a:effectRef idx="0">
-            <a:schemeClr val="accent1"/>
-          </a:effectRef>
-          <a:fontRef idx="minor">
-            <a:schemeClr val="lt1"/>
-          </a:fontRef>
-        </p:style>
-        <p:txBody>
-          <a:bodyPr rtlCol="0" anchor="ctr"/>
-          <a:lstStyle/>
-          <a:p>
-            <a:pPr algn="ctr"/>
-            <a:endParaRPr lang="en-GB"/>
-          </a:p>
-        </p:txBody>
-      </p:sp>
-      <p:cxnSp>
-        <p:nvCxnSpPr>
-          <p:cNvPr id="49" name="Connettore 2 48">
-            <a:extLst>
-              <a:ext uri="{FF2B5EF4-FFF2-40B4-BE49-F238E27FC236}">
-                <a16:creationId xmlns:a16="http://schemas.microsoft.com/office/drawing/2014/main" id="{9BB78E08-3C0A-265B-420A-594425D014BB}"/>
-              </a:ext>
-            </a:extLst>
-          </p:cNvPr>
-          <p:cNvCxnSpPr>
-            <a:cxnSpLocks/>
-          </p:cNvCxnSpPr>
-          <p:nvPr/>
-        </p:nvCxnSpPr>
-        <p:spPr>
-          <a:xfrm flipV="1">
-            <a:off x="1601197" y="963938"/>
-            <a:ext cx="0" cy="280676"/>
-          </a:xfrm>
-          <a:prstGeom prst="straightConnector1">
-            <a:avLst/>
-          </a:prstGeom>
-          <a:ln w="19050">
-            <a:tailEnd type="triangle"/>
-          </a:ln>
-        </p:spPr>
-        <p:style>
-          <a:lnRef idx="1">
-            <a:schemeClr val="accent1"/>
-          </a:lnRef>
-          <a:fillRef idx="0">
-            <a:schemeClr val="accent1"/>
-          </a:fillRef>
-          <a:effectRef idx="0">
-            <a:schemeClr val="accent1"/>
-          </a:effectRef>
-          <a:fontRef idx="minor">
-            <a:schemeClr val="tx1"/>
-          </a:fontRef>
-        </p:style>
-      </p:cxnSp>
-      <p:cxnSp>
-        <p:nvCxnSpPr>
-          <p:cNvPr id="50" name="Connettore 2 49">
-            <a:extLst>
-              <a:ext uri="{FF2B5EF4-FFF2-40B4-BE49-F238E27FC236}">
-                <a16:creationId xmlns:a16="http://schemas.microsoft.com/office/drawing/2014/main" id="{61E0798B-1D59-7C43-5EB6-14A369002B68}"/>
-              </a:ext>
-            </a:extLst>
-          </p:cNvPr>
-          <p:cNvCxnSpPr>
-            <a:cxnSpLocks/>
-          </p:cNvCxnSpPr>
-          <p:nvPr/>
-        </p:nvCxnSpPr>
-        <p:spPr>
-          <a:xfrm flipV="1">
-            <a:off x="2982595" y="963938"/>
-            <a:ext cx="0" cy="280676"/>
-          </a:xfrm>
-          <a:prstGeom prst="straightConnector1">
-            <a:avLst/>
-          </a:prstGeom>
-          <a:ln w="19050">
-            <a:tailEnd type="triangle"/>
-          </a:ln>
-        </p:spPr>
-        <p:style>
-          <a:lnRef idx="1">
-            <a:schemeClr val="accent1"/>
-          </a:lnRef>
-          <a:fillRef idx="0">
-            <a:schemeClr val="accent1"/>
-          </a:fillRef>
-          <a:effectRef idx="0">
-            <a:schemeClr val="accent1"/>
-          </a:effectRef>
-          <a:fontRef idx="minor">
-            <a:schemeClr val="tx1"/>
-          </a:fontRef>
-        </p:style>
-      </p:cxnSp>
-      <p:cxnSp>
-        <p:nvCxnSpPr>
-          <p:cNvPr id="51" name="Connettore 2 50">
-            <a:extLst>
-              <a:ext uri="{FF2B5EF4-FFF2-40B4-BE49-F238E27FC236}">
-                <a16:creationId xmlns:a16="http://schemas.microsoft.com/office/drawing/2014/main" id="{C2639F12-733C-1C55-EB8A-1E1E74AE3FB8}"/>
-              </a:ext>
-            </a:extLst>
-          </p:cNvPr>
-          <p:cNvCxnSpPr>
-            <a:cxnSpLocks/>
-          </p:cNvCxnSpPr>
-          <p:nvPr/>
-        </p:nvCxnSpPr>
-        <p:spPr>
-          <a:xfrm flipV="1">
-            <a:off x="4456875" y="963938"/>
-            <a:ext cx="0" cy="280676"/>
-          </a:xfrm>
-          <a:prstGeom prst="straightConnector1">
-            <a:avLst/>
-          </a:prstGeom>
-          <a:ln w="19050">
-            <a:tailEnd type="triangle"/>
-          </a:ln>
-        </p:spPr>
-        <p:style>
-          <a:lnRef idx="1">
-            <a:schemeClr val="accent1"/>
-          </a:lnRef>
-          <a:fillRef idx="0">
-            <a:schemeClr val="accent1"/>
-          </a:fillRef>
-          <a:effectRef idx="0">
-            <a:schemeClr val="accent1"/>
-          </a:effectRef>
-          <a:fontRef idx="minor">
-            <a:schemeClr val="tx1"/>
-          </a:fontRef>
-        </p:style>
-      </p:cxnSp>
-      <p:cxnSp>
-        <p:nvCxnSpPr>
-          <p:cNvPr id="52" name="Connettore 2 51">
-            <a:extLst>
-              <a:ext uri="{FF2B5EF4-FFF2-40B4-BE49-F238E27FC236}">
-                <a16:creationId xmlns:a16="http://schemas.microsoft.com/office/drawing/2014/main" id="{42C189F0-EF6B-F000-DF26-C9664535E561}"/>
-              </a:ext>
-            </a:extLst>
-          </p:cNvPr>
-          <p:cNvCxnSpPr>
-            <a:cxnSpLocks/>
-          </p:cNvCxnSpPr>
-          <p:nvPr/>
-        </p:nvCxnSpPr>
-        <p:spPr>
-          <a:xfrm flipV="1">
-            <a:off x="6522747" y="963938"/>
-            <a:ext cx="0" cy="280676"/>
-          </a:xfrm>
-          <a:prstGeom prst="straightConnector1">
-            <a:avLst/>
-          </a:prstGeom>
-          <a:ln w="19050">
-            <a:tailEnd type="triangle"/>
-          </a:ln>
-        </p:spPr>
-        <p:style>
-          <a:lnRef idx="1">
-            <a:schemeClr val="accent1"/>
-          </a:lnRef>
-          <a:fillRef idx="0">
-            <a:schemeClr val="accent1"/>
-          </a:fillRef>
-          <a:effectRef idx="0">
-            <a:schemeClr val="accent1"/>
-          </a:effectRef>
-          <a:fontRef idx="minor">
-            <a:schemeClr val="tx1"/>
-          </a:fontRef>
-        </p:style>
-      </p:cxnSp>
-      <p:sp>
-        <p:nvSpPr>
-          <p:cNvPr id="53" name="Ovale 52">
-            <a:extLst>
-              <a:ext uri="{FF2B5EF4-FFF2-40B4-BE49-F238E27FC236}">
-                <a16:creationId xmlns:a16="http://schemas.microsoft.com/office/drawing/2014/main" id="{BB0C4E40-5359-E0EE-82EA-D92464B0D38B}"/>
-              </a:ext>
-            </a:extLst>
-          </p:cNvPr>
-          <p:cNvSpPr/>
-          <p:nvPr/>
-        </p:nvSpPr>
-        <p:spPr>
-          <a:xfrm>
-            <a:off x="1304937" y="4202367"/>
-            <a:ext cx="636549" cy="616018"/>
-          </a:xfrm>
-          <a:prstGeom prst="ellipse">
-            <a:avLst/>
-          </a:prstGeom>
-          <a:solidFill>
-            <a:schemeClr val="accent6">
-              <a:lumMod val="75000"/>
-            </a:schemeClr>
-          </a:solidFill>
-        </p:spPr>
-        <p:style>
-          <a:lnRef idx="2">
-            <a:schemeClr val="accent1">
-              <a:shade val="15000"/>
-            </a:schemeClr>
-          </a:lnRef>
-          <a:fillRef idx="1">
-            <a:schemeClr val="accent1"/>
-          </a:fillRef>
-          <a:effectRef idx="0">
-            <a:schemeClr val="accent1"/>
-          </a:effectRef>
-          <a:fontRef idx="minor">
-            <a:schemeClr val="lt1"/>
-          </a:fontRef>
-        </p:style>
-        <p:txBody>
-          <a:bodyPr rtlCol="0" anchor="ctr"/>
-          <a:lstStyle/>
-          <a:p>
-            <a:pPr algn="ctr"/>
-            <a:endParaRPr lang="en-GB"/>
-          </a:p>
-        </p:txBody>
-      </p:sp>
-      <p:cxnSp>
-        <p:nvCxnSpPr>
-          <p:cNvPr id="56" name="Connettore curvo 55">
-            <a:extLst>
-              <a:ext uri="{FF2B5EF4-FFF2-40B4-BE49-F238E27FC236}">
-                <a16:creationId xmlns:a16="http://schemas.microsoft.com/office/drawing/2014/main" id="{15714CD2-946A-2CF2-78CF-36BAE4FC7830}"/>
-              </a:ext>
-            </a:extLst>
-          </p:cNvPr>
-          <p:cNvCxnSpPr>
-            <a:cxnSpLocks/>
-          </p:cNvCxnSpPr>
-          <p:nvPr/>
-        </p:nvCxnSpPr>
-        <p:spPr>
-          <a:xfrm>
-            <a:off x="1851400" y="4317364"/>
-            <a:ext cx="946073" cy="384256"/>
-          </a:xfrm>
-          <a:prstGeom prst="curvedConnector4">
-            <a:avLst>
-              <a:gd name="adj1" fmla="val 45073"/>
-              <a:gd name="adj2" fmla="val 141821"/>
-            </a:avLst>
-          </a:prstGeom>
-          <a:ln>
-            <a:tailEnd type="triangle"/>
-          </a:ln>
-        </p:spPr>
-        <p:style>
-          <a:lnRef idx="1">
-            <a:schemeClr val="accent1"/>
-          </a:lnRef>
-          <a:fillRef idx="0">
-            <a:schemeClr val="accent1"/>
-          </a:fillRef>
-          <a:effectRef idx="0">
-            <a:schemeClr val="accent1"/>
-          </a:effectRef>
-          <a:fontRef idx="minor">
-            <a:schemeClr val="tx1"/>
-          </a:fontRef>
-        </p:style>
-      </p:cxnSp>
-      <p:sp>
-        <p:nvSpPr>
-          <p:cNvPr id="59" name="Ovale 58">
-            <a:extLst>
-              <a:ext uri="{FF2B5EF4-FFF2-40B4-BE49-F238E27FC236}">
-                <a16:creationId xmlns:a16="http://schemas.microsoft.com/office/drawing/2014/main" id="{A9926AC5-40E9-2CB3-CE26-0B8AC09FB736}"/>
-              </a:ext>
-            </a:extLst>
-          </p:cNvPr>
-          <p:cNvSpPr/>
-          <p:nvPr/>
-        </p:nvSpPr>
-        <p:spPr>
-          <a:xfrm>
-            <a:off x="2696526" y="4202367"/>
-            <a:ext cx="636549" cy="616018"/>
-          </a:xfrm>
-          <a:prstGeom prst="ellipse">
-            <a:avLst/>
-          </a:prstGeom>
-          <a:solidFill>
-            <a:schemeClr val="accent6">
-              <a:lumMod val="75000"/>
-            </a:schemeClr>
-          </a:solidFill>
-        </p:spPr>
-        <p:style>
-          <a:lnRef idx="2">
-            <a:schemeClr val="accent1">
-              <a:shade val="15000"/>
-            </a:schemeClr>
-          </a:lnRef>
-          <a:fillRef idx="1">
-            <a:schemeClr val="accent1"/>
-          </a:fillRef>
-          <a:effectRef idx="0">
-            <a:schemeClr val="accent1"/>
-          </a:effectRef>
-          <a:fontRef idx="minor">
-            <a:schemeClr val="lt1"/>
-          </a:fontRef>
-        </p:style>
-        <p:txBody>
-          <a:bodyPr rtlCol="0" anchor="ctr"/>
-          <a:lstStyle/>
-          <a:p>
-            <a:pPr algn="ctr"/>
-            <a:endParaRPr lang="en-GB"/>
-          </a:p>
-        </p:txBody>
-      </p:sp>
-      <p:sp>
-        <p:nvSpPr>
-          <p:cNvPr id="64" name="Ovale 63">
-            <a:extLst>
-              <a:ext uri="{FF2B5EF4-FFF2-40B4-BE49-F238E27FC236}">
-                <a16:creationId xmlns:a16="http://schemas.microsoft.com/office/drawing/2014/main" id="{CB44E34D-1202-8940-514E-0C0AB1A76279}"/>
-              </a:ext>
-            </a:extLst>
-          </p:cNvPr>
-          <p:cNvSpPr/>
-          <p:nvPr/>
-        </p:nvSpPr>
-        <p:spPr>
-          <a:xfrm>
-            <a:off x="4136338" y="4202367"/>
-            <a:ext cx="636549" cy="616018"/>
-          </a:xfrm>
-          <a:prstGeom prst="ellipse">
-            <a:avLst/>
-          </a:prstGeom>
-          <a:solidFill>
-            <a:schemeClr val="accent6">
-              <a:lumMod val="75000"/>
-            </a:schemeClr>
-          </a:solidFill>
-        </p:spPr>
-        <p:style>
-          <a:lnRef idx="2">
-            <a:schemeClr val="accent1">
-              <a:shade val="15000"/>
-            </a:schemeClr>
-          </a:lnRef>
-          <a:fillRef idx="1">
-            <a:schemeClr val="accent1"/>
-          </a:fillRef>
-          <a:effectRef idx="0">
-            <a:schemeClr val="accent1"/>
-          </a:effectRef>
-          <a:fontRef idx="minor">
-            <a:schemeClr val="lt1"/>
-          </a:fontRef>
-        </p:style>
-        <p:txBody>
-          <a:bodyPr rtlCol="0" anchor="ctr"/>
-          <a:lstStyle/>
-          <a:p>
-            <a:pPr algn="ctr"/>
-            <a:endParaRPr lang="en-GB"/>
-          </a:p>
-        </p:txBody>
-      </p:sp>
-      <p:cxnSp>
-        <p:nvCxnSpPr>
-          <p:cNvPr id="65" name="Connettore 2 64">
-            <a:extLst>
-              <a:ext uri="{FF2B5EF4-FFF2-40B4-BE49-F238E27FC236}">
-                <a16:creationId xmlns:a16="http://schemas.microsoft.com/office/drawing/2014/main" id="{EBAEF4C6-EE3F-4D97-7402-7274D1BFC8EE}"/>
-              </a:ext>
-            </a:extLst>
-          </p:cNvPr>
-          <p:cNvCxnSpPr>
-            <a:cxnSpLocks/>
-          </p:cNvCxnSpPr>
-          <p:nvPr/>
-        </p:nvCxnSpPr>
-        <p:spPr>
-          <a:xfrm flipV="1">
-            <a:off x="4454612" y="4836528"/>
-            <a:ext cx="0" cy="528973"/>
-          </a:xfrm>
-          <a:prstGeom prst="straightConnector1">
-            <a:avLst/>
-          </a:prstGeom>
-          <a:ln w="19050">
-            <a:tailEnd type="triangle"/>
-          </a:ln>
-        </p:spPr>
-        <p:style>
-          <a:lnRef idx="1">
-            <a:schemeClr val="accent1"/>
-          </a:lnRef>
-          <a:fillRef idx="0">
-            <a:schemeClr val="accent1"/>
-          </a:fillRef>
-          <a:effectRef idx="0">
-            <a:schemeClr val="accent1"/>
-          </a:effectRef>
-          <a:fontRef idx="minor">
-            <a:schemeClr val="tx1"/>
-          </a:fontRef>
-        </p:style>
-      </p:cxnSp>
-      <p:cxnSp>
-        <p:nvCxnSpPr>
-          <p:cNvPr id="69" name="Connettore curvo 68">
-            <a:extLst>
-              <a:ext uri="{FF2B5EF4-FFF2-40B4-BE49-F238E27FC236}">
-                <a16:creationId xmlns:a16="http://schemas.microsoft.com/office/drawing/2014/main" id="{4C2EAFC1-C6E2-A0C6-BF31-BF29E6A80AB2}"/>
-              </a:ext>
-            </a:extLst>
-          </p:cNvPr>
-          <p:cNvCxnSpPr>
-            <a:cxnSpLocks/>
-          </p:cNvCxnSpPr>
-          <p:nvPr/>
-        </p:nvCxnSpPr>
-        <p:spPr>
-          <a:xfrm>
-            <a:off x="3225917" y="4264969"/>
-            <a:ext cx="946073" cy="384256"/>
-          </a:xfrm>
-          <a:prstGeom prst="curvedConnector4">
-            <a:avLst>
-              <a:gd name="adj1" fmla="val 45073"/>
-              <a:gd name="adj2" fmla="val 141821"/>
-            </a:avLst>
-          </a:prstGeom>
-          <a:ln>
-            <a:tailEnd type="triangle"/>
-          </a:ln>
-        </p:spPr>
-        <p:style>
-          <a:lnRef idx="1">
-            <a:schemeClr val="accent1"/>
-          </a:lnRef>
-          <a:fillRef idx="0">
-            <a:schemeClr val="accent1"/>
-          </a:fillRef>
-          <a:effectRef idx="0">
-            <a:schemeClr val="accent1"/>
-          </a:effectRef>
-          <a:fontRef idx="minor">
-            <a:schemeClr val="tx1"/>
-          </a:fontRef>
-        </p:style>
-      </p:cxnSp>
-      <p:sp>
-        <p:nvSpPr>
-          <p:cNvPr id="70" name="Ovale 69">
-            <a:extLst>
-              <a:ext uri="{FF2B5EF4-FFF2-40B4-BE49-F238E27FC236}">
-                <a16:creationId xmlns:a16="http://schemas.microsoft.com/office/drawing/2014/main" id="{2454338D-8959-341D-781F-C8FF44B1933F}"/>
-              </a:ext>
-            </a:extLst>
-          </p:cNvPr>
-          <p:cNvSpPr/>
-          <p:nvPr/>
-        </p:nvSpPr>
-        <p:spPr>
-          <a:xfrm>
-            <a:off x="6237499" y="4202367"/>
-            <a:ext cx="636549" cy="616018"/>
-          </a:xfrm>
-          <a:prstGeom prst="ellipse">
-            <a:avLst/>
-          </a:prstGeom>
-          <a:solidFill>
-            <a:schemeClr val="accent6">
-              <a:lumMod val="75000"/>
-            </a:schemeClr>
-          </a:solidFill>
-        </p:spPr>
-        <p:style>
-          <a:lnRef idx="2">
-            <a:schemeClr val="accent1">
-              <a:shade val="15000"/>
-            </a:schemeClr>
-          </a:lnRef>
-          <a:fillRef idx="1">
-            <a:schemeClr val="accent1"/>
-          </a:fillRef>
-          <a:effectRef idx="0">
-            <a:schemeClr val="accent1"/>
-          </a:effectRef>
-          <a:fontRef idx="minor">
-            <a:schemeClr val="lt1"/>
-          </a:fontRef>
-        </p:style>
-        <p:txBody>
-          <a:bodyPr rtlCol="0" anchor="ctr"/>
-          <a:lstStyle/>
-          <a:p>
-            <a:pPr algn="ctr"/>
-            <a:endParaRPr lang="en-GB"/>
-          </a:p>
-        </p:txBody>
-      </p:sp>
-      <p:cxnSp>
-        <p:nvCxnSpPr>
-          <p:cNvPr id="73" name="Connettore curvo 72">
-            <a:extLst>
-              <a:ext uri="{FF2B5EF4-FFF2-40B4-BE49-F238E27FC236}">
-                <a16:creationId xmlns:a16="http://schemas.microsoft.com/office/drawing/2014/main" id="{6CBCAFE0-6E37-E4C7-F48D-52993A2B4304}"/>
-              </a:ext>
-            </a:extLst>
-          </p:cNvPr>
-          <p:cNvCxnSpPr>
-            <a:cxnSpLocks/>
-          </p:cNvCxnSpPr>
-          <p:nvPr/>
-        </p:nvCxnSpPr>
-        <p:spPr>
-          <a:xfrm flipV="1">
-            <a:off x="6033830" y="4653764"/>
-            <a:ext cx="282725" cy="144765"/>
-          </a:xfrm>
-          <a:prstGeom prst="curvedConnector3">
-            <a:avLst>
-              <a:gd name="adj1" fmla="val 50000"/>
-            </a:avLst>
-          </a:prstGeom>
-          <a:ln>
-            <a:tailEnd type="triangle"/>
-          </a:ln>
-        </p:spPr>
-        <p:style>
-          <a:lnRef idx="1">
-            <a:schemeClr val="accent1"/>
-          </a:lnRef>
-          <a:fillRef idx="0">
-            <a:schemeClr val="accent1"/>
-          </a:fillRef>
-          <a:effectRef idx="0">
-            <a:schemeClr val="accent1"/>
-          </a:effectRef>
-          <a:fontRef idx="minor">
-            <a:schemeClr val="tx1"/>
-          </a:fontRef>
-        </p:style>
-      </p:cxnSp>
-      <p:cxnSp>
-        <p:nvCxnSpPr>
-          <p:cNvPr id="74" name="Connettore curvo 73">
-            <a:extLst>
-              <a:ext uri="{FF2B5EF4-FFF2-40B4-BE49-F238E27FC236}">
-                <a16:creationId xmlns:a16="http://schemas.microsoft.com/office/drawing/2014/main" id="{66AA88A0-B8E6-FAB2-A02F-1B52A3EC85A3}"/>
-              </a:ext>
-            </a:extLst>
-          </p:cNvPr>
-          <p:cNvCxnSpPr>
-            <a:stCxn id="64" idx="7"/>
-          </p:cNvCxnSpPr>
-          <p:nvPr/>
-        </p:nvCxnSpPr>
-        <p:spPr>
-          <a:xfrm rot="16200000" flipH="1">
-            <a:off x="4721709" y="4250538"/>
-            <a:ext cx="629837" cy="713922"/>
-          </a:xfrm>
-          <a:prstGeom prst="curvedConnector4">
-            <a:avLst>
-              <a:gd name="adj1" fmla="val -36295"/>
-              <a:gd name="adj2" fmla="val 56529"/>
-            </a:avLst>
-          </a:prstGeom>
-        </p:spPr>
-        <p:style>
-          <a:lnRef idx="1">
-            <a:schemeClr val="accent1"/>
-          </a:lnRef>
-          <a:fillRef idx="0">
-            <a:schemeClr val="accent1"/>
-          </a:fillRef>
-          <a:effectRef idx="0">
-            <a:schemeClr val="accent1"/>
-          </a:effectRef>
-          <a:fontRef idx="minor">
-            <a:schemeClr val="tx1"/>
-          </a:fontRef>
-        </p:style>
-      </p:cxnSp>
-      <p:sp>
-        <p:nvSpPr>
-          <p:cNvPr id="75" name="CasellaDiTesto 74">
-            <a:extLst>
-              <a:ext uri="{FF2B5EF4-FFF2-40B4-BE49-F238E27FC236}">
-                <a16:creationId xmlns:a16="http://schemas.microsoft.com/office/drawing/2014/main" id="{7106D374-46B5-D888-AFBE-7AD3E5472365}"/>
-              </a:ext>
-            </a:extLst>
-          </p:cNvPr>
-          <p:cNvSpPr txBox="1"/>
-          <p:nvPr/>
-        </p:nvSpPr>
-        <p:spPr>
-          <a:xfrm>
-            <a:off x="5555992" y="4328596"/>
-            <a:ext cx="365119" cy="584172"/>
-          </a:xfrm>
-          <a:prstGeom prst="rect">
-            <a:avLst/>
-          </a:prstGeom>
-          <a:noFill/>
-        </p:spPr>
-        <p:txBody>
-          <a:bodyPr wrap="square" rtlCol="0">
-            <a:spAutoFit/>
-          </a:bodyPr>
-          <a:lstStyle/>
-          <a:p>
-            <a:endParaRPr lang="en-GB" sz="2400" dirty="0"/>
-          </a:p>
-          <a:p>
-            <a:r>
-              <a:rPr lang="en-GB" sz="2400" dirty="0">
-                <a:solidFill>
-                  <a:schemeClr val="accent1"/>
-                </a:solidFill>
-              </a:rPr>
-              <a:t>…</a:t>
-            </a:r>
-          </a:p>
-        </p:txBody>
-      </p:sp>
-      <p:cxnSp>
-        <p:nvCxnSpPr>
-          <p:cNvPr id="77" name="Connettore curvo 76">
-            <a:extLst>
-              <a:ext uri="{FF2B5EF4-FFF2-40B4-BE49-F238E27FC236}">
-                <a16:creationId xmlns:a16="http://schemas.microsoft.com/office/drawing/2014/main" id="{AD268A17-E8A0-B27F-88E0-AF60EF000BF2}"/>
-              </a:ext>
-            </a:extLst>
-          </p:cNvPr>
-          <p:cNvCxnSpPr>
-            <a:cxnSpLocks/>
-          </p:cNvCxnSpPr>
-          <p:nvPr/>
-        </p:nvCxnSpPr>
-        <p:spPr>
-          <a:xfrm flipV="1">
-            <a:off x="1087871" y="4734221"/>
-            <a:ext cx="282725" cy="144765"/>
-          </a:xfrm>
-          <a:prstGeom prst="curvedConnector3">
-            <a:avLst>
-              <a:gd name="adj1" fmla="val 50000"/>
-            </a:avLst>
-          </a:prstGeom>
-          <a:ln>
-            <a:tailEnd type="triangle"/>
-          </a:ln>
-        </p:spPr>
-        <p:style>
-          <a:lnRef idx="1">
-            <a:schemeClr val="accent1"/>
-          </a:lnRef>
-          <a:fillRef idx="0">
-            <a:schemeClr val="accent1"/>
-          </a:fillRef>
-          <a:effectRef idx="0">
-            <a:schemeClr val="accent1"/>
-          </a:effectRef>
-          <a:fontRef idx="minor">
-            <a:schemeClr val="tx1"/>
-          </a:fontRef>
-        </p:style>
-      </p:cxnSp>
-      <p:sp>
-        <p:nvSpPr>
-          <p:cNvPr id="78" name="Ovale 77">
-            <a:extLst>
-              <a:ext uri="{FF2B5EF4-FFF2-40B4-BE49-F238E27FC236}">
-                <a16:creationId xmlns:a16="http://schemas.microsoft.com/office/drawing/2014/main" id="{78C6AAFC-C863-9E66-E381-CE3B77063062}"/>
-              </a:ext>
-            </a:extLst>
-          </p:cNvPr>
-          <p:cNvSpPr/>
-          <p:nvPr/>
-        </p:nvSpPr>
-        <p:spPr>
-          <a:xfrm>
-            <a:off x="1304937" y="2363407"/>
-            <a:ext cx="636549" cy="616018"/>
-          </a:xfrm>
-          <a:prstGeom prst="ellipse">
-            <a:avLst/>
-          </a:prstGeom>
-          <a:solidFill>
-            <a:srgbClr val="FFC000"/>
-          </a:solidFill>
-        </p:spPr>
-        <p:style>
-          <a:lnRef idx="2">
-            <a:schemeClr val="accent1">
-              <a:shade val="15000"/>
-            </a:schemeClr>
-          </a:lnRef>
-          <a:fillRef idx="1">
-            <a:schemeClr val="accent1"/>
-          </a:fillRef>
-          <a:effectRef idx="0">
-            <a:schemeClr val="accent1"/>
-          </a:effectRef>
-          <a:fontRef idx="minor">
-            <a:schemeClr val="lt1"/>
-          </a:fontRef>
-        </p:style>
-        <p:txBody>
-          <a:bodyPr rtlCol="0" anchor="ctr"/>
-          <a:lstStyle/>
-          <a:p>
-            <a:pPr algn="ctr"/>
-            <a:endParaRPr lang="en-GB"/>
-          </a:p>
-        </p:txBody>
-      </p:sp>
-      <p:cxnSp>
-        <p:nvCxnSpPr>
-          <p:cNvPr id="79" name="Connettore 2 78">
-            <a:extLst>
-              <a:ext uri="{FF2B5EF4-FFF2-40B4-BE49-F238E27FC236}">
-                <a16:creationId xmlns:a16="http://schemas.microsoft.com/office/drawing/2014/main" id="{B5F720E8-CEFB-2B5E-F89B-BEF39104EE12}"/>
-              </a:ext>
-            </a:extLst>
-          </p:cNvPr>
-          <p:cNvCxnSpPr>
-            <a:cxnSpLocks/>
-          </p:cNvCxnSpPr>
-          <p:nvPr/>
-        </p:nvCxnSpPr>
-        <p:spPr>
-          <a:xfrm flipV="1">
-            <a:off x="1614944" y="1856473"/>
-            <a:ext cx="0" cy="528973"/>
-          </a:xfrm>
-          <a:prstGeom prst="straightConnector1">
-            <a:avLst/>
-          </a:prstGeom>
-          <a:ln w="19050">
-            <a:tailEnd type="triangle"/>
-          </a:ln>
-        </p:spPr>
-        <p:style>
-          <a:lnRef idx="1">
-            <a:schemeClr val="accent1"/>
-          </a:lnRef>
-          <a:fillRef idx="0">
-            <a:schemeClr val="accent1"/>
-          </a:fillRef>
-          <a:effectRef idx="0">
-            <a:schemeClr val="accent1"/>
-          </a:effectRef>
-          <a:fontRef idx="minor">
-            <a:schemeClr val="tx1"/>
-          </a:fontRef>
-        </p:style>
-      </p:cxnSp>
-      <p:cxnSp>
-        <p:nvCxnSpPr>
-          <p:cNvPr id="80" name="Connettore curvo 79">
-            <a:extLst>
-              <a:ext uri="{FF2B5EF4-FFF2-40B4-BE49-F238E27FC236}">
-                <a16:creationId xmlns:a16="http://schemas.microsoft.com/office/drawing/2014/main" id="{02A7662B-6D65-CC89-7A98-004F462D9BF8}"/>
-              </a:ext>
-            </a:extLst>
-          </p:cNvPr>
-          <p:cNvCxnSpPr>
-            <a:cxnSpLocks/>
-          </p:cNvCxnSpPr>
-          <p:nvPr/>
-        </p:nvCxnSpPr>
-        <p:spPr>
-          <a:xfrm>
-            <a:off x="1851400" y="2447924"/>
-            <a:ext cx="946073" cy="384256"/>
-          </a:xfrm>
-          <a:prstGeom prst="curvedConnector4">
-            <a:avLst>
-              <a:gd name="adj1" fmla="val 45073"/>
-              <a:gd name="adj2" fmla="val 141821"/>
-            </a:avLst>
-          </a:prstGeom>
-          <a:ln>
-            <a:tailEnd type="triangle"/>
-          </a:ln>
-        </p:spPr>
-        <p:style>
-          <a:lnRef idx="1">
-            <a:schemeClr val="accent1"/>
-          </a:lnRef>
-          <a:fillRef idx="0">
-            <a:schemeClr val="accent1"/>
-          </a:fillRef>
-          <a:effectRef idx="0">
-            <a:schemeClr val="accent1"/>
-          </a:effectRef>
-          <a:fontRef idx="minor">
-            <a:schemeClr val="tx1"/>
-          </a:fontRef>
-        </p:style>
-      </p:cxnSp>
-      <p:sp>
-        <p:nvSpPr>
-          <p:cNvPr id="81" name="Ovale 80">
-            <a:extLst>
-              <a:ext uri="{FF2B5EF4-FFF2-40B4-BE49-F238E27FC236}">
-                <a16:creationId xmlns:a16="http://schemas.microsoft.com/office/drawing/2014/main" id="{84470CE4-48CE-E5C1-89B3-D1BF3EAE5C70}"/>
-              </a:ext>
-            </a:extLst>
-          </p:cNvPr>
-          <p:cNvSpPr/>
-          <p:nvPr/>
-        </p:nvSpPr>
-        <p:spPr>
-          <a:xfrm>
-            <a:off x="2696526" y="2363407"/>
-            <a:ext cx="636549" cy="616018"/>
-          </a:xfrm>
-          <a:prstGeom prst="ellipse">
-            <a:avLst/>
-          </a:prstGeom>
-          <a:solidFill>
-            <a:srgbClr val="FFC000"/>
-          </a:solidFill>
-        </p:spPr>
-        <p:style>
-          <a:lnRef idx="2">
-            <a:schemeClr val="accent1">
-              <a:shade val="15000"/>
-            </a:schemeClr>
-          </a:lnRef>
-          <a:fillRef idx="1">
-            <a:schemeClr val="accent1"/>
-          </a:fillRef>
-          <a:effectRef idx="0">
-            <a:schemeClr val="accent1"/>
-          </a:effectRef>
-          <a:fontRef idx="minor">
-            <a:schemeClr val="lt1"/>
-          </a:fontRef>
-        </p:style>
-        <p:txBody>
-          <a:bodyPr rtlCol="0" anchor="ctr"/>
-          <a:lstStyle/>
-          <a:p>
-            <a:pPr algn="ctr"/>
-            <a:endParaRPr lang="en-GB"/>
-          </a:p>
-        </p:txBody>
-      </p:sp>
-      <p:cxnSp>
-        <p:nvCxnSpPr>
-          <p:cNvPr id="82" name="Connettore 2 81">
-            <a:extLst>
-              <a:ext uri="{FF2B5EF4-FFF2-40B4-BE49-F238E27FC236}">
-                <a16:creationId xmlns:a16="http://schemas.microsoft.com/office/drawing/2014/main" id="{359A3340-EE77-9301-A72E-E1C1497B282B}"/>
-              </a:ext>
-            </a:extLst>
-          </p:cNvPr>
-          <p:cNvCxnSpPr>
-            <a:cxnSpLocks/>
-          </p:cNvCxnSpPr>
-          <p:nvPr/>
-        </p:nvCxnSpPr>
-        <p:spPr>
-          <a:xfrm flipV="1">
-            <a:off x="3006533" y="1836153"/>
-            <a:ext cx="0" cy="528973"/>
-          </a:xfrm>
-          <a:prstGeom prst="straightConnector1">
-            <a:avLst/>
-          </a:prstGeom>
-          <a:ln w="19050">
-            <a:tailEnd type="triangle"/>
-          </a:ln>
-        </p:spPr>
-        <p:style>
-          <a:lnRef idx="1">
-            <a:schemeClr val="accent1"/>
-          </a:lnRef>
-          <a:fillRef idx="0">
-            <a:schemeClr val="accent1"/>
-          </a:fillRef>
-          <a:effectRef idx="0">
-            <a:schemeClr val="accent1"/>
-          </a:effectRef>
-          <a:fontRef idx="minor">
-            <a:schemeClr val="tx1"/>
-          </a:fontRef>
-        </p:style>
-      </p:cxnSp>
-      <p:sp>
-        <p:nvSpPr>
-          <p:cNvPr id="83" name="Ovale 82">
-            <a:extLst>
-              <a:ext uri="{FF2B5EF4-FFF2-40B4-BE49-F238E27FC236}">
-                <a16:creationId xmlns:a16="http://schemas.microsoft.com/office/drawing/2014/main" id="{5025E6A1-5E46-1CBA-DDCD-1307886E16B4}"/>
-              </a:ext>
-            </a:extLst>
-          </p:cNvPr>
-          <p:cNvSpPr/>
-          <p:nvPr/>
-        </p:nvSpPr>
-        <p:spPr>
-          <a:xfrm>
-            <a:off x="4136338" y="2363407"/>
-            <a:ext cx="636549" cy="616018"/>
-          </a:xfrm>
-          <a:prstGeom prst="ellipse">
-            <a:avLst/>
-          </a:prstGeom>
-          <a:solidFill>
-            <a:srgbClr val="FFC000"/>
-          </a:solidFill>
-        </p:spPr>
-        <p:style>
-          <a:lnRef idx="2">
-            <a:schemeClr val="accent1">
-              <a:shade val="15000"/>
-            </a:schemeClr>
-          </a:lnRef>
-          <a:fillRef idx="1">
-            <a:schemeClr val="accent1"/>
-          </a:fillRef>
-          <a:effectRef idx="0">
-            <a:schemeClr val="accent1"/>
-          </a:effectRef>
-          <a:fontRef idx="minor">
-            <a:schemeClr val="lt1"/>
-          </a:fontRef>
-        </p:style>
-        <p:txBody>
-          <a:bodyPr rtlCol="0" anchor="ctr"/>
-          <a:lstStyle/>
-          <a:p>
-            <a:pPr algn="ctr"/>
-            <a:endParaRPr lang="en-GB"/>
-          </a:p>
-        </p:txBody>
-      </p:sp>
-      <p:cxnSp>
-        <p:nvCxnSpPr>
-          <p:cNvPr id="84" name="Connettore 2 83">
-            <a:extLst>
-              <a:ext uri="{FF2B5EF4-FFF2-40B4-BE49-F238E27FC236}">
-                <a16:creationId xmlns:a16="http://schemas.microsoft.com/office/drawing/2014/main" id="{8B13A5DB-3CA0-7FA2-BDCA-7AB94E61597A}"/>
-              </a:ext>
-            </a:extLst>
-          </p:cNvPr>
-          <p:cNvCxnSpPr>
-            <a:cxnSpLocks/>
-          </p:cNvCxnSpPr>
-          <p:nvPr/>
-        </p:nvCxnSpPr>
-        <p:spPr>
-          <a:xfrm flipV="1">
-            <a:off x="4446345" y="1836153"/>
-            <a:ext cx="0" cy="528973"/>
-          </a:xfrm>
-          <a:prstGeom prst="straightConnector1">
-            <a:avLst/>
-          </a:prstGeom>
-          <a:ln w="19050">
-            <a:tailEnd type="triangle"/>
-          </a:ln>
-        </p:spPr>
-        <p:style>
-          <a:lnRef idx="1">
-            <a:schemeClr val="accent1"/>
-          </a:lnRef>
-          <a:fillRef idx="0">
-            <a:schemeClr val="accent1"/>
-          </a:fillRef>
-          <a:effectRef idx="0">
-            <a:schemeClr val="accent1"/>
-          </a:effectRef>
-          <a:fontRef idx="minor">
-            <a:schemeClr val="tx1"/>
-          </a:fontRef>
-        </p:style>
-      </p:cxnSp>
-      <p:cxnSp>
-        <p:nvCxnSpPr>
-          <p:cNvPr id="85" name="Connettore curvo 84">
-            <a:extLst>
-              <a:ext uri="{FF2B5EF4-FFF2-40B4-BE49-F238E27FC236}">
-                <a16:creationId xmlns:a16="http://schemas.microsoft.com/office/drawing/2014/main" id="{BCB4B77D-A800-2537-EA0B-32049572B8A7}"/>
-              </a:ext>
-            </a:extLst>
-          </p:cNvPr>
-          <p:cNvCxnSpPr>
-            <a:cxnSpLocks/>
-          </p:cNvCxnSpPr>
-          <p:nvPr/>
-        </p:nvCxnSpPr>
-        <p:spPr>
-          <a:xfrm>
-            <a:off x="3215757" y="2395529"/>
-            <a:ext cx="946073" cy="384256"/>
-          </a:xfrm>
-          <a:prstGeom prst="curvedConnector4">
-            <a:avLst>
-              <a:gd name="adj1" fmla="val 45073"/>
-              <a:gd name="adj2" fmla="val 141821"/>
-            </a:avLst>
-          </a:prstGeom>
-          <a:ln>
-            <a:tailEnd type="triangle"/>
-          </a:ln>
-        </p:spPr>
-        <p:style>
-          <a:lnRef idx="1">
-            <a:schemeClr val="accent1"/>
-          </a:lnRef>
-          <a:fillRef idx="0">
-            <a:schemeClr val="accent1"/>
-          </a:fillRef>
-          <a:effectRef idx="0">
-            <a:schemeClr val="accent1"/>
-          </a:effectRef>
-          <a:fontRef idx="minor">
-            <a:schemeClr val="tx1"/>
-          </a:fontRef>
-        </p:style>
-      </p:cxnSp>
-      <p:sp>
-        <p:nvSpPr>
-          <p:cNvPr id="86" name="Ovale 85">
-            <a:extLst>
-              <a:ext uri="{FF2B5EF4-FFF2-40B4-BE49-F238E27FC236}">
-                <a16:creationId xmlns:a16="http://schemas.microsoft.com/office/drawing/2014/main" id="{FB31463F-57E0-0B42-8091-4CAC569CD41C}"/>
-              </a:ext>
-            </a:extLst>
-          </p:cNvPr>
-          <p:cNvSpPr/>
-          <p:nvPr/>
-        </p:nvSpPr>
-        <p:spPr>
-          <a:xfrm>
-            <a:off x="6237499" y="2363407"/>
-            <a:ext cx="636549" cy="616018"/>
-          </a:xfrm>
-          <a:prstGeom prst="ellipse">
-            <a:avLst/>
-          </a:prstGeom>
-          <a:solidFill>
-            <a:srgbClr val="FFC000"/>
-          </a:solidFill>
-        </p:spPr>
-        <p:style>
-          <a:lnRef idx="2">
-            <a:schemeClr val="accent1">
-              <a:shade val="15000"/>
-            </a:schemeClr>
-          </a:lnRef>
-          <a:fillRef idx="1">
-            <a:schemeClr val="accent1"/>
-          </a:fillRef>
-          <a:effectRef idx="0">
-            <a:schemeClr val="accent1"/>
-          </a:effectRef>
-          <a:fontRef idx="minor">
-            <a:schemeClr val="lt1"/>
-          </a:fontRef>
-        </p:style>
-        <p:txBody>
-          <a:bodyPr rtlCol="0" anchor="ctr"/>
-          <a:lstStyle/>
-          <a:p>
-            <a:pPr algn="ctr"/>
-            <a:endParaRPr lang="en-GB"/>
-          </a:p>
-        </p:txBody>
-      </p:sp>
-      <p:cxnSp>
-        <p:nvCxnSpPr>
-          <p:cNvPr id="87" name="Connettore curvo 86">
-            <a:extLst>
-              <a:ext uri="{FF2B5EF4-FFF2-40B4-BE49-F238E27FC236}">
-                <a16:creationId xmlns:a16="http://schemas.microsoft.com/office/drawing/2014/main" id="{F9A2CB5C-CD92-43D7-B249-DE2CB90D2DF1}"/>
-              </a:ext>
-            </a:extLst>
-          </p:cNvPr>
-          <p:cNvCxnSpPr>
-            <a:cxnSpLocks/>
-          </p:cNvCxnSpPr>
-          <p:nvPr/>
-        </p:nvCxnSpPr>
-        <p:spPr>
-          <a:xfrm flipV="1">
-            <a:off x="6003350" y="2784324"/>
-            <a:ext cx="282725" cy="144765"/>
-          </a:xfrm>
-          <a:prstGeom prst="curvedConnector3">
-            <a:avLst>
-              <a:gd name="adj1" fmla="val 50000"/>
-            </a:avLst>
-          </a:prstGeom>
-          <a:ln>
-            <a:tailEnd type="triangle"/>
-          </a:ln>
-        </p:spPr>
-        <p:style>
-          <a:lnRef idx="1">
-            <a:schemeClr val="accent1"/>
-          </a:lnRef>
-          <a:fillRef idx="0">
-            <a:schemeClr val="accent1"/>
-          </a:fillRef>
-          <a:effectRef idx="0">
-            <a:schemeClr val="accent1"/>
-          </a:effectRef>
-          <a:fontRef idx="minor">
-            <a:schemeClr val="tx1"/>
-          </a:fontRef>
-        </p:style>
-      </p:cxnSp>
-      <p:cxnSp>
-        <p:nvCxnSpPr>
-          <p:cNvPr id="88" name="Connettore curvo 87">
-            <a:extLst>
-              <a:ext uri="{FF2B5EF4-FFF2-40B4-BE49-F238E27FC236}">
-                <a16:creationId xmlns:a16="http://schemas.microsoft.com/office/drawing/2014/main" id="{79778581-148F-7203-2D28-66787FFE3CDF}"/>
-              </a:ext>
-            </a:extLst>
-          </p:cNvPr>
-          <p:cNvCxnSpPr>
-            <a:stCxn id="83" idx="7"/>
-          </p:cNvCxnSpPr>
-          <p:nvPr/>
-        </p:nvCxnSpPr>
-        <p:spPr>
-          <a:xfrm rot="16200000" flipH="1">
-            <a:off x="4721709" y="2411579"/>
-            <a:ext cx="629836" cy="713921"/>
-          </a:xfrm>
-          <a:prstGeom prst="curvedConnector4">
-            <a:avLst>
-              <a:gd name="adj1" fmla="val -36295"/>
-              <a:gd name="adj2" fmla="val 56529"/>
-            </a:avLst>
-          </a:prstGeom>
-        </p:spPr>
-        <p:style>
-          <a:lnRef idx="1">
-            <a:schemeClr val="accent1"/>
-          </a:lnRef>
-          <a:fillRef idx="0">
-            <a:schemeClr val="accent1"/>
-          </a:fillRef>
-          <a:effectRef idx="0">
-            <a:schemeClr val="accent1"/>
-          </a:effectRef>
-          <a:fontRef idx="minor">
-            <a:schemeClr val="tx1"/>
-          </a:fontRef>
-        </p:style>
-      </p:cxnSp>
-      <p:sp>
-        <p:nvSpPr>
-          <p:cNvPr id="89" name="CasellaDiTesto 88">
-            <a:extLst>
-              <a:ext uri="{FF2B5EF4-FFF2-40B4-BE49-F238E27FC236}">
-                <a16:creationId xmlns:a16="http://schemas.microsoft.com/office/drawing/2014/main" id="{B24DBAC6-F825-403D-E4BD-1A7C77CA683B}"/>
-              </a:ext>
-            </a:extLst>
-          </p:cNvPr>
-          <p:cNvSpPr txBox="1"/>
-          <p:nvPr/>
-        </p:nvSpPr>
-        <p:spPr>
-          <a:xfrm>
-            <a:off x="5555992" y="2459156"/>
-            <a:ext cx="365119" cy="584172"/>
-          </a:xfrm>
-          <a:prstGeom prst="rect">
-            <a:avLst/>
-          </a:prstGeom>
-          <a:noFill/>
-        </p:spPr>
-        <p:txBody>
-          <a:bodyPr wrap="square" rtlCol="0">
-            <a:spAutoFit/>
-          </a:bodyPr>
-          <a:lstStyle/>
-          <a:p>
-            <a:endParaRPr lang="en-GB" sz="2400" dirty="0"/>
-          </a:p>
-          <a:p>
-            <a:r>
-              <a:rPr lang="en-GB" sz="2400" dirty="0">
-                <a:solidFill>
-                  <a:schemeClr val="accent1"/>
-                </a:solidFill>
-              </a:rPr>
-              <a:t>…</a:t>
-            </a:r>
-          </a:p>
-        </p:txBody>
-      </p:sp>
-      <p:cxnSp>
-        <p:nvCxnSpPr>
-          <p:cNvPr id="90" name="Connettore curvo 89">
-            <a:extLst>
-              <a:ext uri="{FF2B5EF4-FFF2-40B4-BE49-F238E27FC236}">
-                <a16:creationId xmlns:a16="http://schemas.microsoft.com/office/drawing/2014/main" id="{DF2F3444-7681-A0C5-41A3-603B84E19077}"/>
-              </a:ext>
-            </a:extLst>
-          </p:cNvPr>
-          <p:cNvCxnSpPr>
-            <a:cxnSpLocks/>
-          </p:cNvCxnSpPr>
-          <p:nvPr/>
-        </p:nvCxnSpPr>
-        <p:spPr>
-          <a:xfrm flipV="1">
-            <a:off x="1087871" y="2864781"/>
-            <a:ext cx="282725" cy="144765"/>
-          </a:xfrm>
-          <a:prstGeom prst="curvedConnector3">
-            <a:avLst>
-              <a:gd name="adj1" fmla="val 50000"/>
-            </a:avLst>
-          </a:prstGeom>
-          <a:ln>
-            <a:tailEnd type="triangle"/>
-          </a:ln>
-        </p:spPr>
-        <p:style>
-          <a:lnRef idx="1">
-            <a:schemeClr val="accent1"/>
-          </a:lnRef>
-          <a:fillRef idx="0">
-            <a:schemeClr val="accent1"/>
-          </a:fillRef>
-          <a:effectRef idx="0">
-            <a:schemeClr val="accent1"/>
-          </a:effectRef>
-          <a:fontRef idx="minor">
-            <a:schemeClr val="tx1"/>
-          </a:fontRef>
-        </p:style>
-      </p:cxnSp>
-      <p:cxnSp>
-        <p:nvCxnSpPr>
-          <p:cNvPr id="91" name="Connettore 2 90">
-            <a:extLst>
-              <a:ext uri="{FF2B5EF4-FFF2-40B4-BE49-F238E27FC236}">
-                <a16:creationId xmlns:a16="http://schemas.microsoft.com/office/drawing/2014/main" id="{0BCD7F15-04FE-E9FA-519D-999A724D2663}"/>
-              </a:ext>
-            </a:extLst>
-          </p:cNvPr>
-          <p:cNvCxnSpPr>
-            <a:cxnSpLocks/>
-          </p:cNvCxnSpPr>
-          <p:nvPr/>
-        </p:nvCxnSpPr>
-        <p:spPr>
-          <a:xfrm flipV="1">
-            <a:off x="6547506" y="1836153"/>
-            <a:ext cx="0" cy="528973"/>
-          </a:xfrm>
-          <a:prstGeom prst="straightConnector1">
-            <a:avLst/>
-          </a:prstGeom>
-          <a:ln w="19050">
-            <a:tailEnd type="triangle"/>
-          </a:ln>
-        </p:spPr>
-        <p:style>
-          <a:lnRef idx="1">
-            <a:schemeClr val="accent1"/>
-          </a:lnRef>
-          <a:fillRef idx="0">
-            <a:schemeClr val="accent1"/>
-          </a:fillRef>
-          <a:effectRef idx="0">
-            <a:schemeClr val="accent1"/>
-          </a:effectRef>
-          <a:fontRef idx="minor">
-            <a:schemeClr val="tx1"/>
-          </a:fontRef>
-        </p:style>
-      </p:cxnSp>
-      <p:cxnSp>
-        <p:nvCxnSpPr>
-          <p:cNvPr id="94" name="Connettore 2 93">
-            <a:extLst>
-              <a:ext uri="{FF2B5EF4-FFF2-40B4-BE49-F238E27FC236}">
-                <a16:creationId xmlns:a16="http://schemas.microsoft.com/office/drawing/2014/main" id="{2F2424BF-92C7-F12E-8189-DDBD1987922C}"/>
-              </a:ext>
-            </a:extLst>
-          </p:cNvPr>
-          <p:cNvCxnSpPr>
-            <a:cxnSpLocks/>
-          </p:cNvCxnSpPr>
-          <p:nvPr/>
-        </p:nvCxnSpPr>
-        <p:spPr>
-          <a:xfrm flipV="1">
-            <a:off x="3006533" y="2979550"/>
-            <a:ext cx="0" cy="280676"/>
-          </a:xfrm>
-          <a:prstGeom prst="straightConnector1">
-            <a:avLst/>
-          </a:prstGeom>
-          <a:ln w="19050">
-            <a:tailEnd type="triangle"/>
-          </a:ln>
-        </p:spPr>
-        <p:style>
-          <a:lnRef idx="1">
-            <a:schemeClr val="accent1"/>
-          </a:lnRef>
-          <a:fillRef idx="0">
-            <a:schemeClr val="accent1"/>
-          </a:fillRef>
-          <a:effectRef idx="0">
-            <a:schemeClr val="accent1"/>
-          </a:effectRef>
-          <a:fontRef idx="minor">
-            <a:schemeClr val="tx1"/>
-          </a:fontRef>
-        </p:style>
-      </p:cxnSp>
-      <p:cxnSp>
-        <p:nvCxnSpPr>
-          <p:cNvPr id="97" name="Connettore 2 96">
-            <a:extLst>
-              <a:ext uri="{FF2B5EF4-FFF2-40B4-BE49-F238E27FC236}">
-                <a16:creationId xmlns:a16="http://schemas.microsoft.com/office/drawing/2014/main" id="{C7528D9D-2705-3AAE-3099-C2167EFFCE42}"/>
-              </a:ext>
-            </a:extLst>
-          </p:cNvPr>
-          <p:cNvCxnSpPr>
-            <a:cxnSpLocks/>
-          </p:cNvCxnSpPr>
-          <p:nvPr/>
-        </p:nvCxnSpPr>
-        <p:spPr>
-          <a:xfrm flipV="1">
-            <a:off x="4454612" y="2979550"/>
-            <a:ext cx="0" cy="280676"/>
-          </a:xfrm>
-          <a:prstGeom prst="straightConnector1">
-            <a:avLst/>
-          </a:prstGeom>
-          <a:ln w="19050">
-            <a:tailEnd type="triangle"/>
-          </a:ln>
-        </p:spPr>
-        <p:style>
-          <a:lnRef idx="1">
-            <a:schemeClr val="accent1"/>
-          </a:lnRef>
-          <a:fillRef idx="0">
-            <a:schemeClr val="accent1"/>
-          </a:fillRef>
-          <a:effectRef idx="0">
-            <a:schemeClr val="accent1"/>
-          </a:effectRef>
-          <a:fontRef idx="minor">
-            <a:schemeClr val="tx1"/>
-          </a:fontRef>
-        </p:style>
-      </p:cxnSp>
-      <p:cxnSp>
-        <p:nvCxnSpPr>
-          <p:cNvPr id="98" name="Connettore 2 97">
-            <a:extLst>
-              <a:ext uri="{FF2B5EF4-FFF2-40B4-BE49-F238E27FC236}">
-                <a16:creationId xmlns:a16="http://schemas.microsoft.com/office/drawing/2014/main" id="{22298B0C-7800-CCAA-3569-931ABB7BA6E2}"/>
-              </a:ext>
-            </a:extLst>
-          </p:cNvPr>
-          <p:cNvCxnSpPr>
-            <a:cxnSpLocks/>
-          </p:cNvCxnSpPr>
-          <p:nvPr/>
-        </p:nvCxnSpPr>
-        <p:spPr>
-          <a:xfrm flipV="1">
-            <a:off x="1614944" y="2979550"/>
-            <a:ext cx="0" cy="280676"/>
-          </a:xfrm>
-          <a:prstGeom prst="straightConnector1">
-            <a:avLst/>
-          </a:prstGeom>
-          <a:ln w="19050">
-            <a:tailEnd type="triangle"/>
-          </a:ln>
-        </p:spPr>
-        <p:style>
-          <a:lnRef idx="1">
-            <a:schemeClr val="accent1"/>
-          </a:lnRef>
-          <a:fillRef idx="0">
-            <a:schemeClr val="accent1"/>
-          </a:fillRef>
-          <a:effectRef idx="0">
-            <a:schemeClr val="accent1"/>
-          </a:effectRef>
-          <a:fontRef idx="minor">
-            <a:schemeClr val="tx1"/>
-          </a:fontRef>
-        </p:style>
-      </p:cxnSp>
-      <p:cxnSp>
-        <p:nvCxnSpPr>
-          <p:cNvPr id="99" name="Connettore 2 98">
-            <a:extLst>
-              <a:ext uri="{FF2B5EF4-FFF2-40B4-BE49-F238E27FC236}">
-                <a16:creationId xmlns:a16="http://schemas.microsoft.com/office/drawing/2014/main" id="{9466FD11-3353-5EC8-A5D1-87979B9C9F51}"/>
-              </a:ext>
-            </a:extLst>
-          </p:cNvPr>
-          <p:cNvCxnSpPr>
-            <a:cxnSpLocks/>
-          </p:cNvCxnSpPr>
-          <p:nvPr/>
-        </p:nvCxnSpPr>
-        <p:spPr>
-          <a:xfrm flipV="1">
-            <a:off x="6547506" y="2979550"/>
-            <a:ext cx="0" cy="280676"/>
-          </a:xfrm>
-          <a:prstGeom prst="straightConnector1">
-            <a:avLst/>
-          </a:prstGeom>
-          <a:ln w="19050">
-            <a:tailEnd type="triangle"/>
-          </a:ln>
-        </p:spPr>
-        <p:style>
-          <a:lnRef idx="1">
-            <a:schemeClr val="accent1"/>
-          </a:lnRef>
-          <a:fillRef idx="0">
-            <a:schemeClr val="accent1"/>
-          </a:fillRef>
-          <a:effectRef idx="0">
-            <a:schemeClr val="accent1"/>
-          </a:effectRef>
-          <a:fontRef idx="minor">
-            <a:schemeClr val="tx1"/>
-          </a:fontRef>
-        </p:style>
-      </p:cxnSp>
-      <p:cxnSp>
-        <p:nvCxnSpPr>
-          <p:cNvPr id="100" name="Connettore 2 99">
-            <a:extLst>
-              <a:ext uri="{FF2B5EF4-FFF2-40B4-BE49-F238E27FC236}">
-                <a16:creationId xmlns:a16="http://schemas.microsoft.com/office/drawing/2014/main" id="{9A09EE08-05B4-08C3-C37A-FBDF3D97E18B}"/>
-              </a:ext>
-            </a:extLst>
-          </p:cNvPr>
-          <p:cNvCxnSpPr>
-            <a:cxnSpLocks/>
-          </p:cNvCxnSpPr>
-          <p:nvPr/>
-        </p:nvCxnSpPr>
-        <p:spPr>
-          <a:xfrm flipV="1">
-            <a:off x="1614944" y="3916680"/>
-            <a:ext cx="0" cy="280676"/>
-          </a:xfrm>
-          <a:prstGeom prst="straightConnector1">
-            <a:avLst/>
-          </a:prstGeom>
-          <a:ln w="19050">
-            <a:tailEnd type="triangle"/>
-          </a:ln>
-        </p:spPr>
-        <p:style>
-          <a:lnRef idx="1">
-            <a:schemeClr val="accent1"/>
-          </a:lnRef>
-          <a:fillRef idx="0">
-            <a:schemeClr val="accent1"/>
-          </a:fillRef>
-          <a:effectRef idx="0">
-            <a:schemeClr val="accent1"/>
-          </a:effectRef>
-          <a:fontRef idx="minor">
-            <a:schemeClr val="tx1"/>
-          </a:fontRef>
-        </p:style>
-      </p:cxnSp>
-      <p:cxnSp>
-        <p:nvCxnSpPr>
-          <p:cNvPr id="102" name="Connettore 2 101">
-            <a:extLst>
-              <a:ext uri="{FF2B5EF4-FFF2-40B4-BE49-F238E27FC236}">
-                <a16:creationId xmlns:a16="http://schemas.microsoft.com/office/drawing/2014/main" id="{A799D370-DF67-937D-94BB-9C9B84353626}"/>
-              </a:ext>
-            </a:extLst>
-          </p:cNvPr>
-          <p:cNvCxnSpPr>
-            <a:cxnSpLocks/>
-          </p:cNvCxnSpPr>
-          <p:nvPr/>
-        </p:nvCxnSpPr>
-        <p:spPr>
-          <a:xfrm flipV="1">
-            <a:off x="3006533" y="3916680"/>
-            <a:ext cx="0" cy="280676"/>
-          </a:xfrm>
-          <a:prstGeom prst="straightConnector1">
-            <a:avLst/>
-          </a:prstGeom>
-          <a:ln w="19050">
-            <a:tailEnd type="triangle"/>
-          </a:ln>
-        </p:spPr>
-        <p:style>
-          <a:lnRef idx="1">
-            <a:schemeClr val="accent1"/>
-          </a:lnRef>
-          <a:fillRef idx="0">
-            <a:schemeClr val="accent1"/>
-          </a:fillRef>
-          <a:effectRef idx="0">
-            <a:schemeClr val="accent1"/>
-          </a:effectRef>
-          <a:fontRef idx="minor">
-            <a:schemeClr val="tx1"/>
-          </a:fontRef>
-        </p:style>
-      </p:cxnSp>
-      <p:cxnSp>
-        <p:nvCxnSpPr>
-          <p:cNvPr id="103" name="Connettore 2 102">
-            <a:extLst>
-              <a:ext uri="{FF2B5EF4-FFF2-40B4-BE49-F238E27FC236}">
-                <a16:creationId xmlns:a16="http://schemas.microsoft.com/office/drawing/2014/main" id="{774D6403-5967-7638-37F9-093A7FA5B801}"/>
-              </a:ext>
-            </a:extLst>
-          </p:cNvPr>
-          <p:cNvCxnSpPr>
-            <a:cxnSpLocks/>
-          </p:cNvCxnSpPr>
-          <p:nvPr/>
-        </p:nvCxnSpPr>
-        <p:spPr>
-          <a:xfrm flipV="1">
-            <a:off x="4454612" y="3916680"/>
-            <a:ext cx="0" cy="280676"/>
-          </a:xfrm>
-          <a:prstGeom prst="straightConnector1">
-            <a:avLst/>
-          </a:prstGeom>
-          <a:ln w="19050">
-            <a:tailEnd type="triangle"/>
-          </a:ln>
-        </p:spPr>
-        <p:style>
-          <a:lnRef idx="1">
-            <a:schemeClr val="accent1"/>
-          </a:lnRef>
-          <a:fillRef idx="0">
-            <a:schemeClr val="accent1"/>
-          </a:fillRef>
-          <a:effectRef idx="0">
-            <a:schemeClr val="accent1"/>
-          </a:effectRef>
-          <a:fontRef idx="minor">
-            <a:schemeClr val="tx1"/>
-          </a:fontRef>
-        </p:style>
-      </p:cxnSp>
-      <p:cxnSp>
-        <p:nvCxnSpPr>
-          <p:cNvPr id="104" name="Connettore 2 103">
-            <a:extLst>
-              <a:ext uri="{FF2B5EF4-FFF2-40B4-BE49-F238E27FC236}">
-                <a16:creationId xmlns:a16="http://schemas.microsoft.com/office/drawing/2014/main" id="{9E9A3CFF-0E7E-CBF4-D412-2DE2848AA5D5}"/>
-              </a:ext>
-            </a:extLst>
-          </p:cNvPr>
-          <p:cNvCxnSpPr>
-            <a:cxnSpLocks/>
-          </p:cNvCxnSpPr>
-          <p:nvPr/>
-        </p:nvCxnSpPr>
-        <p:spPr>
-          <a:xfrm flipV="1">
-            <a:off x="6547506" y="3916680"/>
-            <a:ext cx="0" cy="280676"/>
-          </a:xfrm>
-          <a:prstGeom prst="straightConnector1">
-            <a:avLst/>
-          </a:prstGeom>
-          <a:ln w="19050">
-            <a:tailEnd type="triangle"/>
-          </a:ln>
-        </p:spPr>
-        <p:style>
-          <a:lnRef idx="1">
-            <a:schemeClr val="accent1"/>
-          </a:lnRef>
-          <a:fillRef idx="0">
-            <a:schemeClr val="accent1"/>
-          </a:fillRef>
-          <a:effectRef idx="0">
-            <a:schemeClr val="accent1"/>
-          </a:effectRef>
-          <a:fontRef idx="minor">
-            <a:schemeClr val="tx1"/>
-          </a:fontRef>
-        </p:style>
-      </p:cxnSp>
-      <p:sp>
-        <p:nvSpPr>
-          <p:cNvPr id="105" name="CasellaDiTesto 104">
-            <a:extLst>
-              <a:ext uri="{FF2B5EF4-FFF2-40B4-BE49-F238E27FC236}">
-                <a16:creationId xmlns:a16="http://schemas.microsoft.com/office/drawing/2014/main" id="{6E892699-E6A0-0852-485B-7F44A0E7CF27}"/>
-              </a:ext>
-            </a:extLst>
-          </p:cNvPr>
-          <p:cNvSpPr txBox="1"/>
-          <p:nvPr/>
-        </p:nvSpPr>
-        <p:spPr>
-          <a:xfrm>
-            <a:off x="246581" y="-8806"/>
-            <a:ext cx="11743362" cy="646331"/>
-          </a:xfrm>
-          <a:prstGeom prst="rect">
-            <a:avLst/>
-          </a:prstGeom>
-          <a:noFill/>
-        </p:spPr>
-        <p:txBody>
-          <a:bodyPr rot="0" spcFirstLastPara="0" vertOverflow="overflow" horzOverflow="overflow" vert="horz" wrap="square" lIns="91440" tIns="45720" rIns="91440" bIns="45720" numCol="1" spcCol="0" rtlCol="0" fromWordArt="0" anchor="t" anchorCtr="0" forceAA="0" compatLnSpc="1">
-            <a:prstTxWarp prst="textNoShape">
-              <a:avLst/>
-            </a:prstTxWarp>
-            <a:spAutoFit/>
-          </a:bodyPr>
-          <a:lstStyle/>
-          <a:p>
-            <a:r>
-              <a:rPr lang="en-US" sz="3600" dirty="0">
-                <a:solidFill>
-                  <a:schemeClr val="accent1"/>
-                </a:solidFill>
-              </a:rPr>
               <a:t>Bidirectional RNN</a:t>
             </a:r>
           </a:p>
@@ -13603,7 +9890,7 @@
 </p:sld>
 </file>
 
-<file path=ppt/slides/slide12.xml><?xml version="1.0" encoding="utf-8"?>
+<file path=ppt/slides/slide11.xml><?xml version="1.0" encoding="utf-8"?>
 <p:sld xmlns:a="http://schemas.openxmlformats.org/drawingml/2006/main" xmlns:r="http://schemas.openxmlformats.org/officeDocument/2006/relationships" xmlns:p="http://schemas.openxmlformats.org/presentationml/2006/main">
   <p:cSld>
     <p:spTree>
@@ -14240,7 +10527,7 @@
 </p:sld>
 </file>
 
-<file path=ppt/slides/slide13.xml><?xml version="1.0" encoding="utf-8"?>
+<file path=ppt/slides/slide12.xml><?xml version="1.0" encoding="utf-8"?>
 <p:sld xmlns:a="http://schemas.openxmlformats.org/drawingml/2006/main" xmlns:r="http://schemas.openxmlformats.org/officeDocument/2006/relationships" xmlns:p="http://schemas.openxmlformats.org/presentationml/2006/main">
   <p:cSld>
     <p:spTree>
@@ -14810,7 +11097,7 @@
 </p:sld>
 </file>
 
-<file path=ppt/slides/slide14.xml><?xml version="1.0" encoding="utf-8"?>
+<file path=ppt/slides/slide13.xml><?xml version="1.0" encoding="utf-8"?>
 <p:sld xmlns:a="http://schemas.openxmlformats.org/drawingml/2006/main" xmlns:r="http://schemas.openxmlformats.org/officeDocument/2006/relationships" xmlns:p="http://schemas.openxmlformats.org/presentationml/2006/main">
   <p:cSld>
     <p:spTree>
@@ -15094,7 +11381,7 @@
 </p:sld>
 </file>
 
-<file path=ppt/slides/slide15.xml><?xml version="1.0" encoding="utf-8"?>
+<file path=ppt/slides/slide14.xml><?xml version="1.0" encoding="utf-8"?>
 <p:sld xmlns:a="http://schemas.openxmlformats.org/drawingml/2006/main" xmlns:r="http://schemas.openxmlformats.org/officeDocument/2006/relationships" xmlns:p="http://schemas.openxmlformats.org/presentationml/2006/main">
   <p:cSld>
     <p:spTree>
@@ -15872,7 +12159,7 @@
 </p:sld>
 </file>
 
-<file path=ppt/slides/slide16.xml><?xml version="1.0" encoding="utf-8"?>
+<file path=ppt/slides/slide15.xml><?xml version="1.0" encoding="utf-8"?>
 <p:sld xmlns:a="http://schemas.openxmlformats.org/drawingml/2006/main" xmlns:r="http://schemas.openxmlformats.org/officeDocument/2006/relationships" xmlns:p="http://schemas.openxmlformats.org/presentationml/2006/main">
   <p:cSld>
     <p:spTree>
@@ -16053,7 +12340,7 @@
 </p:sld>
 </file>
 
-<file path=ppt/slides/slide17.xml><?xml version="1.0" encoding="utf-8"?>
+<file path=ppt/slides/slide16.xml><?xml version="1.0" encoding="utf-8"?>
 <p:sld xmlns:a="http://schemas.openxmlformats.org/drawingml/2006/main" xmlns:r="http://schemas.openxmlformats.org/officeDocument/2006/relationships" xmlns:p="http://schemas.openxmlformats.org/presentationml/2006/main">
   <p:cSld>
     <p:spTree>
@@ -17915,7 +14202,7 @@
 </p:sld>
 </file>
 
-<file path=ppt/slides/slide18.xml><?xml version="1.0" encoding="utf-8"?>
+<file path=ppt/slides/slide17.xml><?xml version="1.0" encoding="utf-8"?>
 <p:sld xmlns:a="http://schemas.openxmlformats.org/drawingml/2006/main" xmlns:r="http://schemas.openxmlformats.org/officeDocument/2006/relationships" xmlns:p="http://schemas.openxmlformats.org/presentationml/2006/main">
   <p:cSld>
     <p:spTree>
@@ -19941,1508 +16228,6 @@
 </file>
 
 <file path=ppt/slides/slide2.xml><?xml version="1.0" encoding="utf-8"?>
-<p:sld xmlns:a="http://schemas.openxmlformats.org/drawingml/2006/main" xmlns:r="http://schemas.openxmlformats.org/officeDocument/2006/relationships" xmlns:p="http://schemas.openxmlformats.org/presentationml/2006/main">
-  <p:cSld>
-    <p:spTree>
-      <p:nvGrpSpPr>
-        <p:cNvPr id="1" name="">
-          <a:extLst>
-            <a:ext uri="{FF2B5EF4-FFF2-40B4-BE49-F238E27FC236}">
-              <a16:creationId xmlns:a16="http://schemas.microsoft.com/office/drawing/2014/main" id="{5F6D06D8-1276-671A-13E8-977ACCF5E70C}"/>
-            </a:ext>
-          </a:extLst>
-        </p:cNvPr>
-        <p:cNvGrpSpPr/>
-        <p:nvPr/>
-      </p:nvGrpSpPr>
-      <p:grpSpPr>
-        <a:xfrm>
-          <a:off x="0" y="0"/>
-          <a:ext cx="0" cy="0"/>
-          <a:chOff x="0" y="0"/>
-          <a:chExt cx="0" cy="0"/>
-        </a:xfrm>
-      </p:grpSpPr>
-      <p:sp>
-        <p:nvSpPr>
-          <p:cNvPr id="15" name="Rettangolo 14">
-            <a:extLst>
-              <a:ext uri="{FF2B5EF4-FFF2-40B4-BE49-F238E27FC236}">
-                <a16:creationId xmlns:a16="http://schemas.microsoft.com/office/drawing/2014/main" id="{EC8CC60F-1156-68EE-ABAA-B2A31AF363FB}"/>
-              </a:ext>
-            </a:extLst>
-          </p:cNvPr>
-          <p:cNvSpPr/>
-          <p:nvPr/>
-        </p:nvSpPr>
-        <p:spPr>
-          <a:xfrm flipV="1">
-            <a:off x="154112" y="647878"/>
-            <a:ext cx="12037888" cy="45719"/>
-          </a:xfrm>
-          <a:prstGeom prst="rect">
-            <a:avLst/>
-          </a:prstGeom>
-          <a:solidFill>
-            <a:srgbClr val="C00000"/>
-          </a:solidFill>
-          <a:ln>
-            <a:noFill/>
-          </a:ln>
-        </p:spPr>
-        <p:style>
-          <a:lnRef idx="2">
-            <a:schemeClr val="accent1">
-              <a:shade val="50000"/>
-            </a:schemeClr>
-          </a:lnRef>
-          <a:fillRef idx="1">
-            <a:schemeClr val="accent1"/>
-          </a:fillRef>
-          <a:effectRef idx="0">
-            <a:schemeClr val="accent1"/>
-          </a:effectRef>
-          <a:fontRef idx="minor">
-            <a:schemeClr val="lt1"/>
-          </a:fontRef>
-        </p:style>
-        <p:txBody>
-          <a:bodyPr rtlCol="0" anchor="ctr"/>
-          <a:lstStyle/>
-          <a:p>
-            <a:pPr algn="ctr"/>
-            <a:endParaRPr lang="it-IT"/>
-          </a:p>
-        </p:txBody>
-      </p:sp>
-      <p:sp>
-        <p:nvSpPr>
-          <p:cNvPr id="16" name="CasellaDiTesto 15">
-            <a:extLst>
-              <a:ext uri="{FF2B5EF4-FFF2-40B4-BE49-F238E27FC236}">
-                <a16:creationId xmlns:a16="http://schemas.microsoft.com/office/drawing/2014/main" id="{C94876FB-C6E0-6C12-99C5-5D11DBC4AD7B}"/>
-              </a:ext>
-            </a:extLst>
-          </p:cNvPr>
-          <p:cNvSpPr txBox="1"/>
-          <p:nvPr/>
-        </p:nvSpPr>
-        <p:spPr>
-          <a:xfrm>
-            <a:off x="246581" y="-8806"/>
-            <a:ext cx="11743362" cy="1200329"/>
-          </a:xfrm>
-          <a:prstGeom prst="rect">
-            <a:avLst/>
-          </a:prstGeom>
-          <a:noFill/>
-        </p:spPr>
-        <p:txBody>
-          <a:bodyPr rot="0" spcFirstLastPara="0" vertOverflow="overflow" horzOverflow="overflow" vert="horz" wrap="square" lIns="91440" tIns="45720" rIns="91440" bIns="45720" numCol="1" spcCol="0" rtlCol="0" fromWordArt="0" anchor="t" anchorCtr="0" forceAA="0" compatLnSpc="1">
-            <a:prstTxWarp prst="textNoShape">
-              <a:avLst/>
-            </a:prstTxWarp>
-            <a:spAutoFit/>
-          </a:bodyPr>
-          <a:lstStyle/>
-          <a:p>
-            <a:r>
-              <a:rPr lang="en-US" sz="3600" dirty="0">
-                <a:solidFill>
-                  <a:schemeClr val="accent1"/>
-                </a:solidFill>
-              </a:rPr>
-              <a:t>Machine Learning: Regression</a:t>
-            </a:r>
-          </a:p>
-          <a:p>
-            <a:endParaRPr lang="en-US" sz="3600" dirty="0">
-              <a:solidFill>
-                <a:schemeClr val="accent1"/>
-              </a:solidFill>
-            </a:endParaRPr>
-          </a:p>
-        </p:txBody>
-      </p:sp>
-      <p:cxnSp>
-        <p:nvCxnSpPr>
-          <p:cNvPr id="19" name="Connettore 2 18">
-            <a:extLst>
-              <a:ext uri="{FF2B5EF4-FFF2-40B4-BE49-F238E27FC236}">
-                <a16:creationId xmlns:a16="http://schemas.microsoft.com/office/drawing/2014/main" id="{C1B2E627-9A9A-3523-3F33-0E0B2D6BB706}"/>
-              </a:ext>
-            </a:extLst>
-          </p:cNvPr>
-          <p:cNvCxnSpPr/>
-          <p:nvPr/>
-        </p:nvCxnSpPr>
-        <p:spPr>
-          <a:xfrm flipV="1">
-            <a:off x="0" y="6610350"/>
-            <a:ext cx="12192000" cy="0"/>
-          </a:xfrm>
-          <a:prstGeom prst="straightConnector1">
-            <a:avLst/>
-          </a:prstGeom>
-          <a:ln>
-            <a:solidFill>
-              <a:schemeClr val="accent1">
-                <a:lumMod val="50000"/>
-              </a:schemeClr>
-            </a:solidFill>
-          </a:ln>
-        </p:spPr>
-        <p:style>
-          <a:lnRef idx="1">
-            <a:schemeClr val="accent1"/>
-          </a:lnRef>
-          <a:fillRef idx="0">
-            <a:schemeClr val="accent1"/>
-          </a:fillRef>
-          <a:effectRef idx="0">
-            <a:schemeClr val="accent1"/>
-          </a:effectRef>
-          <a:fontRef idx="minor">
-            <a:schemeClr val="tx1"/>
-          </a:fontRef>
-        </p:style>
-      </p:cxnSp>
-      <mc:AlternateContent xmlns:mc="http://schemas.openxmlformats.org/markup-compatibility/2006" xmlns:a14="http://schemas.microsoft.com/office/drawing/2010/main">
-        <mc:Choice Requires="a14">
-          <p:sp>
-            <p:nvSpPr>
-              <p:cNvPr id="2" name="CasellaDiTesto 6">
-                <a:extLst>
-                  <a:ext uri="{FF2B5EF4-FFF2-40B4-BE49-F238E27FC236}">
-                    <a16:creationId xmlns:a16="http://schemas.microsoft.com/office/drawing/2014/main" id="{A7D7822F-A4F3-878F-85A3-9A097B9C5114}"/>
-                  </a:ext>
-                </a:extLst>
-              </p:cNvPr>
-              <p:cNvSpPr txBox="1">
-                <a:spLocks/>
-              </p:cNvSpPr>
-              <p:nvPr/>
-            </p:nvSpPr>
-            <p:spPr>
-              <a:xfrm>
-                <a:off x="431800" y="1916114"/>
-                <a:ext cx="5562600" cy="2965555"/>
-              </a:xfrm>
-              <a:prstGeom prst="rect">
-                <a:avLst/>
-              </a:prstGeom>
-              <a:noFill/>
-            </p:spPr>
-            <p:txBody>
-              <a:bodyPr vert="horz" wrap="square" lIns="0" tIns="0" rIns="0" bIns="0" rtlCol="0">
-                <a:spAutoFit/>
-              </a:bodyPr>
-              <a:lstStyle>
-                <a:lvl1pPr marL="0" indent="0" algn="ctr" defTabSz="914400" rtl="0" eaLnBrk="1" latinLnBrk="0" hangingPunct="1">
-                  <a:lnSpc>
-                    <a:spcPct val="90000"/>
-                  </a:lnSpc>
-                  <a:spcBef>
-                    <a:spcPts val="1000"/>
-                  </a:spcBef>
-                  <a:buFont typeface="Arial" panose="020B0604020202020204" pitchFamily="34" charset="0"/>
-                  <a:buNone/>
-                  <a:defRPr sz="2400" kern="1200">
-                    <a:solidFill>
-                      <a:schemeClr val="tx1"/>
-                    </a:solidFill>
-                    <a:latin typeface="+mn-lt"/>
-                    <a:ea typeface="+mn-ea"/>
-                    <a:cs typeface="+mn-cs"/>
-                  </a:defRPr>
-                </a:lvl1pPr>
-                <a:lvl2pPr marL="457200" indent="0" algn="ctr" defTabSz="914400" rtl="0" eaLnBrk="1" latinLnBrk="0" hangingPunct="1">
-                  <a:lnSpc>
-                    <a:spcPct val="90000"/>
-                  </a:lnSpc>
-                  <a:spcBef>
-                    <a:spcPts val="500"/>
-                  </a:spcBef>
-                  <a:buFont typeface="Arial" panose="020B0604020202020204" pitchFamily="34" charset="0"/>
-                  <a:buNone/>
-                  <a:defRPr sz="2000" kern="1200">
-                    <a:solidFill>
-                      <a:schemeClr val="tx1"/>
-                    </a:solidFill>
-                    <a:latin typeface="+mn-lt"/>
-                    <a:ea typeface="+mn-ea"/>
-                    <a:cs typeface="+mn-cs"/>
-                  </a:defRPr>
-                </a:lvl2pPr>
-                <a:lvl3pPr marL="914400" indent="0" algn="ctr" defTabSz="914400" rtl="0" eaLnBrk="1" latinLnBrk="0" hangingPunct="1">
-                  <a:lnSpc>
-                    <a:spcPct val="90000"/>
-                  </a:lnSpc>
-                  <a:spcBef>
-                    <a:spcPts val="500"/>
-                  </a:spcBef>
-                  <a:buFont typeface="Arial" panose="020B0604020202020204" pitchFamily="34" charset="0"/>
-                  <a:buNone/>
-                  <a:defRPr sz="1800" kern="1200">
-                    <a:solidFill>
-                      <a:schemeClr val="tx1"/>
-                    </a:solidFill>
-                    <a:latin typeface="+mn-lt"/>
-                    <a:ea typeface="+mn-ea"/>
-                    <a:cs typeface="+mn-cs"/>
-                  </a:defRPr>
-                </a:lvl3pPr>
-                <a:lvl4pPr marL="1371600" indent="0" algn="ctr" defTabSz="914400" rtl="0" eaLnBrk="1" latinLnBrk="0" hangingPunct="1">
-                  <a:lnSpc>
-                    <a:spcPct val="90000"/>
-                  </a:lnSpc>
-                  <a:spcBef>
-                    <a:spcPts val="500"/>
-                  </a:spcBef>
-                  <a:buFont typeface="Arial" panose="020B0604020202020204" pitchFamily="34" charset="0"/>
-                  <a:buNone/>
-                  <a:defRPr sz="1600" kern="1200">
-                    <a:solidFill>
-                      <a:schemeClr val="tx1"/>
-                    </a:solidFill>
-                    <a:latin typeface="+mn-lt"/>
-                    <a:ea typeface="+mn-ea"/>
-                    <a:cs typeface="+mn-cs"/>
-                  </a:defRPr>
-                </a:lvl4pPr>
-                <a:lvl5pPr marL="1828800" indent="0" algn="ctr" defTabSz="914400" rtl="0" eaLnBrk="1" latinLnBrk="0" hangingPunct="1">
-                  <a:lnSpc>
-                    <a:spcPct val="90000"/>
-                  </a:lnSpc>
-                  <a:spcBef>
-                    <a:spcPts val="500"/>
-                  </a:spcBef>
-                  <a:buFont typeface="Arial" panose="020B0604020202020204" pitchFamily="34" charset="0"/>
-                  <a:buNone/>
-                  <a:defRPr sz="1600" kern="1200">
-                    <a:solidFill>
-                      <a:schemeClr val="tx1"/>
-                    </a:solidFill>
-                    <a:latin typeface="+mn-lt"/>
-                    <a:ea typeface="+mn-ea"/>
-                    <a:cs typeface="+mn-cs"/>
-                  </a:defRPr>
-                </a:lvl5pPr>
-                <a:lvl6pPr marL="2286000" indent="0" algn="ctr" defTabSz="914400" rtl="0" eaLnBrk="1" latinLnBrk="0" hangingPunct="1">
-                  <a:lnSpc>
-                    <a:spcPct val="90000"/>
-                  </a:lnSpc>
-                  <a:spcBef>
-                    <a:spcPts val="500"/>
-                  </a:spcBef>
-                  <a:buFont typeface="Arial" panose="020B0604020202020204" pitchFamily="34" charset="0"/>
-                  <a:buNone/>
-                  <a:defRPr sz="1600" kern="1200">
-                    <a:solidFill>
-                      <a:schemeClr val="tx1"/>
-                    </a:solidFill>
-                    <a:latin typeface="+mn-lt"/>
-                    <a:ea typeface="+mn-ea"/>
-                    <a:cs typeface="+mn-cs"/>
-                  </a:defRPr>
-                </a:lvl6pPr>
-                <a:lvl7pPr marL="2743200" indent="0" algn="ctr" defTabSz="914400" rtl="0" eaLnBrk="1" latinLnBrk="0" hangingPunct="1">
-                  <a:lnSpc>
-                    <a:spcPct val="90000"/>
-                  </a:lnSpc>
-                  <a:spcBef>
-                    <a:spcPts val="500"/>
-                  </a:spcBef>
-                  <a:buFont typeface="Arial" panose="020B0604020202020204" pitchFamily="34" charset="0"/>
-                  <a:buNone/>
-                  <a:defRPr sz="1600" kern="1200">
-                    <a:solidFill>
-                      <a:schemeClr val="tx1"/>
-                    </a:solidFill>
-                    <a:latin typeface="+mn-lt"/>
-                    <a:ea typeface="+mn-ea"/>
-                    <a:cs typeface="+mn-cs"/>
-                  </a:defRPr>
-                </a:lvl7pPr>
-                <a:lvl8pPr marL="3200400" indent="0" algn="ctr" defTabSz="914400" rtl="0" eaLnBrk="1" latinLnBrk="0" hangingPunct="1">
-                  <a:lnSpc>
-                    <a:spcPct val="90000"/>
-                  </a:lnSpc>
-                  <a:spcBef>
-                    <a:spcPts val="500"/>
-                  </a:spcBef>
-                  <a:buFont typeface="Arial" panose="020B0604020202020204" pitchFamily="34" charset="0"/>
-                  <a:buNone/>
-                  <a:defRPr sz="1600" kern="1200">
-                    <a:solidFill>
-                      <a:schemeClr val="tx1"/>
-                    </a:solidFill>
-                    <a:latin typeface="+mn-lt"/>
-                    <a:ea typeface="+mn-ea"/>
-                    <a:cs typeface="+mn-cs"/>
-                  </a:defRPr>
-                </a:lvl8pPr>
-                <a:lvl9pPr marL="3657600" indent="0" algn="ctr" defTabSz="914400" rtl="0" eaLnBrk="1" latinLnBrk="0" hangingPunct="1">
-                  <a:lnSpc>
-                    <a:spcPct val="90000"/>
-                  </a:lnSpc>
-                  <a:spcBef>
-                    <a:spcPts val="500"/>
-                  </a:spcBef>
-                  <a:buFont typeface="Arial" panose="020B0604020202020204" pitchFamily="34" charset="0"/>
-                  <a:buNone/>
-                  <a:defRPr sz="1600" kern="1200">
-                    <a:solidFill>
-                      <a:schemeClr val="tx1"/>
-                    </a:solidFill>
-                    <a:latin typeface="+mn-lt"/>
-                    <a:ea typeface="+mn-ea"/>
-                    <a:cs typeface="+mn-cs"/>
-                  </a:defRPr>
-                </a:lvl9pPr>
-              </a:lstStyle>
-              <a:p>
-                <a14:m>
-                  <m:oMath xmlns:m="http://schemas.openxmlformats.org/officeDocument/2006/math">
-                    <m:d>
-                      <m:dPr>
-                        <m:begChr m:val="{"/>
-                        <m:endChr m:val="}"/>
-                        <m:ctrlPr>
-                          <a:rPr lang="it-CH" sz="2000" i="1" smtClean="0">
-                            <a:latin typeface="Cambria Math" panose="02040503050406030204" pitchFamily="18" charset="0"/>
-                          </a:rPr>
-                        </m:ctrlPr>
-                      </m:dPr>
-                      <m:e>
-                        <m:sSup>
-                          <m:sSupPr>
-                            <m:ctrlPr>
-                              <a:rPr lang="it-CH" sz="2000" i="1" smtClean="0">
-                                <a:latin typeface="Cambria Math" panose="02040503050406030204" pitchFamily="18" charset="0"/>
-                              </a:rPr>
-                            </m:ctrlPr>
-                          </m:sSupPr>
-                          <m:e>
-                            <m:r>
-                              <a:rPr lang="it-CH" sz="2000" i="1" smtClean="0">
-                                <a:latin typeface="Cambria Math" panose="02040503050406030204" pitchFamily="18" charset="0"/>
-                              </a:rPr>
-                              <m:t>(</m:t>
-                            </m:r>
-                            <m:r>
-                              <a:rPr lang="it-CH" sz="2000" i="1" smtClean="0">
-                                <a:latin typeface="Cambria Math" panose="02040503050406030204" pitchFamily="18" charset="0"/>
-                              </a:rPr>
-                              <m:t>𝑥</m:t>
-                            </m:r>
-                          </m:e>
-                          <m:sup>
-                            <m:r>
-                              <a:rPr lang="it-CH" sz="2000" i="1" smtClean="0">
-                                <a:latin typeface="Cambria Math" panose="02040503050406030204" pitchFamily="18" charset="0"/>
-                              </a:rPr>
-                              <m:t>𝑖</m:t>
-                            </m:r>
-                          </m:sup>
-                        </m:sSup>
-                        <m:r>
-                          <a:rPr lang="it-CH" sz="2000" i="1" smtClean="0">
-                            <a:latin typeface="Cambria Math" panose="02040503050406030204" pitchFamily="18" charset="0"/>
-                          </a:rPr>
-                          <m:t>,</m:t>
-                        </m:r>
-                        <m:sSup>
-                          <m:sSupPr>
-                            <m:ctrlPr>
-                              <a:rPr lang="it-CH" sz="2000" i="1" smtClean="0">
-                                <a:latin typeface="Cambria Math" panose="02040503050406030204" pitchFamily="18" charset="0"/>
-                              </a:rPr>
-                            </m:ctrlPr>
-                          </m:sSupPr>
-                          <m:e>
-                            <m:r>
-                              <a:rPr lang="it-CH" sz="2000" i="1" smtClean="0">
-                                <a:latin typeface="Cambria Math" panose="02040503050406030204" pitchFamily="18" charset="0"/>
-                              </a:rPr>
-                              <m:t>𝑦</m:t>
-                            </m:r>
-                          </m:e>
-                          <m:sup>
-                            <m:r>
-                              <a:rPr lang="it-CH" sz="2000" i="1" smtClean="0">
-                                <a:latin typeface="Cambria Math" panose="02040503050406030204" pitchFamily="18" charset="0"/>
-                              </a:rPr>
-                              <m:t>𝑖</m:t>
-                            </m:r>
-                          </m:sup>
-                        </m:sSup>
-                        <m:r>
-                          <a:rPr lang="it-CH" sz="2000" i="1" smtClean="0">
-                            <a:latin typeface="Cambria Math" panose="02040503050406030204" pitchFamily="18" charset="0"/>
-                          </a:rPr>
-                          <m:t>)</m:t>
-                        </m:r>
-                      </m:e>
-                    </m:d>
-                    <m:r>
-                      <a:rPr lang="it-CH" sz="2000" i="1" smtClean="0">
-                        <a:latin typeface="Cambria Math" panose="02040503050406030204" pitchFamily="18" charset="0"/>
-                      </a:rPr>
-                      <m:t>   </m:t>
-                    </m:r>
-                    <m:r>
-                      <a:rPr lang="it-CH" sz="2000" i="1" smtClean="0">
-                        <a:latin typeface="Cambria Math" panose="02040503050406030204" pitchFamily="18" charset="0"/>
-                      </a:rPr>
-                      <m:t>𝑖</m:t>
-                    </m:r>
-                    <m:r>
-                      <a:rPr lang="it-CH" sz="2000" i="1" smtClean="0">
-                        <a:latin typeface="Cambria Math" panose="02040503050406030204" pitchFamily="18" charset="0"/>
-                      </a:rPr>
-                      <m:t>=1,…,</m:t>
-                    </m:r>
-                    <m:r>
-                      <a:rPr lang="it-CH" sz="2000" i="1" smtClean="0">
-                        <a:latin typeface="Cambria Math" panose="02040503050406030204" pitchFamily="18" charset="0"/>
-                      </a:rPr>
-                      <m:t>𝑁</m:t>
-                    </m:r>
-                    <m:r>
-                      <a:rPr lang="it-CH" sz="2000" smtClean="0">
-                        <a:latin typeface="Cambria Math" panose="02040503050406030204" pitchFamily="18" charset="0"/>
-                      </a:rPr>
-                      <m:t>  </m:t>
-                    </m:r>
-                  </m:oMath>
-                </a14:m>
-                <a:r>
-                  <a:rPr lang="it-CH" sz="2000" dirty="0"/>
-                  <a:t>  </a:t>
-                </a:r>
-                <a:r>
-                  <a:rPr lang="it-CH" sz="2000" dirty="0">
-                    <a:solidFill>
-                      <a:srgbClr val="FF0000"/>
-                    </a:solidFill>
-                  </a:rPr>
-                  <a:t>available dataset</a:t>
-                </a:r>
-                <a:br>
-                  <a:rPr lang="it-CH" sz="2000" dirty="0">
-                    <a:solidFill>
-                      <a:srgbClr val="FF0000"/>
-                    </a:solidFill>
-                  </a:rPr>
-                </a:br>
-                <a:br>
-                  <a:rPr lang="it-CH" sz="2000" dirty="0">
-                    <a:solidFill>
-                      <a:srgbClr val="FF0000"/>
-                    </a:solidFill>
-                  </a:rPr>
-                </a:br>
-                <a:endParaRPr lang="it-CH" sz="2000" dirty="0">
-                  <a:solidFill>
-                    <a:srgbClr val="FF0000"/>
-                  </a:solidFill>
-                </a:endParaRPr>
-              </a:p>
-              <a:p>
-                <a14:m>
-                  <m:oMath xmlns:m="http://schemas.openxmlformats.org/officeDocument/2006/math">
-                    <m:sSup>
-                      <m:sSupPr>
-                        <m:ctrlPr>
-                          <a:rPr lang="it-CH" sz="2000" i="1" smtClean="0">
-                            <a:latin typeface="Cambria Math" panose="02040503050406030204" pitchFamily="18" charset="0"/>
-                          </a:rPr>
-                        </m:ctrlPr>
-                      </m:sSupPr>
-                      <m:e>
-                        <m:acc>
-                          <m:accPr>
-                            <m:chr m:val="̂"/>
-                            <m:ctrlPr>
-                              <a:rPr lang="it-CH" sz="2000" i="1" smtClean="0">
-                                <a:latin typeface="Cambria Math" panose="02040503050406030204" pitchFamily="18" charset="0"/>
-                              </a:rPr>
-                            </m:ctrlPr>
-                          </m:accPr>
-                          <m:e>
-                            <m:r>
-                              <a:rPr lang="it-CH" sz="2000" i="1" smtClean="0">
-                                <a:latin typeface="Cambria Math" panose="02040503050406030204" pitchFamily="18" charset="0"/>
-                              </a:rPr>
-                              <m:t>𝑦</m:t>
-                            </m:r>
-                          </m:e>
-                        </m:acc>
-                      </m:e>
-                      <m:sup>
-                        <m:r>
-                          <a:rPr lang="it-CH" sz="2000" i="1" smtClean="0">
-                            <a:latin typeface="Cambria Math" panose="02040503050406030204" pitchFamily="18" charset="0"/>
-                          </a:rPr>
-                          <m:t>𝑖</m:t>
-                        </m:r>
-                      </m:sup>
-                    </m:sSup>
-                    <m:r>
-                      <a:rPr lang="it-CH" sz="2000" i="1" smtClean="0">
-                        <a:latin typeface="Cambria Math" panose="02040503050406030204" pitchFamily="18" charset="0"/>
-                      </a:rPr>
-                      <m:t>=</m:t>
-                    </m:r>
-                    <m:r>
-                      <a:rPr lang="it-CH" sz="2000" i="1" smtClean="0">
-                        <a:latin typeface="Cambria Math" panose="02040503050406030204" pitchFamily="18" charset="0"/>
-                      </a:rPr>
-                      <m:t>𝑀</m:t>
-                    </m:r>
-                    <m:r>
-                      <a:rPr lang="it-CH" sz="2000" i="1" smtClean="0">
-                        <a:latin typeface="Cambria Math" panose="02040503050406030204" pitchFamily="18" charset="0"/>
-                      </a:rPr>
-                      <m:t>(</m:t>
-                    </m:r>
-                    <m:sSup>
-                      <m:sSupPr>
-                        <m:ctrlPr>
-                          <a:rPr lang="it-CH" sz="2000" i="1" smtClean="0">
-                            <a:latin typeface="Cambria Math" panose="02040503050406030204" pitchFamily="18" charset="0"/>
-                          </a:rPr>
-                        </m:ctrlPr>
-                      </m:sSupPr>
-                      <m:e>
-                        <m:r>
-                          <a:rPr lang="it-CH" sz="2000" i="1" smtClean="0">
-                            <a:latin typeface="Cambria Math" panose="02040503050406030204" pitchFamily="18" charset="0"/>
-                          </a:rPr>
-                          <m:t>𝑥</m:t>
-                        </m:r>
-                      </m:e>
-                      <m:sup>
-                        <m:r>
-                          <a:rPr lang="it-CH" sz="2000" i="1" smtClean="0">
-                            <a:latin typeface="Cambria Math" panose="02040503050406030204" pitchFamily="18" charset="0"/>
-                          </a:rPr>
-                          <m:t>𝑖</m:t>
-                        </m:r>
-                      </m:sup>
-                    </m:sSup>
-                    <m:r>
-                      <a:rPr lang="it-CH" sz="2000" i="1" smtClean="0">
-                        <a:latin typeface="Cambria Math" panose="02040503050406030204" pitchFamily="18" charset="0"/>
-                      </a:rPr>
-                      <m:t>;</m:t>
-                    </m:r>
-                    <m:r>
-                      <a:rPr lang="it-CH" sz="2000" i="1" smtClean="0">
-                        <a:solidFill>
-                          <a:srgbClr val="FF0000"/>
-                        </a:solidFill>
-                        <a:latin typeface="Cambria Math" panose="02040503050406030204" pitchFamily="18" charset="0"/>
-                        <a:ea typeface="Cambria Math" panose="02040503050406030204" pitchFamily="18" charset="0"/>
-                      </a:rPr>
-                      <m:t>𝜃</m:t>
-                    </m:r>
-                    <m:r>
-                      <a:rPr lang="it-CH" sz="2000" i="1" smtClean="0">
-                        <a:latin typeface="Cambria Math" panose="02040503050406030204" pitchFamily="18" charset="0"/>
-                      </a:rPr>
-                      <m:t>) </m:t>
-                    </m:r>
-                  </m:oMath>
-                </a14:m>
-                <a:r>
-                  <a:rPr lang="it-CH" sz="2000" dirty="0"/>
-                  <a:t>                </a:t>
-                </a:r>
-                <a:r>
-                  <a:rPr lang="it-CH" sz="2000" dirty="0">
-                    <a:solidFill>
-                      <a:srgbClr val="FF0000"/>
-                    </a:solidFill>
-                  </a:rPr>
-                  <a:t>parametric model</a:t>
-                </a:r>
-                <a:br>
-                  <a:rPr lang="it-CH" sz="2000" dirty="0">
-                    <a:solidFill>
-                      <a:srgbClr val="FF0000"/>
-                    </a:solidFill>
-                  </a:rPr>
-                </a:br>
-                <a:br>
-                  <a:rPr lang="it-CH" sz="2000" dirty="0">
-                    <a:solidFill>
-                      <a:srgbClr val="FF0000"/>
-                    </a:solidFill>
-                  </a:rPr>
-                </a:br>
-                <a:endParaRPr lang="it-CH" dirty="0">
-                  <a:solidFill>
-                    <a:srgbClr val="FF0000"/>
-                  </a:solidFill>
-                </a:endParaRPr>
-              </a:p>
-              <a:p>
-                <a14:m>
-                  <m:oMath xmlns:m="http://schemas.openxmlformats.org/officeDocument/2006/math">
-                    <m:r>
-                      <a:rPr lang="it-CH" sz="2000" i="1" dirty="0" smtClean="0">
-                        <a:latin typeface="Cambria Math" panose="02040503050406030204" pitchFamily="18" charset="0"/>
-                        <a:ea typeface="Cambria Math" panose="02040503050406030204" pitchFamily="18" charset="0"/>
-                      </a:rPr>
-                      <m:t>ℒ</m:t>
-                    </m:r>
-                    <m:r>
-                      <a:rPr lang="it-CH" sz="2000" i="1" smtClean="0">
-                        <a:latin typeface="Cambria Math" panose="02040503050406030204" pitchFamily="18" charset="0"/>
-                      </a:rPr>
-                      <m:t>(</m:t>
-                    </m:r>
-                    <m:r>
-                      <a:rPr lang="it-CH" sz="2000" i="1">
-                        <a:solidFill>
-                          <a:srgbClr val="FF0000"/>
-                        </a:solidFill>
-                        <a:latin typeface="Cambria Math" panose="02040503050406030204" pitchFamily="18" charset="0"/>
-                        <a:ea typeface="Cambria Math" panose="02040503050406030204" pitchFamily="18" charset="0"/>
-                      </a:rPr>
-                      <m:t>𝜃</m:t>
-                    </m:r>
-                    <m:r>
-                      <a:rPr lang="it-CH" sz="2000" i="1" smtClean="0">
-                        <a:latin typeface="Cambria Math" panose="02040503050406030204" pitchFamily="18" charset="0"/>
-                      </a:rPr>
-                      <m:t>)</m:t>
-                    </m:r>
-                    <m:sSub>
-                      <m:sSubPr>
-                        <m:ctrlPr>
-                          <a:rPr lang="it-CH" sz="2000" i="1" smtClean="0">
-                            <a:latin typeface="Cambria Math" panose="02040503050406030204" pitchFamily="18" charset="0"/>
-                          </a:rPr>
-                        </m:ctrlPr>
-                      </m:sSubPr>
-                      <m:e>
-                        <m:r>
-                          <a:rPr lang="it-CH" sz="2000" i="1" smtClean="0">
-                            <a:latin typeface="Cambria Math" panose="02040503050406030204" pitchFamily="18" charset="0"/>
-                          </a:rPr>
-                          <m:t>=</m:t>
-                        </m:r>
-                        <m:f>
-                          <m:fPr>
-                            <m:ctrlPr>
-                              <a:rPr lang="it-CH" sz="2000" i="1" smtClean="0">
-                                <a:latin typeface="Cambria Math" panose="02040503050406030204" pitchFamily="18" charset="0"/>
-                              </a:rPr>
-                            </m:ctrlPr>
-                          </m:fPr>
-                          <m:num>
-                            <m:r>
-                              <a:rPr lang="it-CH" sz="2000" i="1" smtClean="0">
-                                <a:latin typeface="Cambria Math" panose="02040503050406030204" pitchFamily="18" charset="0"/>
-                              </a:rPr>
-                              <m:t>1</m:t>
-                            </m:r>
-                          </m:num>
-                          <m:den>
-                            <m:r>
-                              <a:rPr lang="it-CH" sz="2000" i="1" smtClean="0">
-                                <a:latin typeface="Cambria Math" panose="02040503050406030204" pitchFamily="18" charset="0"/>
-                              </a:rPr>
-                              <m:t>𝑁</m:t>
-                            </m:r>
-                          </m:den>
-                        </m:f>
-                        <m:nary>
-                          <m:naryPr>
-                            <m:chr m:val="∑"/>
-                            <m:ctrlPr>
-                              <a:rPr lang="it-CH" sz="2000" i="1" smtClean="0">
-                                <a:latin typeface="Cambria Math" panose="02040503050406030204" pitchFamily="18" charset="0"/>
-                              </a:rPr>
-                            </m:ctrlPr>
-                          </m:naryPr>
-                          <m:sub>
-                            <m:r>
-                              <m:rPr>
-                                <m:brk m:alnAt="23"/>
-                              </m:rPr>
-                              <a:rPr lang="it-CH" sz="2000" i="1" smtClean="0">
-                                <a:latin typeface="Cambria Math" panose="02040503050406030204" pitchFamily="18" charset="0"/>
-                              </a:rPr>
-                              <m:t>𝑖</m:t>
-                            </m:r>
-                            <m:r>
-                              <a:rPr lang="it-CH" sz="2000" i="1" smtClean="0">
-                                <a:latin typeface="Cambria Math" panose="02040503050406030204" pitchFamily="18" charset="0"/>
-                              </a:rPr>
-                              <m:t>=1</m:t>
-                            </m:r>
-                          </m:sub>
-                          <m:sup>
-                            <m:r>
-                              <a:rPr lang="it-CH" sz="2000" i="1" smtClean="0">
-                                <a:latin typeface="Cambria Math" panose="02040503050406030204" pitchFamily="18" charset="0"/>
-                              </a:rPr>
-                              <m:t>𝑁</m:t>
-                            </m:r>
-                          </m:sup>
-                          <m:e>
-                            <m:sSup>
-                              <m:sSupPr>
-                                <m:ctrlPr>
-                                  <a:rPr lang="it-CH" sz="2000" i="1" smtClean="0">
-                                    <a:latin typeface="Cambria Math" panose="02040503050406030204" pitchFamily="18" charset="0"/>
-                                  </a:rPr>
-                                </m:ctrlPr>
-                              </m:sSupPr>
-                              <m:e>
-                                <m:d>
-                                  <m:dPr>
-                                    <m:ctrlPr>
-                                      <a:rPr lang="it-CH" sz="2000" i="1" smtClean="0">
-                                        <a:latin typeface="Cambria Math" panose="02040503050406030204" pitchFamily="18" charset="0"/>
-                                      </a:rPr>
-                                    </m:ctrlPr>
-                                  </m:dPr>
-                                  <m:e>
-                                    <m:sSup>
-                                      <m:sSupPr>
-                                        <m:ctrlPr>
-                                          <a:rPr lang="it-CH" sz="2000" i="1">
-                                            <a:latin typeface="Cambria Math" panose="02040503050406030204" pitchFamily="18" charset="0"/>
-                                          </a:rPr>
-                                        </m:ctrlPr>
-                                      </m:sSupPr>
-                                      <m:e>
-                                        <m:r>
-                                          <a:rPr lang="it-CH" sz="2000" i="1">
-                                            <a:latin typeface="Cambria Math" panose="02040503050406030204" pitchFamily="18" charset="0"/>
-                                          </a:rPr>
-                                          <m:t>𝑦</m:t>
-                                        </m:r>
-                                      </m:e>
-                                      <m:sup>
-                                        <m:r>
-                                          <a:rPr lang="it-CH" sz="2000" i="1">
-                                            <a:latin typeface="Cambria Math" panose="02040503050406030204" pitchFamily="18" charset="0"/>
-                                          </a:rPr>
-                                          <m:t>𝑖</m:t>
-                                        </m:r>
-                                      </m:sup>
-                                    </m:sSup>
-                                    <m:r>
-                                      <a:rPr lang="it-CH" sz="2000" i="1" smtClean="0">
-                                        <a:latin typeface="Cambria Math" panose="02040503050406030204" pitchFamily="18" charset="0"/>
-                                      </a:rPr>
-                                      <m:t>−</m:t>
-                                    </m:r>
-                                    <m:sSup>
-                                      <m:sSupPr>
-                                        <m:ctrlPr>
-                                          <a:rPr lang="it-CH" sz="2000" i="1">
-                                            <a:latin typeface="Cambria Math" panose="02040503050406030204" pitchFamily="18" charset="0"/>
-                                          </a:rPr>
-                                        </m:ctrlPr>
-                                      </m:sSupPr>
-                                      <m:e>
-                                        <m:acc>
-                                          <m:accPr>
-                                            <m:chr m:val="̂"/>
-                                            <m:ctrlPr>
-                                              <a:rPr lang="it-CH" sz="2000" i="1">
-                                                <a:latin typeface="Cambria Math" panose="02040503050406030204" pitchFamily="18" charset="0"/>
-                                              </a:rPr>
-                                            </m:ctrlPr>
-                                          </m:accPr>
-                                          <m:e>
-                                            <m:r>
-                                              <a:rPr lang="it-CH" sz="2000" i="1">
-                                                <a:latin typeface="Cambria Math" panose="02040503050406030204" pitchFamily="18" charset="0"/>
-                                              </a:rPr>
-                                              <m:t>𝑦</m:t>
-                                            </m:r>
-                                          </m:e>
-                                        </m:acc>
-                                      </m:e>
-                                      <m:sup>
-                                        <m:r>
-                                          <a:rPr lang="it-CH" sz="2000" i="1">
-                                            <a:latin typeface="Cambria Math" panose="02040503050406030204" pitchFamily="18" charset="0"/>
-                                          </a:rPr>
-                                          <m:t>𝑖</m:t>
-                                        </m:r>
-                                      </m:sup>
-                                    </m:sSup>
-                                    <m:r>
-                                      <a:rPr lang="it-CH" sz="2000" i="1" smtClean="0">
-                                        <a:latin typeface="Cambria Math" panose="02040503050406030204" pitchFamily="18" charset="0"/>
-                                      </a:rPr>
-                                      <m:t>(</m:t>
-                                    </m:r>
-                                    <m:r>
-                                      <a:rPr lang="it-CH" sz="2000" i="1">
-                                        <a:solidFill>
-                                          <a:srgbClr val="FF0000"/>
-                                        </a:solidFill>
-                                        <a:latin typeface="Cambria Math" panose="02040503050406030204" pitchFamily="18" charset="0"/>
-                                        <a:ea typeface="Cambria Math" panose="02040503050406030204" pitchFamily="18" charset="0"/>
-                                      </a:rPr>
-                                      <m:t>𝜃</m:t>
-                                    </m:r>
-                                    <m:r>
-                                      <a:rPr lang="it-CH" sz="2000" i="1" smtClean="0">
-                                        <a:latin typeface="Cambria Math" panose="02040503050406030204" pitchFamily="18" charset="0"/>
-                                      </a:rPr>
-                                      <m:t>)</m:t>
-                                    </m:r>
-                                  </m:e>
-                                </m:d>
-                              </m:e>
-                              <m:sup>
-                                <m:r>
-                                  <a:rPr lang="it-CH" sz="2000" i="1" smtClean="0">
-                                    <a:latin typeface="Cambria Math" panose="02040503050406030204" pitchFamily="18" charset="0"/>
-                                  </a:rPr>
-                                  <m:t>2</m:t>
-                                </m:r>
-                              </m:sup>
-                            </m:sSup>
-                          </m:e>
-                        </m:nary>
-                      </m:e>
-                      <m:sub>
-                        <m:r>
-                          <a:rPr lang="en-US" sz="2000" i="1" smtClean="0">
-                            <a:latin typeface="Cambria Math" panose="02040503050406030204" pitchFamily="18" charset="0"/>
-                          </a:rPr>
-                          <m:t> </m:t>
-                        </m:r>
-                      </m:sub>
-                    </m:sSub>
-                  </m:oMath>
-                </a14:m>
-                <a:r>
-                  <a:rPr lang="it-CH" sz="2000" dirty="0"/>
-                  <a:t>   </a:t>
-                </a:r>
-                <a:r>
-                  <a:rPr lang="it-CH" sz="2000" dirty="0">
-                    <a:solidFill>
-                      <a:srgbClr val="FF0000"/>
-                    </a:solidFill>
-                  </a:rPr>
-                  <a:t>Loss (MSE)</a:t>
-                </a:r>
-              </a:p>
-              <a:p>
-                <a:endParaRPr lang="it-CH" dirty="0">
-                  <a:solidFill>
-                    <a:srgbClr val="FF0000"/>
-                  </a:solidFill>
-                </a:endParaRPr>
-              </a:p>
-            </p:txBody>
-          </p:sp>
-        </mc:Choice>
-        <mc:Fallback xmlns="">
-          <p:sp>
-            <p:nvSpPr>
-              <p:cNvPr id="2" name="CasellaDiTesto 6">
-                <a:extLst>
-                  <a:ext uri="{FF2B5EF4-FFF2-40B4-BE49-F238E27FC236}">
-                    <a16:creationId xmlns:a16="http://schemas.microsoft.com/office/drawing/2014/main" id="{A7D7822F-A4F3-878F-85A3-9A097B9C5114}"/>
-                  </a:ext>
-                </a:extLst>
-              </p:cNvPr>
-              <p:cNvSpPr txBox="1">
-                <a:spLocks noRot="1" noChangeAspect="1" noMove="1" noResize="1" noEditPoints="1" noAdjustHandles="1" noChangeArrowheads="1" noChangeShapeType="1" noTextEdit="1"/>
-              </p:cNvSpPr>
-              <p:nvPr/>
-            </p:nvSpPr>
-            <p:spPr>
-              <a:xfrm>
-                <a:off x="431800" y="1916114"/>
-                <a:ext cx="5562600" cy="2965555"/>
-              </a:xfrm>
-              <a:prstGeom prst="rect">
-                <a:avLst/>
-              </a:prstGeom>
-              <a:blipFill>
-                <a:blip r:embed="rId3"/>
-                <a:stretch>
-                  <a:fillRect t="-2979" b="-5532"/>
-                </a:stretch>
-              </a:blipFill>
-            </p:spPr>
-            <p:txBody>
-              <a:bodyPr/>
-              <a:lstStyle/>
-              <a:p>
-                <a:r>
-                  <a:rPr lang="en-CH">
-                    <a:noFill/>
-                  </a:rPr>
-                  <a:t> </a:t>
-                </a:r>
-              </a:p>
-            </p:txBody>
-          </p:sp>
-        </mc:Fallback>
-      </mc:AlternateContent>
-      <p:sp>
-        <p:nvSpPr>
-          <p:cNvPr id="3" name="Rectangle 2">
-            <a:extLst>
-              <a:ext uri="{FF2B5EF4-FFF2-40B4-BE49-F238E27FC236}">
-                <a16:creationId xmlns:a16="http://schemas.microsoft.com/office/drawing/2014/main" id="{1F5B4AC6-3F8A-F296-10EA-EEBEB52F7F97}"/>
-              </a:ext>
-            </a:extLst>
-          </p:cNvPr>
-          <p:cNvSpPr txBox="1">
-            <a:spLocks/>
-          </p:cNvSpPr>
-          <p:nvPr/>
-        </p:nvSpPr>
-        <p:spPr>
-          <a:xfrm>
-            <a:off x="6840962" y="1103753"/>
-            <a:ext cx="4742567" cy="646656"/>
-          </a:xfrm>
-          <a:prstGeom prst="rect">
-            <a:avLst/>
-          </a:prstGeom>
-        </p:spPr>
-        <p:txBody>
-          <a:bodyPr vert="horz" lIns="91440" tIns="45720" rIns="91440" bIns="45720" rtlCol="0">
-            <a:normAutofit/>
-          </a:bodyPr>
-          <a:lstStyle>
-            <a:lvl1pPr marL="228600" indent="-228600" algn="l" defTabSz="914400" rtl="0" eaLnBrk="1" latinLnBrk="0" hangingPunct="1">
-              <a:lnSpc>
-                <a:spcPct val="90000"/>
-              </a:lnSpc>
-              <a:spcBef>
-                <a:spcPts val="1000"/>
-              </a:spcBef>
-              <a:buFont typeface="Arial" panose="020B0604020202020204" pitchFamily="34" charset="0"/>
-              <a:buChar char="•"/>
-              <a:defRPr sz="2800" kern="1200">
-                <a:solidFill>
-                  <a:schemeClr val="tx1"/>
-                </a:solidFill>
-                <a:latin typeface="+mn-lt"/>
-                <a:ea typeface="+mn-ea"/>
-                <a:cs typeface="+mn-cs"/>
-              </a:defRPr>
-            </a:lvl1pPr>
-            <a:lvl2pPr marL="685800" indent="-228600" algn="l" defTabSz="914400" rtl="0" eaLnBrk="1" latinLnBrk="0" hangingPunct="1">
-              <a:lnSpc>
-                <a:spcPct val="90000"/>
-              </a:lnSpc>
-              <a:spcBef>
-                <a:spcPts val="500"/>
-              </a:spcBef>
-              <a:buFont typeface="Arial" panose="020B0604020202020204" pitchFamily="34" charset="0"/>
-              <a:buChar char="•"/>
-              <a:defRPr sz="2400" kern="1200">
-                <a:solidFill>
-                  <a:schemeClr val="tx1"/>
-                </a:solidFill>
-                <a:latin typeface="+mn-lt"/>
-                <a:ea typeface="+mn-ea"/>
-                <a:cs typeface="+mn-cs"/>
-              </a:defRPr>
-            </a:lvl2pPr>
-            <a:lvl3pPr marL="1143000" indent="-228600" algn="l" defTabSz="914400" rtl="0" eaLnBrk="1" latinLnBrk="0" hangingPunct="1">
-              <a:lnSpc>
-                <a:spcPct val="90000"/>
-              </a:lnSpc>
-              <a:spcBef>
-                <a:spcPts val="500"/>
-              </a:spcBef>
-              <a:buFont typeface="Arial" panose="020B0604020202020204" pitchFamily="34" charset="0"/>
-              <a:buChar char="•"/>
-              <a:defRPr sz="2000" kern="1200">
-                <a:solidFill>
-                  <a:schemeClr val="tx1"/>
-                </a:solidFill>
-                <a:latin typeface="+mn-lt"/>
-                <a:ea typeface="+mn-ea"/>
-                <a:cs typeface="+mn-cs"/>
-              </a:defRPr>
-            </a:lvl3pPr>
-            <a:lvl4pPr marL="1600200" indent="-228600" algn="l" defTabSz="914400" rtl="0" eaLnBrk="1" latinLnBrk="0" hangingPunct="1">
-              <a:lnSpc>
-                <a:spcPct val="90000"/>
-              </a:lnSpc>
-              <a:spcBef>
-                <a:spcPts val="500"/>
-              </a:spcBef>
-              <a:buFont typeface="Arial" panose="020B0604020202020204" pitchFamily="34" charset="0"/>
-              <a:buChar char="•"/>
-              <a:defRPr sz="1800" kern="1200">
-                <a:solidFill>
-                  <a:schemeClr val="tx1"/>
-                </a:solidFill>
-                <a:latin typeface="+mn-lt"/>
-                <a:ea typeface="+mn-ea"/>
-                <a:cs typeface="+mn-cs"/>
-              </a:defRPr>
-            </a:lvl4pPr>
-            <a:lvl5pPr marL="2057400" indent="-228600" algn="l" defTabSz="914400" rtl="0" eaLnBrk="1" latinLnBrk="0" hangingPunct="1">
-              <a:lnSpc>
-                <a:spcPct val="90000"/>
-              </a:lnSpc>
-              <a:spcBef>
-                <a:spcPts val="500"/>
-              </a:spcBef>
-              <a:buFont typeface="Arial" panose="020B0604020202020204" pitchFamily="34" charset="0"/>
-              <a:buChar char="•"/>
-              <a:defRPr sz="1800" kern="1200">
-                <a:solidFill>
-                  <a:schemeClr val="tx1"/>
-                </a:solidFill>
-                <a:latin typeface="+mn-lt"/>
-                <a:ea typeface="+mn-ea"/>
-                <a:cs typeface="+mn-cs"/>
-              </a:defRPr>
-            </a:lvl5pPr>
-            <a:lvl6pPr marL="2514600" indent="-228600" algn="l" defTabSz="914400" rtl="0" eaLnBrk="1" latinLnBrk="0" hangingPunct="1">
-              <a:lnSpc>
-                <a:spcPct val="90000"/>
-              </a:lnSpc>
-              <a:spcBef>
-                <a:spcPts val="500"/>
-              </a:spcBef>
-              <a:buFont typeface="Arial" panose="020B0604020202020204" pitchFamily="34" charset="0"/>
-              <a:buChar char="•"/>
-              <a:defRPr sz="1800" kern="1200">
-                <a:solidFill>
-                  <a:schemeClr val="tx1"/>
-                </a:solidFill>
-                <a:latin typeface="+mn-lt"/>
-                <a:ea typeface="+mn-ea"/>
-                <a:cs typeface="+mn-cs"/>
-              </a:defRPr>
-            </a:lvl6pPr>
-            <a:lvl7pPr marL="2971800" indent="-228600" algn="l" defTabSz="914400" rtl="0" eaLnBrk="1" latinLnBrk="0" hangingPunct="1">
-              <a:lnSpc>
-                <a:spcPct val="90000"/>
-              </a:lnSpc>
-              <a:spcBef>
-                <a:spcPts val="500"/>
-              </a:spcBef>
-              <a:buFont typeface="Arial" panose="020B0604020202020204" pitchFamily="34" charset="0"/>
-              <a:buChar char="•"/>
-              <a:defRPr sz="1800" kern="1200">
-                <a:solidFill>
-                  <a:schemeClr val="tx1"/>
-                </a:solidFill>
-                <a:latin typeface="+mn-lt"/>
-                <a:ea typeface="+mn-ea"/>
-                <a:cs typeface="+mn-cs"/>
-              </a:defRPr>
-            </a:lvl7pPr>
-            <a:lvl8pPr marL="3429000" indent="-228600" algn="l" defTabSz="914400" rtl="0" eaLnBrk="1" latinLnBrk="0" hangingPunct="1">
-              <a:lnSpc>
-                <a:spcPct val="90000"/>
-              </a:lnSpc>
-              <a:spcBef>
-                <a:spcPts val="500"/>
-              </a:spcBef>
-              <a:buFont typeface="Arial" panose="020B0604020202020204" pitchFamily="34" charset="0"/>
-              <a:buChar char="•"/>
-              <a:defRPr sz="1800" kern="1200">
-                <a:solidFill>
-                  <a:schemeClr val="tx1"/>
-                </a:solidFill>
-                <a:latin typeface="+mn-lt"/>
-                <a:ea typeface="+mn-ea"/>
-                <a:cs typeface="+mn-cs"/>
-              </a:defRPr>
-            </a:lvl8pPr>
-            <a:lvl9pPr marL="3886200" indent="-228600" algn="l" defTabSz="914400" rtl="0" eaLnBrk="1" latinLnBrk="0" hangingPunct="1">
-              <a:lnSpc>
-                <a:spcPct val="90000"/>
-              </a:lnSpc>
-              <a:spcBef>
-                <a:spcPts val="500"/>
-              </a:spcBef>
-              <a:buFont typeface="Arial" panose="020B0604020202020204" pitchFamily="34" charset="0"/>
-              <a:buChar char="•"/>
-              <a:defRPr sz="1800" kern="1200">
-                <a:solidFill>
-                  <a:schemeClr val="tx1"/>
-                </a:solidFill>
-                <a:latin typeface="+mn-lt"/>
-                <a:ea typeface="+mn-ea"/>
-                <a:cs typeface="+mn-cs"/>
-              </a:defRPr>
-            </a:lvl9pPr>
-          </a:lstStyle>
-          <a:p>
-            <a:pPr algn="ctr">
-              <a:buFont typeface="Arial" panose="020B0604020202020204" pitchFamily="34" charset="0"/>
-              <a:buNone/>
-            </a:pPr>
-            <a:r>
-              <a:rPr lang="it-CH" sz="2400" dirty="0"/>
-              <a:t>	</a:t>
-            </a:r>
-            <a:r>
-              <a:rPr lang="en-US" sz="2400" dirty="0"/>
-              <a:t>Real estate application</a:t>
-            </a:r>
-            <a:endParaRPr lang="it-CH" sz="2400" dirty="0"/>
-          </a:p>
-        </p:txBody>
-      </p:sp>
-      <p:pic>
-        <p:nvPicPr>
-          <p:cNvPr id="4" name="Immagine 3">
-            <a:extLst>
-              <a:ext uri="{FF2B5EF4-FFF2-40B4-BE49-F238E27FC236}">
-                <a16:creationId xmlns:a16="http://schemas.microsoft.com/office/drawing/2014/main" id="{539DBBF8-D1F5-4383-B1A1-04093299363D}"/>
-              </a:ext>
-            </a:extLst>
-          </p:cNvPr>
-          <p:cNvPicPr>
-            <a:picLocks noChangeAspect="1"/>
-          </p:cNvPicPr>
-          <p:nvPr/>
-        </p:nvPicPr>
-        <p:blipFill>
-          <a:blip r:embed="rId4"/>
-          <a:stretch>
-            <a:fillRect/>
-          </a:stretch>
-        </p:blipFill>
-        <p:spPr>
-          <a:xfrm>
-            <a:off x="5904858" y="1705936"/>
-            <a:ext cx="5707770" cy="3648638"/>
-          </a:xfrm>
-          <a:prstGeom prst="rect">
-            <a:avLst/>
-          </a:prstGeom>
-        </p:spPr>
-      </p:pic>
-      <mc:AlternateContent xmlns:mc="http://schemas.openxmlformats.org/markup-compatibility/2006" xmlns:a14="http://schemas.microsoft.com/office/drawing/2010/main">
-        <mc:Choice Requires="a14">
-          <p:sp>
-            <p:nvSpPr>
-              <p:cNvPr id="5" name="CasellaDiTesto 9">
-                <a:extLst>
-                  <a:ext uri="{FF2B5EF4-FFF2-40B4-BE49-F238E27FC236}">
-                    <a16:creationId xmlns:a16="http://schemas.microsoft.com/office/drawing/2014/main" id="{46004CFB-49A1-05A8-EBB9-744817BB1B8C}"/>
-                  </a:ext>
-                </a:extLst>
-              </p:cNvPr>
-              <p:cNvSpPr txBox="1"/>
-              <p:nvPr/>
-            </p:nvSpPr>
-            <p:spPr>
-              <a:xfrm>
-                <a:off x="1192741" y="5091847"/>
-                <a:ext cx="4131470" cy="560923"/>
-              </a:xfrm>
-              <a:prstGeom prst="rect">
-                <a:avLst/>
-              </a:prstGeom>
-              <a:noFill/>
-              <a:ln>
-                <a:solidFill>
-                  <a:srgbClr val="00B0F0"/>
-                </a:solidFill>
-              </a:ln>
-            </p:spPr>
-            <p:txBody>
-              <a:bodyPr wrap="square" lIns="0" tIns="0" rIns="0" bIns="0" rtlCol="0">
-                <a:spAutoFit/>
-              </a:bodyPr>
-              <a:lstStyle/>
-              <a:p>
-                <a:pPr/>
-                <a14:m>
-                  <m:oMathPara xmlns:m="http://schemas.openxmlformats.org/officeDocument/2006/math">
-                    <m:oMathParaPr>
-                      <m:jc m:val="centerGroup"/>
-                    </m:oMathParaPr>
-                    <m:oMath xmlns:m="http://schemas.openxmlformats.org/officeDocument/2006/math">
-                      <m:sSup>
-                        <m:sSupPr>
-                          <m:ctrlPr>
-                            <a:rPr lang="it-CH" sz="2800" b="0" i="1" smtClean="0">
-                              <a:latin typeface="Cambria Math" panose="02040503050406030204" pitchFamily="18" charset="0"/>
-                            </a:rPr>
-                          </m:ctrlPr>
-                        </m:sSupPr>
-                        <m:e>
-                          <m:r>
-                            <a:rPr lang="it-CH" sz="2800" b="0" i="1" smtClean="0">
-                              <a:latin typeface="Cambria Math" panose="02040503050406030204" pitchFamily="18" charset="0"/>
-                              <a:ea typeface="Cambria Math" panose="02040503050406030204" pitchFamily="18" charset="0"/>
-                            </a:rPr>
-                            <m:t>𝜃</m:t>
-                          </m:r>
-                        </m:e>
-                        <m:sup>
-                          <m:r>
-                            <a:rPr lang="it-CH" sz="2800" b="0" i="1" smtClean="0">
-                              <a:latin typeface="Cambria Math" panose="02040503050406030204" pitchFamily="18" charset="0"/>
-                            </a:rPr>
-                            <m:t>∗</m:t>
-                          </m:r>
-                        </m:sup>
-                      </m:sSup>
-                      <m:r>
-                        <a:rPr lang="it-CH" sz="2800" b="0" i="1" smtClean="0">
-                          <a:latin typeface="Cambria Math" panose="02040503050406030204" pitchFamily="18" charset="0"/>
-                        </a:rPr>
-                        <m:t>=</m:t>
-                      </m:r>
-                      <m:r>
-                        <a:rPr lang="it-CH" sz="2800" b="0" i="1" smtClean="0">
-                          <a:latin typeface="Cambria Math" panose="02040503050406030204" pitchFamily="18" charset="0"/>
-                        </a:rPr>
-                        <m:t>𝑎𝑟𝑔</m:t>
-                      </m:r>
-                      <m:func>
-                        <m:funcPr>
-                          <m:ctrlPr>
-                            <a:rPr lang="it-CH" sz="2800" b="0" i="1" smtClean="0">
-                              <a:latin typeface="Cambria Math" panose="02040503050406030204" pitchFamily="18" charset="0"/>
-                            </a:rPr>
-                          </m:ctrlPr>
-                        </m:funcPr>
-                        <m:fName>
-                          <m:limLow>
-                            <m:limLowPr>
-                              <m:ctrlPr>
-                                <a:rPr lang="it-CH" sz="2800" b="0" i="1" smtClean="0">
-                                  <a:latin typeface="Cambria Math" panose="02040503050406030204" pitchFamily="18" charset="0"/>
-                                </a:rPr>
-                              </m:ctrlPr>
-                            </m:limLowPr>
-                            <m:e>
-                              <m:r>
-                                <m:rPr>
-                                  <m:sty m:val="p"/>
-                                </m:rPr>
-                                <a:rPr lang="it-CH" sz="2800" b="0" i="0" smtClean="0">
-                                  <a:latin typeface="Cambria Math" panose="02040503050406030204" pitchFamily="18" charset="0"/>
-                                </a:rPr>
-                                <m:t>min</m:t>
-                              </m:r>
-                            </m:e>
-                            <m:lim>
-                              <m:r>
-                                <a:rPr lang="it-CH" sz="2800" i="1">
-                                  <a:solidFill>
-                                    <a:srgbClr val="FF0000"/>
-                                  </a:solidFill>
-                                  <a:latin typeface="Cambria Math" panose="02040503050406030204" pitchFamily="18" charset="0"/>
-                                  <a:ea typeface="Cambria Math" panose="02040503050406030204" pitchFamily="18" charset="0"/>
-                                </a:rPr>
-                                <m:t>𝜃</m:t>
-                              </m:r>
-                            </m:lim>
-                          </m:limLow>
-                        </m:fName>
-                        <m:e>
-                          <m:r>
-                            <a:rPr lang="it-CH" sz="2800" i="1" dirty="0">
-                              <a:latin typeface="Cambria Math" panose="02040503050406030204" pitchFamily="18" charset="0"/>
-                              <a:ea typeface="Cambria Math" panose="02040503050406030204" pitchFamily="18" charset="0"/>
-                            </a:rPr>
-                            <m:t>ℒ</m:t>
-                          </m:r>
-                          <m:r>
-                            <a:rPr lang="it-CH" sz="2800" i="1">
-                              <a:latin typeface="Cambria Math" panose="02040503050406030204" pitchFamily="18" charset="0"/>
-                            </a:rPr>
-                            <m:t>(</m:t>
-                          </m:r>
-                          <m:r>
-                            <a:rPr lang="it-CH" sz="2800" i="1">
-                              <a:solidFill>
-                                <a:srgbClr val="FF0000"/>
-                              </a:solidFill>
-                              <a:latin typeface="Cambria Math" panose="02040503050406030204" pitchFamily="18" charset="0"/>
-                              <a:ea typeface="Cambria Math" panose="02040503050406030204" pitchFamily="18" charset="0"/>
-                            </a:rPr>
-                            <m:t>𝜃</m:t>
-                          </m:r>
-                          <m:r>
-                            <a:rPr lang="it-CH" sz="2800" i="1">
-                              <a:latin typeface="Cambria Math" panose="02040503050406030204" pitchFamily="18" charset="0"/>
-                            </a:rPr>
-                            <m:t>)</m:t>
-                          </m:r>
-                        </m:e>
-                      </m:func>
-                    </m:oMath>
-                  </m:oMathPara>
-                </a14:m>
-                <a:endParaRPr lang="it-CH" sz="3600" dirty="0">
-                  <a:solidFill>
-                    <a:srgbClr val="FF0000"/>
-                  </a:solidFill>
-                </a:endParaRPr>
-              </a:p>
-            </p:txBody>
-          </p:sp>
-        </mc:Choice>
-        <mc:Fallback xmlns="">
-          <p:sp>
-            <p:nvSpPr>
-              <p:cNvPr id="5" name="CasellaDiTesto 9">
-                <a:extLst>
-                  <a:ext uri="{FF2B5EF4-FFF2-40B4-BE49-F238E27FC236}">
-                    <a16:creationId xmlns:a16="http://schemas.microsoft.com/office/drawing/2014/main" id="{46004CFB-49A1-05A8-EBB9-744817BB1B8C}"/>
-                  </a:ext>
-                </a:extLst>
-              </p:cNvPr>
-              <p:cNvSpPr txBox="1">
-                <a:spLocks noRot="1" noChangeAspect="1" noMove="1" noResize="1" noEditPoints="1" noAdjustHandles="1" noChangeArrowheads="1" noChangeShapeType="1" noTextEdit="1"/>
-              </p:cNvSpPr>
-              <p:nvPr/>
-            </p:nvSpPr>
-            <p:spPr>
-              <a:xfrm>
-                <a:off x="1192741" y="5091847"/>
-                <a:ext cx="4131470" cy="560923"/>
-              </a:xfrm>
-              <a:prstGeom prst="rect">
-                <a:avLst/>
-              </a:prstGeom>
-              <a:blipFill>
-                <a:blip r:embed="rId5"/>
-                <a:stretch>
-                  <a:fillRect b="-15217"/>
-                </a:stretch>
-              </a:blipFill>
-              <a:ln>
-                <a:solidFill>
-                  <a:srgbClr val="00B0F0"/>
-                </a:solidFill>
-              </a:ln>
-            </p:spPr>
-            <p:txBody>
-              <a:bodyPr/>
-              <a:lstStyle/>
-              <a:p>
-                <a:r>
-                  <a:rPr lang="en-CH">
-                    <a:noFill/>
-                  </a:rPr>
-                  <a:t> </a:t>
-                </a:r>
-              </a:p>
-            </p:txBody>
-          </p:sp>
-        </mc:Fallback>
-      </mc:AlternateContent>
-    </p:spTree>
-    <p:extLst>
-      <p:ext uri="{BB962C8B-B14F-4D97-AF65-F5344CB8AC3E}">
-        <p14:creationId xmlns:p14="http://schemas.microsoft.com/office/powerpoint/2010/main" val="858160889"/>
-      </p:ext>
-    </p:extLst>
-  </p:cSld>
-  <p:clrMapOvr>
-    <a:masterClrMapping/>
-  </p:clrMapOvr>
-  <p:timing>
-    <p:tnLst>
-      <p:par>
-        <p:cTn id="1" dur="indefinite" restart="never" nodeType="tmRoot">
-          <p:childTnLst>
-            <p:seq concurrent="1" nextAc="seek">
-              <p:cTn id="2" dur="indefinite" nodeType="mainSeq">
-                <p:childTnLst>
-                  <p:par>
-                    <p:cTn id="3" fill="hold">
-                      <p:stCondLst>
-                        <p:cond delay="indefinite"/>
-                      </p:stCondLst>
-                      <p:childTnLst>
-                        <p:par>
-                          <p:cTn id="4" fill="hold">
-                            <p:stCondLst>
-                              <p:cond delay="0"/>
-                            </p:stCondLst>
-                            <p:childTnLst>
-                              <p:par>
-                                <p:cTn id="5" presetID="1" presetClass="entr" presetSubtype="0" fill="hold" grpId="0" nodeType="clickEffect">
-                                  <p:stCondLst>
-                                    <p:cond delay="0"/>
-                                  </p:stCondLst>
-                                  <p:childTnLst>
-                                    <p:set>
-                                      <p:cBhvr>
-                                        <p:cTn id="6" dur="1" fill="hold">
-                                          <p:stCondLst>
-                                            <p:cond delay="0"/>
-                                          </p:stCondLst>
-                                        </p:cTn>
-                                        <p:tgtEl>
-                                          <p:spTgt spid="5"/>
-                                        </p:tgtEl>
-                                        <p:attrNameLst>
-                                          <p:attrName>style.visibility</p:attrName>
-                                        </p:attrNameLst>
-                                      </p:cBhvr>
-                                      <p:to>
-                                        <p:strVal val="visible"/>
-                                      </p:to>
-                                    </p:set>
-                                  </p:childTnLst>
-                                </p:cTn>
-                              </p:par>
-                            </p:childTnLst>
-                          </p:cTn>
-                        </p:par>
-                      </p:childTnLst>
-                    </p:cTn>
-                  </p:par>
-                </p:childTnLst>
-              </p:cTn>
-              <p:prevCondLst>
-                <p:cond evt="onPrev" delay="0">
-                  <p:tgtEl>
-                    <p:sldTgt/>
-                  </p:tgtEl>
-                </p:cond>
-              </p:prevCondLst>
-              <p:nextCondLst>
-                <p:cond evt="onNext" delay="0">
-                  <p:tgtEl>
-                    <p:sldTgt/>
-                  </p:tgtEl>
-                </p:cond>
-              </p:nextCondLst>
-            </p:seq>
-          </p:childTnLst>
-        </p:cTn>
-      </p:par>
-    </p:tnLst>
-    <p:bldLst>
-      <p:bldP spid="5" grpId="0" animBg="1"/>
-    </p:bldLst>
-  </p:timing>
-</p:sld>
-</file>
-
-<file path=ppt/slides/slide3.xml><?xml version="1.0" encoding="utf-8"?>
 <p:sld xmlns:a="http://schemas.openxmlformats.org/drawingml/2006/main" xmlns:r="http://schemas.openxmlformats.org/officeDocument/2006/relationships" xmlns:p="http://schemas.openxmlformats.org/presentationml/2006/main">
   <p:cSld>
     <p:spTree>
@@ -24088,7 +18873,7 @@
 </p:sld>
 </file>
 
-<file path=ppt/slides/slide4.xml><?xml version="1.0" encoding="utf-8"?>
+<file path=ppt/slides/slide3.xml><?xml version="1.0" encoding="utf-8"?>
 <p:sld xmlns:a="http://schemas.openxmlformats.org/drawingml/2006/main" xmlns:r="http://schemas.openxmlformats.org/officeDocument/2006/relationships" xmlns:p="http://schemas.openxmlformats.org/presentationml/2006/main">
   <p:cSld>
     <p:spTree>
@@ -25103,7 +19888,7 @@
 </p:sld>
 </file>
 
-<file path=ppt/slides/slide5.xml><?xml version="1.0" encoding="utf-8"?>
+<file path=ppt/slides/slide4.xml><?xml version="1.0" encoding="utf-8"?>
 <p:sld xmlns:a="http://schemas.openxmlformats.org/drawingml/2006/main" xmlns:r="http://schemas.openxmlformats.org/officeDocument/2006/relationships" xmlns:p="http://schemas.openxmlformats.org/presentationml/2006/main">
   <p:cSld>
     <p:spTree>
@@ -25540,7 +20325,7 @@
 </p:sld>
 </file>
 
-<file path=ppt/slides/slide6.xml><?xml version="1.0" encoding="utf-8"?>
+<file path=ppt/slides/slide5.xml><?xml version="1.0" encoding="utf-8"?>
 <p:sld xmlns:a="http://schemas.openxmlformats.org/drawingml/2006/main" xmlns:r="http://schemas.openxmlformats.org/officeDocument/2006/relationships" xmlns:p="http://schemas.openxmlformats.org/presentationml/2006/main">
   <p:cSld>
     <p:spTree>
@@ -25764,7 +20549,7 @@
 </p:sld>
 </file>
 
-<file path=ppt/slides/slide7.xml><?xml version="1.0" encoding="utf-8"?>
+<file path=ppt/slides/slide6.xml><?xml version="1.0" encoding="utf-8"?>
 <p:sld xmlns:a="http://schemas.openxmlformats.org/drawingml/2006/main" xmlns:r="http://schemas.openxmlformats.org/officeDocument/2006/relationships" xmlns:p="http://schemas.openxmlformats.org/presentationml/2006/main">
   <p:cSld>
     <p:spTree>
@@ -26360,7 +21145,7 @@
 </p:sld>
 </file>
 
-<file path=ppt/slides/slide8.xml><?xml version="1.0" encoding="utf-8"?>
+<file path=ppt/slides/slide7.xml><?xml version="1.0" encoding="utf-8"?>
 <p:sld xmlns:a="http://schemas.openxmlformats.org/drawingml/2006/main" xmlns:r="http://schemas.openxmlformats.org/officeDocument/2006/relationships" xmlns:p="http://schemas.openxmlformats.org/presentationml/2006/main">
   <p:cSld>
     <p:spTree>
@@ -27327,7 +22112,7 @@
 </p:sld>
 </file>
 
-<file path=ppt/slides/slide9.xml><?xml version="1.0" encoding="utf-8"?>
+<file path=ppt/slides/slide8.xml><?xml version="1.0" encoding="utf-8"?>
 <p:sld xmlns:a="http://schemas.openxmlformats.org/drawingml/2006/main" xmlns:r="http://schemas.openxmlformats.org/officeDocument/2006/relationships" xmlns:p="http://schemas.openxmlformats.org/presentationml/2006/main">
   <p:cSld>
     <p:spTree>
@@ -30705,6 +25490,3593 @@
 </p:sld>
 </file>
 
+<file path=ppt/slides/slide9.xml><?xml version="1.0" encoding="utf-8"?>
+<p:sld xmlns:a="http://schemas.openxmlformats.org/drawingml/2006/main" xmlns:r="http://schemas.openxmlformats.org/officeDocument/2006/relationships" xmlns:p="http://schemas.openxmlformats.org/presentationml/2006/main">
+  <p:cSld>
+    <p:spTree>
+      <p:nvGrpSpPr>
+        <p:cNvPr id="1" name=""/>
+        <p:cNvGrpSpPr/>
+        <p:nvPr/>
+      </p:nvGrpSpPr>
+      <p:grpSpPr>
+        <a:xfrm>
+          <a:off x="0" y="0"/>
+          <a:ext cx="0" cy="0"/>
+          <a:chOff x="0" y="0"/>
+          <a:chExt cx="0" cy="0"/>
+        </a:xfrm>
+      </p:grpSpPr>
+      <p:sp>
+        <p:nvSpPr>
+          <p:cNvPr id="15" name="Rettangolo 14">
+            <a:extLst>
+              <a:ext uri="{FF2B5EF4-FFF2-40B4-BE49-F238E27FC236}">
+                <a16:creationId xmlns:a16="http://schemas.microsoft.com/office/drawing/2014/main" id="{7E5E5FE8-2860-6D76-9470-7E03FE4923A6}"/>
+              </a:ext>
+            </a:extLst>
+          </p:cNvPr>
+          <p:cNvSpPr/>
+          <p:nvPr/>
+        </p:nvSpPr>
+        <p:spPr>
+          <a:xfrm flipV="1">
+            <a:off x="154112" y="647878"/>
+            <a:ext cx="12037888" cy="45719"/>
+          </a:xfrm>
+          <a:prstGeom prst="rect">
+            <a:avLst/>
+          </a:prstGeom>
+          <a:solidFill>
+            <a:srgbClr val="C00000"/>
+          </a:solidFill>
+          <a:ln>
+            <a:noFill/>
+          </a:ln>
+        </p:spPr>
+        <p:style>
+          <a:lnRef idx="2">
+            <a:schemeClr val="accent1">
+              <a:shade val="50000"/>
+            </a:schemeClr>
+          </a:lnRef>
+          <a:fillRef idx="1">
+            <a:schemeClr val="accent1"/>
+          </a:fillRef>
+          <a:effectRef idx="0">
+            <a:schemeClr val="accent1"/>
+          </a:effectRef>
+          <a:fontRef idx="minor">
+            <a:schemeClr val="lt1"/>
+          </a:fontRef>
+        </p:style>
+        <p:txBody>
+          <a:bodyPr rtlCol="0" anchor="ctr"/>
+          <a:lstStyle/>
+          <a:p>
+            <a:pPr algn="ctr"/>
+            <a:endParaRPr lang="it-IT"/>
+          </a:p>
+        </p:txBody>
+      </p:sp>
+      <p:cxnSp>
+        <p:nvCxnSpPr>
+          <p:cNvPr id="19" name="Connettore 2 18">
+            <a:extLst>
+              <a:ext uri="{FF2B5EF4-FFF2-40B4-BE49-F238E27FC236}">
+                <a16:creationId xmlns:a16="http://schemas.microsoft.com/office/drawing/2014/main" id="{A988E337-B88E-98BA-1A78-0E337BFDEFA5}"/>
+              </a:ext>
+            </a:extLst>
+          </p:cNvPr>
+          <p:cNvCxnSpPr/>
+          <p:nvPr/>
+        </p:nvCxnSpPr>
+        <p:spPr>
+          <a:xfrm flipV="1">
+            <a:off x="0" y="6610350"/>
+            <a:ext cx="12192000" cy="0"/>
+          </a:xfrm>
+          <a:prstGeom prst="straightConnector1">
+            <a:avLst/>
+          </a:prstGeom>
+          <a:ln>
+            <a:solidFill>
+              <a:schemeClr val="accent1">
+                <a:lumMod val="50000"/>
+              </a:schemeClr>
+            </a:solidFill>
+          </a:ln>
+        </p:spPr>
+        <p:style>
+          <a:lnRef idx="1">
+            <a:schemeClr val="accent1"/>
+          </a:lnRef>
+          <a:fillRef idx="0">
+            <a:schemeClr val="accent1"/>
+          </a:fillRef>
+          <a:effectRef idx="0">
+            <a:schemeClr val="accent1"/>
+          </a:effectRef>
+          <a:fontRef idx="minor">
+            <a:schemeClr val="tx1"/>
+          </a:fontRef>
+        </p:style>
+      </p:cxnSp>
+      <mc:AlternateContent xmlns:mc="http://schemas.openxmlformats.org/markup-compatibility/2006" xmlns:a14="http://schemas.microsoft.com/office/drawing/2010/main">
+        <mc:Choice Requires="a14">
+          <p:sp>
+            <p:nvSpPr>
+              <p:cNvPr id="3" name="CasellaDiTesto 2">
+                <a:extLst>
+                  <a:ext uri="{FF2B5EF4-FFF2-40B4-BE49-F238E27FC236}">
+                    <a16:creationId xmlns:a16="http://schemas.microsoft.com/office/drawing/2014/main" id="{317EC68D-63E8-98B6-4742-C38CFD54117A}"/>
+                  </a:ext>
+                </a:extLst>
+              </p:cNvPr>
+              <p:cNvSpPr txBox="1"/>
+              <p:nvPr/>
+            </p:nvSpPr>
+            <p:spPr>
+              <a:xfrm>
+                <a:off x="1636054" y="772502"/>
+                <a:ext cx="530457" cy="259632"/>
+              </a:xfrm>
+              <a:prstGeom prst="rect">
+                <a:avLst/>
+              </a:prstGeom>
+              <a:noFill/>
+            </p:spPr>
+            <p:txBody>
+              <a:bodyPr wrap="square" rtlCol="0">
+                <a:spAutoFit/>
+              </a:bodyPr>
+              <a:lstStyle/>
+              <a:p>
+                <a:pPr/>
+                <a14:m>
+                  <m:oMathPara xmlns:m="http://schemas.openxmlformats.org/officeDocument/2006/math">
+                    <m:oMathParaPr>
+                      <m:jc m:val="centerGroup"/>
+                    </m:oMathParaPr>
+                    <m:oMath xmlns:m="http://schemas.openxmlformats.org/officeDocument/2006/math">
+                      <m:acc>
+                        <m:accPr>
+                          <m:chr m:val="̂"/>
+                          <m:ctrlPr>
+                            <a:rPr lang="en-GB" i="1" dirty="0" smtClean="0">
+                              <a:latin typeface="Cambria Math" panose="02040503050406030204" pitchFamily="18" charset="0"/>
+                            </a:rPr>
+                          </m:ctrlPr>
+                        </m:accPr>
+                        <m:e>
+                          <m:r>
+                            <a:rPr lang="it-CH" b="0" i="1" dirty="0" smtClean="0">
+                              <a:latin typeface="Cambria Math" panose="02040503050406030204" pitchFamily="18" charset="0"/>
+                            </a:rPr>
+                            <m:t>𝑦</m:t>
+                          </m:r>
+                        </m:e>
+                      </m:acc>
+                      <m:r>
+                        <a:rPr lang="it-CH" b="0" i="1" dirty="0" smtClean="0">
+                          <a:latin typeface="Cambria Math" panose="02040503050406030204" pitchFamily="18" charset="0"/>
+                        </a:rPr>
+                        <m:t>(</m:t>
+                      </m:r>
+                      <m:r>
+                        <a:rPr lang="it-CH" b="0" i="1" dirty="0" smtClean="0">
+                          <a:latin typeface="Cambria Math" panose="02040503050406030204" pitchFamily="18" charset="0"/>
+                        </a:rPr>
+                        <m:t>𝑡</m:t>
+                      </m:r>
+                      <m:r>
+                        <a:rPr lang="it-CH" b="0" i="1" dirty="0" smtClean="0">
+                          <a:latin typeface="Cambria Math" panose="02040503050406030204" pitchFamily="18" charset="0"/>
+                        </a:rPr>
+                        <m:t>)</m:t>
+                      </m:r>
+                    </m:oMath>
+                  </m:oMathPara>
+                </a14:m>
+                <a:endParaRPr lang="en-GB" dirty="0"/>
+              </a:p>
+            </p:txBody>
+          </p:sp>
+        </mc:Choice>
+        <mc:Fallback xmlns="">
+          <p:sp>
+            <p:nvSpPr>
+              <p:cNvPr id="3" name="CasellaDiTesto 2">
+                <a:extLst>
+                  <a:ext uri="{FF2B5EF4-FFF2-40B4-BE49-F238E27FC236}">
+                    <a16:creationId xmlns:a16="http://schemas.microsoft.com/office/drawing/2014/main" id="{317EC68D-63E8-98B6-4742-C38CFD54117A}"/>
+                  </a:ext>
+                </a:extLst>
+              </p:cNvPr>
+              <p:cNvSpPr txBox="1">
+                <a:spLocks noRot="1" noChangeAspect="1" noMove="1" noResize="1" noEditPoints="1" noAdjustHandles="1" noChangeArrowheads="1" noChangeShapeType="1" noTextEdit="1"/>
+              </p:cNvSpPr>
+              <p:nvPr/>
+            </p:nvSpPr>
+            <p:spPr>
+              <a:xfrm>
+                <a:off x="1636054" y="772502"/>
+                <a:ext cx="530457" cy="259632"/>
+              </a:xfrm>
+              <a:prstGeom prst="rect">
+                <a:avLst/>
+              </a:prstGeom>
+              <a:blipFill>
+                <a:blip r:embed="rId3"/>
+                <a:stretch>
+                  <a:fillRect t="-9524" r="-17241" b="-61905"/>
+                </a:stretch>
+              </a:blipFill>
+            </p:spPr>
+            <p:txBody>
+              <a:bodyPr/>
+              <a:lstStyle/>
+              <a:p>
+                <a:r>
+                  <a:rPr lang="en-GB">
+                    <a:noFill/>
+                  </a:rPr>
+                  <a:t> </a:t>
+                </a:r>
+              </a:p>
+            </p:txBody>
+          </p:sp>
+        </mc:Fallback>
+      </mc:AlternateContent>
+      <mc:AlternateContent xmlns:mc="http://schemas.openxmlformats.org/markup-compatibility/2006" xmlns:a14="http://schemas.microsoft.com/office/drawing/2010/main">
+        <mc:Choice Requires="a14">
+          <p:sp>
+            <p:nvSpPr>
+              <p:cNvPr id="5" name="CasellaDiTesto 4">
+                <a:extLst>
+                  <a:ext uri="{FF2B5EF4-FFF2-40B4-BE49-F238E27FC236}">
+                    <a16:creationId xmlns:a16="http://schemas.microsoft.com/office/drawing/2014/main" id="{6175D555-4B7D-B325-182B-95D678A246E2}"/>
+                  </a:ext>
+                </a:extLst>
+              </p:cNvPr>
+              <p:cNvSpPr txBox="1"/>
+              <p:nvPr/>
+            </p:nvSpPr>
+            <p:spPr>
+              <a:xfrm>
+                <a:off x="3050547" y="772502"/>
+                <a:ext cx="1201613" cy="369332"/>
+              </a:xfrm>
+              <a:prstGeom prst="rect">
+                <a:avLst/>
+              </a:prstGeom>
+              <a:noFill/>
+            </p:spPr>
+            <p:txBody>
+              <a:bodyPr wrap="square" rtlCol="0">
+                <a:spAutoFit/>
+              </a:bodyPr>
+              <a:lstStyle/>
+              <a:p>
+                <a:pPr/>
+                <a14:m>
+                  <m:oMathPara xmlns:m="http://schemas.openxmlformats.org/officeDocument/2006/math">
+                    <m:oMathParaPr>
+                      <m:jc m:val="centerGroup"/>
+                    </m:oMathParaPr>
+                    <m:oMath xmlns:m="http://schemas.openxmlformats.org/officeDocument/2006/math">
+                      <m:acc>
+                        <m:accPr>
+                          <m:chr m:val="̂"/>
+                          <m:ctrlPr>
+                            <a:rPr lang="en-GB" i="1" dirty="0" smtClean="0">
+                              <a:latin typeface="Cambria Math" panose="02040503050406030204" pitchFamily="18" charset="0"/>
+                            </a:rPr>
+                          </m:ctrlPr>
+                        </m:accPr>
+                        <m:e>
+                          <m:r>
+                            <a:rPr lang="it-CH" b="0" i="1" dirty="0" smtClean="0">
+                              <a:latin typeface="Cambria Math" panose="02040503050406030204" pitchFamily="18" charset="0"/>
+                            </a:rPr>
+                            <m:t>𝑦</m:t>
+                          </m:r>
+                        </m:e>
+                      </m:acc>
+                      <m:r>
+                        <a:rPr lang="it-CH" b="0" i="1" dirty="0" smtClean="0">
+                          <a:latin typeface="Cambria Math" panose="02040503050406030204" pitchFamily="18" charset="0"/>
+                        </a:rPr>
+                        <m:t>(</m:t>
+                      </m:r>
+                      <m:r>
+                        <a:rPr lang="it-CH" b="0" i="1" dirty="0" smtClean="0">
+                          <a:latin typeface="Cambria Math" panose="02040503050406030204" pitchFamily="18" charset="0"/>
+                        </a:rPr>
+                        <m:t>𝑡</m:t>
+                      </m:r>
+                      <m:r>
+                        <a:rPr lang="it-CH" b="0" i="1" dirty="0" smtClean="0">
+                          <a:latin typeface="Cambria Math" panose="02040503050406030204" pitchFamily="18" charset="0"/>
+                        </a:rPr>
+                        <m:t>+1)</m:t>
+                      </m:r>
+                    </m:oMath>
+                  </m:oMathPara>
+                </a14:m>
+                <a:endParaRPr lang="en-GB" dirty="0"/>
+              </a:p>
+            </p:txBody>
+          </p:sp>
+        </mc:Choice>
+        <mc:Fallback xmlns="">
+          <p:sp>
+            <p:nvSpPr>
+              <p:cNvPr id="5" name="CasellaDiTesto 4">
+                <a:extLst>
+                  <a:ext uri="{FF2B5EF4-FFF2-40B4-BE49-F238E27FC236}">
+                    <a16:creationId xmlns:a16="http://schemas.microsoft.com/office/drawing/2014/main" id="{6175D555-4B7D-B325-182B-95D678A246E2}"/>
+                  </a:ext>
+                </a:extLst>
+              </p:cNvPr>
+              <p:cNvSpPr txBox="1">
+                <a:spLocks noRot="1" noChangeAspect="1" noMove="1" noResize="1" noEditPoints="1" noAdjustHandles="1" noChangeArrowheads="1" noChangeShapeType="1" noTextEdit="1"/>
+              </p:cNvSpPr>
+              <p:nvPr/>
+            </p:nvSpPr>
+            <p:spPr>
+              <a:xfrm>
+                <a:off x="3050547" y="772502"/>
+                <a:ext cx="1201613" cy="369332"/>
+              </a:xfrm>
+              <a:prstGeom prst="rect">
+                <a:avLst/>
+              </a:prstGeom>
+              <a:blipFill>
+                <a:blip r:embed="rId4"/>
+                <a:stretch>
+                  <a:fillRect t="-6667" b="-13333"/>
+                </a:stretch>
+              </a:blipFill>
+            </p:spPr>
+            <p:txBody>
+              <a:bodyPr/>
+              <a:lstStyle/>
+              <a:p>
+                <a:r>
+                  <a:rPr lang="en-GB">
+                    <a:noFill/>
+                  </a:rPr>
+                  <a:t> </a:t>
+                </a:r>
+              </a:p>
+            </p:txBody>
+          </p:sp>
+        </mc:Fallback>
+      </mc:AlternateContent>
+      <mc:AlternateContent xmlns:mc="http://schemas.openxmlformats.org/markup-compatibility/2006" xmlns:a14="http://schemas.microsoft.com/office/drawing/2010/main">
+        <mc:Choice Requires="a14">
+          <p:sp>
+            <p:nvSpPr>
+              <p:cNvPr id="7" name="CasellaDiTesto 6">
+                <a:extLst>
+                  <a:ext uri="{FF2B5EF4-FFF2-40B4-BE49-F238E27FC236}">
+                    <a16:creationId xmlns:a16="http://schemas.microsoft.com/office/drawing/2014/main" id="{369FA63A-DA77-1F7E-AC2A-E9818AA0904F}"/>
+                  </a:ext>
+                </a:extLst>
+              </p:cNvPr>
+              <p:cNvSpPr txBox="1"/>
+              <p:nvPr/>
+            </p:nvSpPr>
+            <p:spPr>
+              <a:xfrm>
+                <a:off x="4446344" y="772502"/>
+                <a:ext cx="1177657" cy="369332"/>
+              </a:xfrm>
+              <a:prstGeom prst="rect">
+                <a:avLst/>
+              </a:prstGeom>
+              <a:noFill/>
+            </p:spPr>
+            <p:txBody>
+              <a:bodyPr wrap="square" rtlCol="0">
+                <a:spAutoFit/>
+              </a:bodyPr>
+              <a:lstStyle/>
+              <a:p>
+                <a:pPr/>
+                <a14:m>
+                  <m:oMathPara xmlns:m="http://schemas.openxmlformats.org/officeDocument/2006/math">
+                    <m:oMathParaPr>
+                      <m:jc m:val="centerGroup"/>
+                    </m:oMathParaPr>
+                    <m:oMath xmlns:m="http://schemas.openxmlformats.org/officeDocument/2006/math">
+                      <m:acc>
+                        <m:accPr>
+                          <m:chr m:val="̂"/>
+                          <m:ctrlPr>
+                            <a:rPr lang="en-GB" i="1" dirty="0" smtClean="0">
+                              <a:latin typeface="Cambria Math" panose="02040503050406030204" pitchFamily="18" charset="0"/>
+                            </a:rPr>
+                          </m:ctrlPr>
+                        </m:accPr>
+                        <m:e>
+                          <m:r>
+                            <a:rPr lang="it-CH" b="0" i="1" dirty="0" smtClean="0">
+                              <a:latin typeface="Cambria Math" panose="02040503050406030204" pitchFamily="18" charset="0"/>
+                            </a:rPr>
+                            <m:t>𝑦</m:t>
+                          </m:r>
+                        </m:e>
+                      </m:acc>
+                      <m:r>
+                        <a:rPr lang="it-CH" b="0" i="1" dirty="0" smtClean="0">
+                          <a:latin typeface="Cambria Math" panose="02040503050406030204" pitchFamily="18" charset="0"/>
+                        </a:rPr>
+                        <m:t>(</m:t>
+                      </m:r>
+                      <m:r>
+                        <a:rPr lang="it-CH" b="0" i="1" dirty="0" smtClean="0">
+                          <a:latin typeface="Cambria Math" panose="02040503050406030204" pitchFamily="18" charset="0"/>
+                        </a:rPr>
+                        <m:t>𝑡</m:t>
+                      </m:r>
+                      <m:r>
+                        <a:rPr lang="it-CH" b="0" i="1" dirty="0" smtClean="0">
+                          <a:latin typeface="Cambria Math" panose="02040503050406030204" pitchFamily="18" charset="0"/>
+                        </a:rPr>
+                        <m:t>+2)</m:t>
+                      </m:r>
+                    </m:oMath>
+                  </m:oMathPara>
+                </a14:m>
+                <a:endParaRPr lang="en-GB" dirty="0"/>
+              </a:p>
+            </p:txBody>
+          </p:sp>
+        </mc:Choice>
+        <mc:Fallback xmlns="">
+          <p:sp>
+            <p:nvSpPr>
+              <p:cNvPr id="7" name="CasellaDiTesto 6">
+                <a:extLst>
+                  <a:ext uri="{FF2B5EF4-FFF2-40B4-BE49-F238E27FC236}">
+                    <a16:creationId xmlns:a16="http://schemas.microsoft.com/office/drawing/2014/main" id="{369FA63A-DA77-1F7E-AC2A-E9818AA0904F}"/>
+                  </a:ext>
+                </a:extLst>
+              </p:cNvPr>
+              <p:cNvSpPr txBox="1">
+                <a:spLocks noRot="1" noChangeAspect="1" noMove="1" noResize="1" noEditPoints="1" noAdjustHandles="1" noChangeArrowheads="1" noChangeShapeType="1" noTextEdit="1"/>
+              </p:cNvSpPr>
+              <p:nvPr/>
+            </p:nvSpPr>
+            <p:spPr>
+              <a:xfrm>
+                <a:off x="4446344" y="772502"/>
+                <a:ext cx="1177657" cy="369332"/>
+              </a:xfrm>
+              <a:prstGeom prst="rect">
+                <a:avLst/>
+              </a:prstGeom>
+              <a:blipFill>
+                <a:blip r:embed="rId5"/>
+                <a:stretch>
+                  <a:fillRect t="-6667" b="-13333"/>
+                </a:stretch>
+              </a:blipFill>
+            </p:spPr>
+            <p:txBody>
+              <a:bodyPr/>
+              <a:lstStyle/>
+              <a:p>
+                <a:r>
+                  <a:rPr lang="en-GB">
+                    <a:noFill/>
+                  </a:rPr>
+                  <a:t> </a:t>
+                </a:r>
+              </a:p>
+            </p:txBody>
+          </p:sp>
+        </mc:Fallback>
+      </mc:AlternateContent>
+      <mc:AlternateContent xmlns:mc="http://schemas.openxmlformats.org/markup-compatibility/2006" xmlns:a14="http://schemas.microsoft.com/office/drawing/2010/main">
+        <mc:Choice Requires="a14">
+          <p:sp>
+            <p:nvSpPr>
+              <p:cNvPr id="8" name="CasellaDiTesto 7">
+                <a:extLst>
+                  <a:ext uri="{FF2B5EF4-FFF2-40B4-BE49-F238E27FC236}">
+                    <a16:creationId xmlns:a16="http://schemas.microsoft.com/office/drawing/2014/main" id="{0F4D00FA-1802-5716-AA53-F0574048998C}"/>
+                  </a:ext>
+                </a:extLst>
+              </p:cNvPr>
+              <p:cNvSpPr txBox="1"/>
+              <p:nvPr/>
+            </p:nvSpPr>
+            <p:spPr>
+              <a:xfrm>
+                <a:off x="6489506" y="772502"/>
+                <a:ext cx="1201614" cy="369332"/>
+              </a:xfrm>
+              <a:prstGeom prst="rect">
+                <a:avLst/>
+              </a:prstGeom>
+              <a:noFill/>
+            </p:spPr>
+            <p:txBody>
+              <a:bodyPr wrap="square" rtlCol="0">
+                <a:spAutoFit/>
+              </a:bodyPr>
+              <a:lstStyle/>
+              <a:p>
+                <a:pPr/>
+                <a14:m>
+                  <m:oMathPara xmlns:m="http://schemas.openxmlformats.org/officeDocument/2006/math">
+                    <m:oMathParaPr>
+                      <m:jc m:val="centerGroup"/>
+                    </m:oMathParaPr>
+                    <m:oMath xmlns:m="http://schemas.openxmlformats.org/officeDocument/2006/math">
+                      <m:acc>
+                        <m:accPr>
+                          <m:chr m:val="̂"/>
+                          <m:ctrlPr>
+                            <a:rPr lang="en-GB" i="1" dirty="0" smtClean="0">
+                              <a:latin typeface="Cambria Math" panose="02040503050406030204" pitchFamily="18" charset="0"/>
+                            </a:rPr>
+                          </m:ctrlPr>
+                        </m:accPr>
+                        <m:e>
+                          <m:r>
+                            <a:rPr lang="it-CH" b="0" i="1" dirty="0" smtClean="0">
+                              <a:latin typeface="Cambria Math" panose="02040503050406030204" pitchFamily="18" charset="0"/>
+                            </a:rPr>
+                            <m:t>𝑦</m:t>
+                          </m:r>
+                        </m:e>
+                      </m:acc>
+                      <m:r>
+                        <a:rPr lang="it-CH" b="0" i="1" dirty="0" smtClean="0">
+                          <a:latin typeface="Cambria Math" panose="02040503050406030204" pitchFamily="18" charset="0"/>
+                        </a:rPr>
+                        <m:t>(</m:t>
+                      </m:r>
+                      <m:r>
+                        <a:rPr lang="it-CH" b="0" i="1" dirty="0" smtClean="0">
+                          <a:latin typeface="Cambria Math" panose="02040503050406030204" pitchFamily="18" charset="0"/>
+                        </a:rPr>
+                        <m:t>𝑡</m:t>
+                      </m:r>
+                      <m:r>
+                        <a:rPr lang="it-CH" b="0" i="1" dirty="0" smtClean="0">
+                          <a:latin typeface="Cambria Math" panose="02040503050406030204" pitchFamily="18" charset="0"/>
+                        </a:rPr>
+                        <m:t>+</m:t>
+                      </m:r>
+                      <m:r>
+                        <a:rPr lang="it-CH" b="0" i="1" dirty="0" smtClean="0">
+                          <a:latin typeface="Cambria Math" panose="02040503050406030204" pitchFamily="18" charset="0"/>
+                        </a:rPr>
+                        <m:t>𝑇</m:t>
+                      </m:r>
+                      <m:r>
+                        <a:rPr lang="it-CH" b="0" i="1" dirty="0" smtClean="0">
+                          <a:latin typeface="Cambria Math" panose="02040503050406030204" pitchFamily="18" charset="0"/>
+                        </a:rPr>
+                        <m:t>)</m:t>
+                      </m:r>
+                    </m:oMath>
+                  </m:oMathPara>
+                </a14:m>
+                <a:endParaRPr lang="en-GB" dirty="0"/>
+              </a:p>
+            </p:txBody>
+          </p:sp>
+        </mc:Choice>
+        <mc:Fallback xmlns="">
+          <p:sp>
+            <p:nvSpPr>
+              <p:cNvPr id="8" name="CasellaDiTesto 7">
+                <a:extLst>
+                  <a:ext uri="{FF2B5EF4-FFF2-40B4-BE49-F238E27FC236}">
+                    <a16:creationId xmlns:a16="http://schemas.microsoft.com/office/drawing/2014/main" id="{0F4D00FA-1802-5716-AA53-F0574048998C}"/>
+                  </a:ext>
+                </a:extLst>
+              </p:cNvPr>
+              <p:cNvSpPr txBox="1">
+                <a:spLocks noRot="1" noChangeAspect="1" noMove="1" noResize="1" noEditPoints="1" noAdjustHandles="1" noChangeArrowheads="1" noChangeShapeType="1" noTextEdit="1"/>
+              </p:cNvSpPr>
+              <p:nvPr/>
+            </p:nvSpPr>
+            <p:spPr>
+              <a:xfrm>
+                <a:off x="6489506" y="772502"/>
+                <a:ext cx="1201614" cy="369332"/>
+              </a:xfrm>
+              <a:prstGeom prst="rect">
+                <a:avLst/>
+              </a:prstGeom>
+              <a:blipFill>
+                <a:blip r:embed="rId6"/>
+                <a:stretch>
+                  <a:fillRect t="-6667" b="-13333"/>
+                </a:stretch>
+              </a:blipFill>
+            </p:spPr>
+            <p:txBody>
+              <a:bodyPr/>
+              <a:lstStyle/>
+              <a:p>
+                <a:r>
+                  <a:rPr lang="en-GB">
+                    <a:noFill/>
+                  </a:rPr>
+                  <a:t> </a:t>
+                </a:r>
+              </a:p>
+            </p:txBody>
+          </p:sp>
+        </mc:Fallback>
+      </mc:AlternateContent>
+      <p:sp>
+        <p:nvSpPr>
+          <p:cNvPr id="9" name="Ovale 8">
+            <a:extLst>
+              <a:ext uri="{FF2B5EF4-FFF2-40B4-BE49-F238E27FC236}">
+                <a16:creationId xmlns:a16="http://schemas.microsoft.com/office/drawing/2014/main" id="{B1D0EA6E-1C9E-7956-A3CC-3D7E8E590779}"/>
+              </a:ext>
+            </a:extLst>
+          </p:cNvPr>
+          <p:cNvSpPr/>
+          <p:nvPr/>
+        </p:nvSpPr>
+        <p:spPr>
+          <a:xfrm>
+            <a:off x="1304937" y="5373942"/>
+            <a:ext cx="636549" cy="616018"/>
+          </a:xfrm>
+          <a:prstGeom prst="ellipse">
+            <a:avLst/>
+          </a:prstGeom>
+        </p:spPr>
+        <p:style>
+          <a:lnRef idx="2">
+            <a:schemeClr val="accent1">
+              <a:shade val="15000"/>
+            </a:schemeClr>
+          </a:lnRef>
+          <a:fillRef idx="1">
+            <a:schemeClr val="accent1"/>
+          </a:fillRef>
+          <a:effectRef idx="0">
+            <a:schemeClr val="accent1"/>
+          </a:effectRef>
+          <a:fontRef idx="minor">
+            <a:schemeClr val="lt1"/>
+          </a:fontRef>
+        </p:style>
+        <p:txBody>
+          <a:bodyPr rtlCol="0" anchor="ctr"/>
+          <a:lstStyle/>
+          <a:p>
+            <a:pPr algn="ctr"/>
+            <a:endParaRPr lang="en-GB"/>
+          </a:p>
+        </p:txBody>
+      </p:sp>
+      <p:cxnSp>
+        <p:nvCxnSpPr>
+          <p:cNvPr id="10" name="Connettore 2 9">
+            <a:extLst>
+              <a:ext uri="{FF2B5EF4-FFF2-40B4-BE49-F238E27FC236}">
+                <a16:creationId xmlns:a16="http://schemas.microsoft.com/office/drawing/2014/main" id="{506667CE-65B0-D5AC-AA3B-D7A8D905E729}"/>
+              </a:ext>
+            </a:extLst>
+          </p:cNvPr>
+          <p:cNvCxnSpPr>
+            <a:cxnSpLocks/>
+            <a:endCxn id="9" idx="4"/>
+          </p:cNvCxnSpPr>
+          <p:nvPr/>
+        </p:nvCxnSpPr>
+        <p:spPr>
+          <a:xfrm flipV="1">
+            <a:off x="1623211" y="5989960"/>
+            <a:ext cx="0" cy="528973"/>
+          </a:xfrm>
+          <a:prstGeom prst="straightConnector1">
+            <a:avLst/>
+          </a:prstGeom>
+          <a:ln w="19050">
+            <a:tailEnd type="triangle"/>
+          </a:ln>
+        </p:spPr>
+        <p:style>
+          <a:lnRef idx="1">
+            <a:schemeClr val="accent1"/>
+          </a:lnRef>
+          <a:fillRef idx="0">
+            <a:schemeClr val="accent1"/>
+          </a:fillRef>
+          <a:effectRef idx="0">
+            <a:schemeClr val="accent1"/>
+          </a:effectRef>
+          <a:fontRef idx="minor">
+            <a:schemeClr val="tx1"/>
+          </a:fontRef>
+        </p:style>
+      </p:cxnSp>
+      <p:cxnSp>
+        <p:nvCxnSpPr>
+          <p:cNvPr id="13" name="Connettore 2 12">
+            <a:extLst>
+              <a:ext uri="{FF2B5EF4-FFF2-40B4-BE49-F238E27FC236}">
+                <a16:creationId xmlns:a16="http://schemas.microsoft.com/office/drawing/2014/main" id="{0ED892D5-E29B-20B3-95C3-C77B0E5F3F5E}"/>
+              </a:ext>
+            </a:extLst>
+          </p:cNvPr>
+          <p:cNvCxnSpPr>
+            <a:cxnSpLocks/>
+          </p:cNvCxnSpPr>
+          <p:nvPr/>
+        </p:nvCxnSpPr>
+        <p:spPr>
+          <a:xfrm flipV="1">
+            <a:off x="1614944" y="4836528"/>
+            <a:ext cx="0" cy="528973"/>
+          </a:xfrm>
+          <a:prstGeom prst="straightConnector1">
+            <a:avLst/>
+          </a:prstGeom>
+          <a:ln w="19050">
+            <a:tailEnd type="triangle"/>
+          </a:ln>
+        </p:spPr>
+        <p:style>
+          <a:lnRef idx="1">
+            <a:schemeClr val="accent1"/>
+          </a:lnRef>
+          <a:fillRef idx="0">
+            <a:schemeClr val="accent1"/>
+          </a:fillRef>
+          <a:effectRef idx="0">
+            <a:schemeClr val="accent1"/>
+          </a:effectRef>
+          <a:fontRef idx="minor">
+            <a:schemeClr val="tx1"/>
+          </a:fontRef>
+        </p:style>
+      </p:cxnSp>
+      <p:cxnSp>
+        <p:nvCxnSpPr>
+          <p:cNvPr id="14" name="Connettore curvo 13">
+            <a:extLst>
+              <a:ext uri="{FF2B5EF4-FFF2-40B4-BE49-F238E27FC236}">
+                <a16:creationId xmlns:a16="http://schemas.microsoft.com/office/drawing/2014/main" id="{CD6A3638-C415-98B1-C34A-869828DA6C85}"/>
+              </a:ext>
+            </a:extLst>
+          </p:cNvPr>
+          <p:cNvCxnSpPr>
+            <a:cxnSpLocks/>
+          </p:cNvCxnSpPr>
+          <p:nvPr/>
+        </p:nvCxnSpPr>
+        <p:spPr>
+          <a:xfrm>
+            <a:off x="1851400" y="5468619"/>
+            <a:ext cx="946073" cy="384256"/>
+          </a:xfrm>
+          <a:prstGeom prst="curvedConnector4">
+            <a:avLst>
+              <a:gd name="adj1" fmla="val 45073"/>
+              <a:gd name="adj2" fmla="val 141821"/>
+            </a:avLst>
+          </a:prstGeom>
+          <a:ln>
+            <a:tailEnd type="triangle"/>
+          </a:ln>
+        </p:spPr>
+        <p:style>
+          <a:lnRef idx="1">
+            <a:schemeClr val="accent1"/>
+          </a:lnRef>
+          <a:fillRef idx="0">
+            <a:schemeClr val="accent1"/>
+          </a:fillRef>
+          <a:effectRef idx="0">
+            <a:schemeClr val="accent1"/>
+          </a:effectRef>
+          <a:fontRef idx="minor">
+            <a:schemeClr val="tx1"/>
+          </a:fontRef>
+        </p:style>
+      </p:cxnSp>
+      <p:sp>
+        <p:nvSpPr>
+          <p:cNvPr id="18" name="CasellaDiTesto 17">
+            <a:extLst>
+              <a:ext uri="{FF2B5EF4-FFF2-40B4-BE49-F238E27FC236}">
+                <a16:creationId xmlns:a16="http://schemas.microsoft.com/office/drawing/2014/main" id="{4A3F4A75-A9ED-BCB1-D0E4-8BD3C16EE56D}"/>
+              </a:ext>
+            </a:extLst>
+          </p:cNvPr>
+          <p:cNvSpPr txBox="1"/>
+          <p:nvPr/>
+        </p:nvSpPr>
+        <p:spPr>
+          <a:xfrm>
+            <a:off x="1672812" y="6220155"/>
+            <a:ext cx="530457" cy="259632"/>
+          </a:xfrm>
+          <a:prstGeom prst="rect">
+            <a:avLst/>
+          </a:prstGeom>
+          <a:noFill/>
+        </p:spPr>
+        <p:txBody>
+          <a:bodyPr wrap="square" rtlCol="0">
+            <a:spAutoFit/>
+          </a:bodyPr>
+          <a:lstStyle/>
+          <a:p>
+            <a:r>
+              <a:rPr lang="en-GB" dirty="0"/>
+              <a:t>u(t)</a:t>
+            </a:r>
+          </a:p>
+        </p:txBody>
+      </p:sp>
+      <p:sp>
+        <p:nvSpPr>
+          <p:cNvPr id="23" name="Ovale 22">
+            <a:extLst>
+              <a:ext uri="{FF2B5EF4-FFF2-40B4-BE49-F238E27FC236}">
+                <a16:creationId xmlns:a16="http://schemas.microsoft.com/office/drawing/2014/main" id="{8EE62AFA-70A9-43A6-C63B-317CAFBCB9C4}"/>
+              </a:ext>
+            </a:extLst>
+          </p:cNvPr>
+          <p:cNvSpPr/>
+          <p:nvPr/>
+        </p:nvSpPr>
+        <p:spPr>
+          <a:xfrm>
+            <a:off x="2696526" y="5327071"/>
+            <a:ext cx="636549" cy="616018"/>
+          </a:xfrm>
+          <a:prstGeom prst="ellipse">
+            <a:avLst/>
+          </a:prstGeom>
+        </p:spPr>
+        <p:style>
+          <a:lnRef idx="2">
+            <a:schemeClr val="accent1">
+              <a:shade val="15000"/>
+            </a:schemeClr>
+          </a:lnRef>
+          <a:fillRef idx="1">
+            <a:schemeClr val="accent1"/>
+          </a:fillRef>
+          <a:effectRef idx="0">
+            <a:schemeClr val="accent1"/>
+          </a:effectRef>
+          <a:fontRef idx="minor">
+            <a:schemeClr val="lt1"/>
+          </a:fontRef>
+        </p:style>
+        <p:txBody>
+          <a:bodyPr rtlCol="0" anchor="ctr"/>
+          <a:lstStyle/>
+          <a:p>
+            <a:pPr algn="ctr"/>
+            <a:endParaRPr lang="en-GB"/>
+          </a:p>
+        </p:txBody>
+      </p:sp>
+      <p:cxnSp>
+        <p:nvCxnSpPr>
+          <p:cNvPr id="24" name="Connettore 2 23">
+            <a:extLst>
+              <a:ext uri="{FF2B5EF4-FFF2-40B4-BE49-F238E27FC236}">
+                <a16:creationId xmlns:a16="http://schemas.microsoft.com/office/drawing/2014/main" id="{3F1A18D5-6FE1-55DA-87B4-BFB20DB7FD52}"/>
+              </a:ext>
+            </a:extLst>
+          </p:cNvPr>
+          <p:cNvCxnSpPr>
+            <a:cxnSpLocks/>
+            <a:endCxn id="23" idx="4"/>
+          </p:cNvCxnSpPr>
+          <p:nvPr/>
+        </p:nvCxnSpPr>
+        <p:spPr>
+          <a:xfrm flipV="1">
+            <a:off x="3014800" y="5943089"/>
+            <a:ext cx="0" cy="528973"/>
+          </a:xfrm>
+          <a:prstGeom prst="straightConnector1">
+            <a:avLst/>
+          </a:prstGeom>
+          <a:ln w="19050">
+            <a:tailEnd type="triangle"/>
+          </a:ln>
+        </p:spPr>
+        <p:style>
+          <a:lnRef idx="1">
+            <a:schemeClr val="accent1"/>
+          </a:lnRef>
+          <a:fillRef idx="0">
+            <a:schemeClr val="accent1"/>
+          </a:fillRef>
+          <a:effectRef idx="0">
+            <a:schemeClr val="accent1"/>
+          </a:effectRef>
+          <a:fontRef idx="minor">
+            <a:schemeClr val="tx1"/>
+          </a:fontRef>
+        </p:style>
+      </p:cxnSp>
+      <p:cxnSp>
+        <p:nvCxnSpPr>
+          <p:cNvPr id="25" name="Connettore 2 24">
+            <a:extLst>
+              <a:ext uri="{FF2B5EF4-FFF2-40B4-BE49-F238E27FC236}">
+                <a16:creationId xmlns:a16="http://schemas.microsoft.com/office/drawing/2014/main" id="{6F835C3D-4ECF-D9A7-9C5C-FBBDA9D0A097}"/>
+              </a:ext>
+            </a:extLst>
+          </p:cNvPr>
+          <p:cNvCxnSpPr>
+            <a:cxnSpLocks/>
+          </p:cNvCxnSpPr>
+          <p:nvPr/>
+        </p:nvCxnSpPr>
+        <p:spPr>
+          <a:xfrm flipV="1">
+            <a:off x="3006533" y="4836528"/>
+            <a:ext cx="0" cy="528973"/>
+          </a:xfrm>
+          <a:prstGeom prst="straightConnector1">
+            <a:avLst/>
+          </a:prstGeom>
+          <a:ln w="19050">
+            <a:tailEnd type="triangle"/>
+          </a:ln>
+        </p:spPr>
+        <p:style>
+          <a:lnRef idx="1">
+            <a:schemeClr val="accent1"/>
+          </a:lnRef>
+          <a:fillRef idx="0">
+            <a:schemeClr val="accent1"/>
+          </a:fillRef>
+          <a:effectRef idx="0">
+            <a:schemeClr val="accent1"/>
+          </a:effectRef>
+          <a:fontRef idx="minor">
+            <a:schemeClr val="tx1"/>
+          </a:fontRef>
+        </p:style>
+      </p:cxnSp>
+      <p:sp>
+        <p:nvSpPr>
+          <p:cNvPr id="27" name="CasellaDiTesto 26">
+            <a:extLst>
+              <a:ext uri="{FF2B5EF4-FFF2-40B4-BE49-F238E27FC236}">
+                <a16:creationId xmlns:a16="http://schemas.microsoft.com/office/drawing/2014/main" id="{E73EFEC8-E6ED-2282-1972-0A915E85455C}"/>
+              </a:ext>
+            </a:extLst>
+          </p:cNvPr>
+          <p:cNvSpPr txBox="1"/>
+          <p:nvPr/>
+        </p:nvSpPr>
+        <p:spPr>
+          <a:xfrm>
+            <a:off x="3064401" y="6220155"/>
+            <a:ext cx="892061" cy="259632"/>
+          </a:xfrm>
+          <a:prstGeom prst="rect">
+            <a:avLst/>
+          </a:prstGeom>
+          <a:noFill/>
+        </p:spPr>
+        <p:txBody>
+          <a:bodyPr wrap="square" rtlCol="0">
+            <a:spAutoFit/>
+          </a:bodyPr>
+          <a:lstStyle/>
+          <a:p>
+            <a:r>
+              <a:rPr lang="en-GB" dirty="0"/>
+              <a:t>u(t+1)</a:t>
+            </a:r>
+          </a:p>
+        </p:txBody>
+      </p:sp>
+      <p:sp>
+        <p:nvSpPr>
+          <p:cNvPr id="30" name="Ovale 29">
+            <a:extLst>
+              <a:ext uri="{FF2B5EF4-FFF2-40B4-BE49-F238E27FC236}">
+                <a16:creationId xmlns:a16="http://schemas.microsoft.com/office/drawing/2014/main" id="{E5587CEA-CD4B-C0A6-8B26-20151AD219CC}"/>
+              </a:ext>
+            </a:extLst>
+          </p:cNvPr>
+          <p:cNvSpPr/>
+          <p:nvPr/>
+        </p:nvSpPr>
+        <p:spPr>
+          <a:xfrm>
+            <a:off x="4136338" y="5333767"/>
+            <a:ext cx="636549" cy="616018"/>
+          </a:xfrm>
+          <a:prstGeom prst="ellipse">
+            <a:avLst/>
+          </a:prstGeom>
+        </p:spPr>
+        <p:style>
+          <a:lnRef idx="2">
+            <a:schemeClr val="accent1">
+              <a:shade val="15000"/>
+            </a:schemeClr>
+          </a:lnRef>
+          <a:fillRef idx="1">
+            <a:schemeClr val="accent1"/>
+          </a:fillRef>
+          <a:effectRef idx="0">
+            <a:schemeClr val="accent1"/>
+          </a:effectRef>
+          <a:fontRef idx="minor">
+            <a:schemeClr val="lt1"/>
+          </a:fontRef>
+        </p:style>
+        <p:txBody>
+          <a:bodyPr rtlCol="0" anchor="ctr"/>
+          <a:lstStyle/>
+          <a:p>
+            <a:pPr algn="ctr"/>
+            <a:endParaRPr lang="en-GB"/>
+          </a:p>
+        </p:txBody>
+      </p:sp>
+      <p:cxnSp>
+        <p:nvCxnSpPr>
+          <p:cNvPr id="32" name="Connettore 2 31">
+            <a:extLst>
+              <a:ext uri="{FF2B5EF4-FFF2-40B4-BE49-F238E27FC236}">
+                <a16:creationId xmlns:a16="http://schemas.microsoft.com/office/drawing/2014/main" id="{B81771DF-C952-C83F-3A46-A10564EFC41F}"/>
+              </a:ext>
+            </a:extLst>
+          </p:cNvPr>
+          <p:cNvCxnSpPr>
+            <a:cxnSpLocks/>
+            <a:endCxn id="30" idx="4"/>
+          </p:cNvCxnSpPr>
+          <p:nvPr/>
+        </p:nvCxnSpPr>
+        <p:spPr>
+          <a:xfrm flipV="1">
+            <a:off x="4454612" y="5949785"/>
+            <a:ext cx="0" cy="528973"/>
+          </a:xfrm>
+          <a:prstGeom prst="straightConnector1">
+            <a:avLst/>
+          </a:prstGeom>
+          <a:ln w="19050">
+            <a:tailEnd type="triangle"/>
+          </a:ln>
+        </p:spPr>
+        <p:style>
+          <a:lnRef idx="1">
+            <a:schemeClr val="accent1"/>
+          </a:lnRef>
+          <a:fillRef idx="0">
+            <a:schemeClr val="accent1"/>
+          </a:fillRef>
+          <a:effectRef idx="0">
+            <a:schemeClr val="accent1"/>
+          </a:effectRef>
+          <a:fontRef idx="minor">
+            <a:schemeClr val="tx1"/>
+          </a:fontRef>
+        </p:style>
+      </p:cxnSp>
+      <p:sp>
+        <p:nvSpPr>
+          <p:cNvPr id="34" name="CasellaDiTesto 33">
+            <a:extLst>
+              <a:ext uri="{FF2B5EF4-FFF2-40B4-BE49-F238E27FC236}">
+                <a16:creationId xmlns:a16="http://schemas.microsoft.com/office/drawing/2014/main" id="{8DAA5697-0FC3-0AF8-9C00-34022021247C}"/>
+              </a:ext>
+            </a:extLst>
+          </p:cNvPr>
+          <p:cNvSpPr txBox="1"/>
+          <p:nvPr/>
+        </p:nvSpPr>
+        <p:spPr>
+          <a:xfrm>
+            <a:off x="4504213" y="6220155"/>
+            <a:ext cx="892061" cy="259632"/>
+          </a:xfrm>
+          <a:prstGeom prst="rect">
+            <a:avLst/>
+          </a:prstGeom>
+          <a:noFill/>
+        </p:spPr>
+        <p:txBody>
+          <a:bodyPr wrap="square" rtlCol="0">
+            <a:spAutoFit/>
+          </a:bodyPr>
+          <a:lstStyle/>
+          <a:p>
+            <a:r>
+              <a:rPr lang="en-GB" dirty="0"/>
+              <a:t>u(t+2)</a:t>
+            </a:r>
+          </a:p>
+        </p:txBody>
+      </p:sp>
+      <p:cxnSp>
+        <p:nvCxnSpPr>
+          <p:cNvPr id="36" name="Connettore curvo 35">
+            <a:extLst>
+              <a:ext uri="{FF2B5EF4-FFF2-40B4-BE49-F238E27FC236}">
+                <a16:creationId xmlns:a16="http://schemas.microsoft.com/office/drawing/2014/main" id="{B7981AED-CE43-3F28-6033-F3EA51B85562}"/>
+              </a:ext>
+            </a:extLst>
+          </p:cNvPr>
+          <p:cNvCxnSpPr>
+            <a:cxnSpLocks/>
+          </p:cNvCxnSpPr>
+          <p:nvPr/>
+        </p:nvCxnSpPr>
+        <p:spPr>
+          <a:xfrm>
+            <a:off x="3225917" y="5416224"/>
+            <a:ext cx="946073" cy="384256"/>
+          </a:xfrm>
+          <a:prstGeom prst="curvedConnector4">
+            <a:avLst>
+              <a:gd name="adj1" fmla="val 45073"/>
+              <a:gd name="adj2" fmla="val 141821"/>
+            </a:avLst>
+          </a:prstGeom>
+          <a:ln>
+            <a:tailEnd type="triangle"/>
+          </a:ln>
+        </p:spPr>
+        <p:style>
+          <a:lnRef idx="1">
+            <a:schemeClr val="accent1"/>
+          </a:lnRef>
+          <a:fillRef idx="0">
+            <a:schemeClr val="accent1"/>
+          </a:fillRef>
+          <a:effectRef idx="0">
+            <a:schemeClr val="accent1"/>
+          </a:effectRef>
+          <a:fontRef idx="minor">
+            <a:schemeClr val="tx1"/>
+          </a:fontRef>
+        </p:style>
+      </p:cxnSp>
+      <p:sp>
+        <p:nvSpPr>
+          <p:cNvPr id="37" name="Ovale 36">
+            <a:extLst>
+              <a:ext uri="{FF2B5EF4-FFF2-40B4-BE49-F238E27FC236}">
+                <a16:creationId xmlns:a16="http://schemas.microsoft.com/office/drawing/2014/main" id="{B22C2DC9-C0EB-803A-DBA5-1DDAFD387EA7}"/>
+              </a:ext>
+            </a:extLst>
+          </p:cNvPr>
+          <p:cNvSpPr/>
+          <p:nvPr/>
+        </p:nvSpPr>
+        <p:spPr>
+          <a:xfrm>
+            <a:off x="6237499" y="5293592"/>
+            <a:ext cx="636549" cy="616018"/>
+          </a:xfrm>
+          <a:prstGeom prst="ellipse">
+            <a:avLst/>
+          </a:prstGeom>
+        </p:spPr>
+        <p:style>
+          <a:lnRef idx="2">
+            <a:schemeClr val="accent1">
+              <a:shade val="15000"/>
+            </a:schemeClr>
+          </a:lnRef>
+          <a:fillRef idx="1">
+            <a:schemeClr val="accent1"/>
+          </a:fillRef>
+          <a:effectRef idx="0">
+            <a:schemeClr val="accent1"/>
+          </a:effectRef>
+          <a:fontRef idx="minor">
+            <a:schemeClr val="lt1"/>
+          </a:fontRef>
+        </p:style>
+        <p:txBody>
+          <a:bodyPr rtlCol="0" anchor="ctr"/>
+          <a:lstStyle/>
+          <a:p>
+            <a:pPr algn="ctr"/>
+            <a:endParaRPr lang="en-GB"/>
+          </a:p>
+        </p:txBody>
+      </p:sp>
+      <p:cxnSp>
+        <p:nvCxnSpPr>
+          <p:cNvPr id="38" name="Connettore 2 37">
+            <a:extLst>
+              <a:ext uri="{FF2B5EF4-FFF2-40B4-BE49-F238E27FC236}">
+                <a16:creationId xmlns:a16="http://schemas.microsoft.com/office/drawing/2014/main" id="{D274A3E3-134E-5963-5B23-375C2F17363C}"/>
+              </a:ext>
+            </a:extLst>
+          </p:cNvPr>
+          <p:cNvCxnSpPr>
+            <a:cxnSpLocks/>
+            <a:endCxn id="37" idx="4"/>
+          </p:cNvCxnSpPr>
+          <p:nvPr/>
+        </p:nvCxnSpPr>
+        <p:spPr>
+          <a:xfrm flipV="1">
+            <a:off x="6555773" y="5909610"/>
+            <a:ext cx="0" cy="528973"/>
+          </a:xfrm>
+          <a:prstGeom prst="straightConnector1">
+            <a:avLst/>
+          </a:prstGeom>
+          <a:ln w="19050">
+            <a:tailEnd type="triangle"/>
+          </a:ln>
+        </p:spPr>
+        <p:style>
+          <a:lnRef idx="1">
+            <a:schemeClr val="accent1"/>
+          </a:lnRef>
+          <a:fillRef idx="0">
+            <a:schemeClr val="accent1"/>
+          </a:fillRef>
+          <a:effectRef idx="0">
+            <a:schemeClr val="accent1"/>
+          </a:effectRef>
+          <a:fontRef idx="minor">
+            <a:schemeClr val="tx1"/>
+          </a:fontRef>
+        </p:style>
+      </p:cxnSp>
+      <p:cxnSp>
+        <p:nvCxnSpPr>
+          <p:cNvPr id="39" name="Connettore 2 38">
+            <a:extLst>
+              <a:ext uri="{FF2B5EF4-FFF2-40B4-BE49-F238E27FC236}">
+                <a16:creationId xmlns:a16="http://schemas.microsoft.com/office/drawing/2014/main" id="{C4E21A79-4349-D129-D4FD-0FA16DBD9349}"/>
+              </a:ext>
+            </a:extLst>
+          </p:cNvPr>
+          <p:cNvCxnSpPr>
+            <a:cxnSpLocks/>
+          </p:cNvCxnSpPr>
+          <p:nvPr/>
+        </p:nvCxnSpPr>
+        <p:spPr>
+          <a:xfrm flipV="1">
+            <a:off x="6547506" y="4836528"/>
+            <a:ext cx="0" cy="528973"/>
+          </a:xfrm>
+          <a:prstGeom prst="straightConnector1">
+            <a:avLst/>
+          </a:prstGeom>
+          <a:ln w="19050">
+            <a:tailEnd type="triangle"/>
+          </a:ln>
+        </p:spPr>
+        <p:style>
+          <a:lnRef idx="1">
+            <a:schemeClr val="accent1"/>
+          </a:lnRef>
+          <a:fillRef idx="0">
+            <a:schemeClr val="accent1"/>
+          </a:fillRef>
+          <a:effectRef idx="0">
+            <a:schemeClr val="accent1"/>
+          </a:effectRef>
+          <a:fontRef idx="minor">
+            <a:schemeClr val="tx1"/>
+          </a:fontRef>
+        </p:style>
+      </p:cxnSp>
+      <p:cxnSp>
+        <p:nvCxnSpPr>
+          <p:cNvPr id="40" name="Connettore curvo 39">
+            <a:extLst>
+              <a:ext uri="{FF2B5EF4-FFF2-40B4-BE49-F238E27FC236}">
+                <a16:creationId xmlns:a16="http://schemas.microsoft.com/office/drawing/2014/main" id="{C978EC2D-C56F-528B-9CC6-C349BE3DEC61}"/>
+              </a:ext>
+            </a:extLst>
+          </p:cNvPr>
+          <p:cNvCxnSpPr>
+            <a:cxnSpLocks/>
+          </p:cNvCxnSpPr>
+          <p:nvPr/>
+        </p:nvCxnSpPr>
+        <p:spPr>
+          <a:xfrm flipV="1">
+            <a:off x="6033830" y="5805019"/>
+            <a:ext cx="282725" cy="144765"/>
+          </a:xfrm>
+          <a:prstGeom prst="curvedConnector3">
+            <a:avLst>
+              <a:gd name="adj1" fmla="val 50000"/>
+            </a:avLst>
+          </a:prstGeom>
+          <a:ln>
+            <a:tailEnd type="triangle"/>
+          </a:ln>
+        </p:spPr>
+        <p:style>
+          <a:lnRef idx="1">
+            <a:schemeClr val="accent1"/>
+          </a:lnRef>
+          <a:fillRef idx="0">
+            <a:schemeClr val="accent1"/>
+          </a:fillRef>
+          <a:effectRef idx="0">
+            <a:schemeClr val="accent1"/>
+          </a:effectRef>
+          <a:fontRef idx="minor">
+            <a:schemeClr val="tx1"/>
+          </a:fontRef>
+        </p:style>
+      </p:cxnSp>
+      <p:cxnSp>
+        <p:nvCxnSpPr>
+          <p:cNvPr id="41" name="Connettore curvo 40">
+            <a:extLst>
+              <a:ext uri="{FF2B5EF4-FFF2-40B4-BE49-F238E27FC236}">
+                <a16:creationId xmlns:a16="http://schemas.microsoft.com/office/drawing/2014/main" id="{69949907-95B6-42B7-7A8F-49A4F3DA2B80}"/>
+              </a:ext>
+            </a:extLst>
+          </p:cNvPr>
+          <p:cNvCxnSpPr>
+            <a:stCxn id="30" idx="7"/>
+          </p:cNvCxnSpPr>
+          <p:nvPr/>
+        </p:nvCxnSpPr>
+        <p:spPr>
+          <a:xfrm>
+            <a:off x="4732240" y="5451191"/>
+            <a:ext cx="661349" cy="642802"/>
+          </a:xfrm>
+          <a:prstGeom prst="curvedConnector3">
+            <a:avLst/>
+          </a:prstGeom>
+        </p:spPr>
+        <p:style>
+          <a:lnRef idx="1">
+            <a:schemeClr val="accent1"/>
+          </a:lnRef>
+          <a:fillRef idx="0">
+            <a:schemeClr val="accent1"/>
+          </a:fillRef>
+          <a:effectRef idx="0">
+            <a:schemeClr val="accent1"/>
+          </a:effectRef>
+          <a:fontRef idx="minor">
+            <a:schemeClr val="tx1"/>
+          </a:fontRef>
+        </p:style>
+      </p:cxnSp>
+      <p:sp>
+        <p:nvSpPr>
+          <p:cNvPr id="42" name="CasellaDiTesto 41">
+            <a:extLst>
+              <a:ext uri="{FF2B5EF4-FFF2-40B4-BE49-F238E27FC236}">
+                <a16:creationId xmlns:a16="http://schemas.microsoft.com/office/drawing/2014/main" id="{AE6620FA-A605-C136-B163-C595037A7E4B}"/>
+              </a:ext>
+            </a:extLst>
+          </p:cNvPr>
+          <p:cNvSpPr txBox="1"/>
+          <p:nvPr/>
+        </p:nvSpPr>
+        <p:spPr>
+          <a:xfrm>
+            <a:off x="5555992" y="5641776"/>
+            <a:ext cx="365119" cy="584172"/>
+          </a:xfrm>
+          <a:prstGeom prst="rect">
+            <a:avLst/>
+          </a:prstGeom>
+          <a:noFill/>
+        </p:spPr>
+        <p:txBody>
+          <a:bodyPr wrap="square" rtlCol="0">
+            <a:spAutoFit/>
+          </a:bodyPr>
+          <a:lstStyle/>
+          <a:p>
+            <a:endParaRPr lang="en-GB" sz="2400" dirty="0"/>
+          </a:p>
+          <a:p>
+            <a:r>
+              <a:rPr lang="en-GB" sz="2400" dirty="0">
+                <a:solidFill>
+                  <a:schemeClr val="accent1"/>
+                </a:solidFill>
+              </a:rPr>
+              <a:t>…</a:t>
+            </a:r>
+          </a:p>
+        </p:txBody>
+      </p:sp>
+      <p:cxnSp>
+        <p:nvCxnSpPr>
+          <p:cNvPr id="44" name="Connettore curvo 43">
+            <a:extLst>
+              <a:ext uri="{FF2B5EF4-FFF2-40B4-BE49-F238E27FC236}">
+                <a16:creationId xmlns:a16="http://schemas.microsoft.com/office/drawing/2014/main" id="{0EECC3E6-8A6A-D92C-3D4A-716F6E79C4B7}"/>
+              </a:ext>
+            </a:extLst>
+          </p:cNvPr>
+          <p:cNvCxnSpPr>
+            <a:cxnSpLocks/>
+          </p:cNvCxnSpPr>
+          <p:nvPr/>
+        </p:nvCxnSpPr>
+        <p:spPr>
+          <a:xfrm flipV="1">
+            <a:off x="1087871" y="5885476"/>
+            <a:ext cx="282725" cy="144765"/>
+          </a:xfrm>
+          <a:prstGeom prst="curvedConnector3">
+            <a:avLst>
+              <a:gd name="adj1" fmla="val 50000"/>
+            </a:avLst>
+          </a:prstGeom>
+          <a:ln>
+            <a:tailEnd type="triangle"/>
+          </a:ln>
+        </p:spPr>
+        <p:style>
+          <a:lnRef idx="1">
+            <a:schemeClr val="accent1"/>
+          </a:lnRef>
+          <a:fillRef idx="0">
+            <a:schemeClr val="accent1"/>
+          </a:fillRef>
+          <a:effectRef idx="0">
+            <a:schemeClr val="accent1"/>
+          </a:effectRef>
+          <a:fontRef idx="minor">
+            <a:schemeClr val="tx1"/>
+          </a:fontRef>
+        </p:style>
+      </p:cxnSp>
+      <p:sp>
+        <p:nvSpPr>
+          <p:cNvPr id="45" name="Ovale 44">
+            <a:extLst>
+              <a:ext uri="{FF2B5EF4-FFF2-40B4-BE49-F238E27FC236}">
+                <a16:creationId xmlns:a16="http://schemas.microsoft.com/office/drawing/2014/main" id="{8421945D-2121-6985-5809-63916BD9766A}"/>
+              </a:ext>
+            </a:extLst>
+          </p:cNvPr>
+          <p:cNvSpPr/>
+          <p:nvPr/>
+        </p:nvSpPr>
+        <p:spPr>
+          <a:xfrm>
+            <a:off x="1285661" y="1253894"/>
+            <a:ext cx="636549" cy="616018"/>
+          </a:xfrm>
+          <a:prstGeom prst="ellipse">
+            <a:avLst/>
+          </a:prstGeom>
+          <a:solidFill>
+            <a:srgbClr val="FF0000"/>
+          </a:solidFill>
+        </p:spPr>
+        <p:style>
+          <a:lnRef idx="2">
+            <a:schemeClr val="accent1">
+              <a:shade val="15000"/>
+            </a:schemeClr>
+          </a:lnRef>
+          <a:fillRef idx="1">
+            <a:schemeClr val="accent1"/>
+          </a:fillRef>
+          <a:effectRef idx="0">
+            <a:schemeClr val="accent1"/>
+          </a:effectRef>
+          <a:fontRef idx="minor">
+            <a:schemeClr val="lt1"/>
+          </a:fontRef>
+        </p:style>
+        <p:txBody>
+          <a:bodyPr rtlCol="0" anchor="ctr"/>
+          <a:lstStyle/>
+          <a:p>
+            <a:pPr algn="ctr"/>
+            <a:endParaRPr lang="en-GB"/>
+          </a:p>
+        </p:txBody>
+      </p:sp>
+      <p:sp>
+        <p:nvSpPr>
+          <p:cNvPr id="46" name="Ovale 45">
+            <a:extLst>
+              <a:ext uri="{FF2B5EF4-FFF2-40B4-BE49-F238E27FC236}">
+                <a16:creationId xmlns:a16="http://schemas.microsoft.com/office/drawing/2014/main" id="{F59D62A3-EC04-95CC-4BE5-89E868CE7725}"/>
+              </a:ext>
+            </a:extLst>
+          </p:cNvPr>
+          <p:cNvSpPr/>
+          <p:nvPr/>
+        </p:nvSpPr>
+        <p:spPr>
+          <a:xfrm>
+            <a:off x="2670671" y="1253894"/>
+            <a:ext cx="636549" cy="616018"/>
+          </a:xfrm>
+          <a:prstGeom prst="ellipse">
+            <a:avLst/>
+          </a:prstGeom>
+          <a:solidFill>
+            <a:srgbClr val="FF0000"/>
+          </a:solidFill>
+        </p:spPr>
+        <p:style>
+          <a:lnRef idx="2">
+            <a:schemeClr val="accent1">
+              <a:shade val="15000"/>
+            </a:schemeClr>
+          </a:lnRef>
+          <a:fillRef idx="1">
+            <a:schemeClr val="accent1"/>
+          </a:fillRef>
+          <a:effectRef idx="0">
+            <a:schemeClr val="accent1"/>
+          </a:effectRef>
+          <a:fontRef idx="minor">
+            <a:schemeClr val="lt1"/>
+          </a:fontRef>
+        </p:style>
+        <p:txBody>
+          <a:bodyPr rtlCol="0" anchor="ctr"/>
+          <a:lstStyle/>
+          <a:p>
+            <a:pPr algn="ctr"/>
+            <a:endParaRPr lang="en-GB"/>
+          </a:p>
+        </p:txBody>
+      </p:sp>
+      <p:sp>
+        <p:nvSpPr>
+          <p:cNvPr id="47" name="Ovale 46">
+            <a:extLst>
+              <a:ext uri="{FF2B5EF4-FFF2-40B4-BE49-F238E27FC236}">
+                <a16:creationId xmlns:a16="http://schemas.microsoft.com/office/drawing/2014/main" id="{E662B7CD-82F1-66F7-E9D0-C10E7452E9C9}"/>
+              </a:ext>
+            </a:extLst>
+          </p:cNvPr>
+          <p:cNvSpPr/>
+          <p:nvPr/>
+        </p:nvSpPr>
+        <p:spPr>
+          <a:xfrm>
+            <a:off x="4137840" y="1253894"/>
+            <a:ext cx="636549" cy="616018"/>
+          </a:xfrm>
+          <a:prstGeom prst="ellipse">
+            <a:avLst/>
+          </a:prstGeom>
+          <a:solidFill>
+            <a:srgbClr val="FF0000"/>
+          </a:solidFill>
+        </p:spPr>
+        <p:style>
+          <a:lnRef idx="2">
+            <a:schemeClr val="accent1">
+              <a:shade val="15000"/>
+            </a:schemeClr>
+          </a:lnRef>
+          <a:fillRef idx="1">
+            <a:schemeClr val="accent1"/>
+          </a:fillRef>
+          <a:effectRef idx="0">
+            <a:schemeClr val="accent1"/>
+          </a:effectRef>
+          <a:fontRef idx="minor">
+            <a:schemeClr val="lt1"/>
+          </a:fontRef>
+        </p:style>
+        <p:txBody>
+          <a:bodyPr rtlCol="0" anchor="ctr"/>
+          <a:lstStyle/>
+          <a:p>
+            <a:pPr algn="ctr"/>
+            <a:endParaRPr lang="en-GB"/>
+          </a:p>
+        </p:txBody>
+      </p:sp>
+      <p:sp>
+        <p:nvSpPr>
+          <p:cNvPr id="48" name="Ovale 47">
+            <a:extLst>
+              <a:ext uri="{FF2B5EF4-FFF2-40B4-BE49-F238E27FC236}">
+                <a16:creationId xmlns:a16="http://schemas.microsoft.com/office/drawing/2014/main" id="{E068CB8F-2F13-64B7-044B-B2A97933F66B}"/>
+              </a:ext>
+            </a:extLst>
+          </p:cNvPr>
+          <p:cNvSpPr/>
+          <p:nvPr/>
+        </p:nvSpPr>
+        <p:spPr>
+          <a:xfrm>
+            <a:off x="6204473" y="1253894"/>
+            <a:ext cx="636549" cy="616018"/>
+          </a:xfrm>
+          <a:prstGeom prst="ellipse">
+            <a:avLst/>
+          </a:prstGeom>
+          <a:solidFill>
+            <a:srgbClr val="FF0000"/>
+          </a:solidFill>
+        </p:spPr>
+        <p:style>
+          <a:lnRef idx="2">
+            <a:schemeClr val="accent1">
+              <a:shade val="15000"/>
+            </a:schemeClr>
+          </a:lnRef>
+          <a:fillRef idx="1">
+            <a:schemeClr val="accent1"/>
+          </a:fillRef>
+          <a:effectRef idx="0">
+            <a:schemeClr val="accent1"/>
+          </a:effectRef>
+          <a:fontRef idx="minor">
+            <a:schemeClr val="lt1"/>
+          </a:fontRef>
+        </p:style>
+        <p:txBody>
+          <a:bodyPr rtlCol="0" anchor="ctr"/>
+          <a:lstStyle/>
+          <a:p>
+            <a:pPr algn="ctr"/>
+            <a:endParaRPr lang="en-GB"/>
+          </a:p>
+        </p:txBody>
+      </p:sp>
+      <p:cxnSp>
+        <p:nvCxnSpPr>
+          <p:cNvPr id="49" name="Connettore 2 48">
+            <a:extLst>
+              <a:ext uri="{FF2B5EF4-FFF2-40B4-BE49-F238E27FC236}">
+                <a16:creationId xmlns:a16="http://schemas.microsoft.com/office/drawing/2014/main" id="{9BB78E08-3C0A-265B-420A-594425D014BB}"/>
+              </a:ext>
+            </a:extLst>
+          </p:cNvPr>
+          <p:cNvCxnSpPr>
+            <a:cxnSpLocks/>
+          </p:cNvCxnSpPr>
+          <p:nvPr/>
+        </p:nvCxnSpPr>
+        <p:spPr>
+          <a:xfrm flipV="1">
+            <a:off x="1601197" y="963938"/>
+            <a:ext cx="0" cy="280676"/>
+          </a:xfrm>
+          <a:prstGeom prst="straightConnector1">
+            <a:avLst/>
+          </a:prstGeom>
+          <a:ln w="19050">
+            <a:tailEnd type="triangle"/>
+          </a:ln>
+        </p:spPr>
+        <p:style>
+          <a:lnRef idx="1">
+            <a:schemeClr val="accent1"/>
+          </a:lnRef>
+          <a:fillRef idx="0">
+            <a:schemeClr val="accent1"/>
+          </a:fillRef>
+          <a:effectRef idx="0">
+            <a:schemeClr val="accent1"/>
+          </a:effectRef>
+          <a:fontRef idx="minor">
+            <a:schemeClr val="tx1"/>
+          </a:fontRef>
+        </p:style>
+      </p:cxnSp>
+      <p:cxnSp>
+        <p:nvCxnSpPr>
+          <p:cNvPr id="50" name="Connettore 2 49">
+            <a:extLst>
+              <a:ext uri="{FF2B5EF4-FFF2-40B4-BE49-F238E27FC236}">
+                <a16:creationId xmlns:a16="http://schemas.microsoft.com/office/drawing/2014/main" id="{61E0798B-1D59-7C43-5EB6-14A369002B68}"/>
+              </a:ext>
+            </a:extLst>
+          </p:cNvPr>
+          <p:cNvCxnSpPr>
+            <a:cxnSpLocks/>
+          </p:cNvCxnSpPr>
+          <p:nvPr/>
+        </p:nvCxnSpPr>
+        <p:spPr>
+          <a:xfrm flipV="1">
+            <a:off x="2982595" y="963938"/>
+            <a:ext cx="0" cy="280676"/>
+          </a:xfrm>
+          <a:prstGeom prst="straightConnector1">
+            <a:avLst/>
+          </a:prstGeom>
+          <a:ln w="19050">
+            <a:tailEnd type="triangle"/>
+          </a:ln>
+        </p:spPr>
+        <p:style>
+          <a:lnRef idx="1">
+            <a:schemeClr val="accent1"/>
+          </a:lnRef>
+          <a:fillRef idx="0">
+            <a:schemeClr val="accent1"/>
+          </a:fillRef>
+          <a:effectRef idx="0">
+            <a:schemeClr val="accent1"/>
+          </a:effectRef>
+          <a:fontRef idx="minor">
+            <a:schemeClr val="tx1"/>
+          </a:fontRef>
+        </p:style>
+      </p:cxnSp>
+      <p:cxnSp>
+        <p:nvCxnSpPr>
+          <p:cNvPr id="51" name="Connettore 2 50">
+            <a:extLst>
+              <a:ext uri="{FF2B5EF4-FFF2-40B4-BE49-F238E27FC236}">
+                <a16:creationId xmlns:a16="http://schemas.microsoft.com/office/drawing/2014/main" id="{C2639F12-733C-1C55-EB8A-1E1E74AE3FB8}"/>
+              </a:ext>
+            </a:extLst>
+          </p:cNvPr>
+          <p:cNvCxnSpPr>
+            <a:cxnSpLocks/>
+          </p:cNvCxnSpPr>
+          <p:nvPr/>
+        </p:nvCxnSpPr>
+        <p:spPr>
+          <a:xfrm flipV="1">
+            <a:off x="4456875" y="963938"/>
+            <a:ext cx="0" cy="280676"/>
+          </a:xfrm>
+          <a:prstGeom prst="straightConnector1">
+            <a:avLst/>
+          </a:prstGeom>
+          <a:ln w="19050">
+            <a:tailEnd type="triangle"/>
+          </a:ln>
+        </p:spPr>
+        <p:style>
+          <a:lnRef idx="1">
+            <a:schemeClr val="accent1"/>
+          </a:lnRef>
+          <a:fillRef idx="0">
+            <a:schemeClr val="accent1"/>
+          </a:fillRef>
+          <a:effectRef idx="0">
+            <a:schemeClr val="accent1"/>
+          </a:effectRef>
+          <a:fontRef idx="minor">
+            <a:schemeClr val="tx1"/>
+          </a:fontRef>
+        </p:style>
+      </p:cxnSp>
+      <p:cxnSp>
+        <p:nvCxnSpPr>
+          <p:cNvPr id="52" name="Connettore 2 51">
+            <a:extLst>
+              <a:ext uri="{FF2B5EF4-FFF2-40B4-BE49-F238E27FC236}">
+                <a16:creationId xmlns:a16="http://schemas.microsoft.com/office/drawing/2014/main" id="{42C189F0-EF6B-F000-DF26-C9664535E561}"/>
+              </a:ext>
+            </a:extLst>
+          </p:cNvPr>
+          <p:cNvCxnSpPr>
+            <a:cxnSpLocks/>
+          </p:cNvCxnSpPr>
+          <p:nvPr/>
+        </p:nvCxnSpPr>
+        <p:spPr>
+          <a:xfrm flipV="1">
+            <a:off x="6522747" y="963938"/>
+            <a:ext cx="0" cy="280676"/>
+          </a:xfrm>
+          <a:prstGeom prst="straightConnector1">
+            <a:avLst/>
+          </a:prstGeom>
+          <a:ln w="19050">
+            <a:tailEnd type="triangle"/>
+          </a:ln>
+        </p:spPr>
+        <p:style>
+          <a:lnRef idx="1">
+            <a:schemeClr val="accent1"/>
+          </a:lnRef>
+          <a:fillRef idx="0">
+            <a:schemeClr val="accent1"/>
+          </a:fillRef>
+          <a:effectRef idx="0">
+            <a:schemeClr val="accent1"/>
+          </a:effectRef>
+          <a:fontRef idx="minor">
+            <a:schemeClr val="tx1"/>
+          </a:fontRef>
+        </p:style>
+      </p:cxnSp>
+      <p:sp>
+        <p:nvSpPr>
+          <p:cNvPr id="53" name="Ovale 52">
+            <a:extLst>
+              <a:ext uri="{FF2B5EF4-FFF2-40B4-BE49-F238E27FC236}">
+                <a16:creationId xmlns:a16="http://schemas.microsoft.com/office/drawing/2014/main" id="{BB0C4E40-5359-E0EE-82EA-D92464B0D38B}"/>
+              </a:ext>
+            </a:extLst>
+          </p:cNvPr>
+          <p:cNvSpPr/>
+          <p:nvPr/>
+        </p:nvSpPr>
+        <p:spPr>
+          <a:xfrm>
+            <a:off x="1304937" y="4202367"/>
+            <a:ext cx="636549" cy="616018"/>
+          </a:xfrm>
+          <a:prstGeom prst="ellipse">
+            <a:avLst/>
+          </a:prstGeom>
+          <a:solidFill>
+            <a:schemeClr val="accent6">
+              <a:lumMod val="75000"/>
+            </a:schemeClr>
+          </a:solidFill>
+        </p:spPr>
+        <p:style>
+          <a:lnRef idx="2">
+            <a:schemeClr val="accent1">
+              <a:shade val="15000"/>
+            </a:schemeClr>
+          </a:lnRef>
+          <a:fillRef idx="1">
+            <a:schemeClr val="accent1"/>
+          </a:fillRef>
+          <a:effectRef idx="0">
+            <a:schemeClr val="accent1"/>
+          </a:effectRef>
+          <a:fontRef idx="minor">
+            <a:schemeClr val="lt1"/>
+          </a:fontRef>
+        </p:style>
+        <p:txBody>
+          <a:bodyPr rtlCol="0" anchor="ctr"/>
+          <a:lstStyle/>
+          <a:p>
+            <a:pPr algn="ctr"/>
+            <a:endParaRPr lang="en-GB"/>
+          </a:p>
+        </p:txBody>
+      </p:sp>
+      <p:cxnSp>
+        <p:nvCxnSpPr>
+          <p:cNvPr id="56" name="Connettore curvo 55">
+            <a:extLst>
+              <a:ext uri="{FF2B5EF4-FFF2-40B4-BE49-F238E27FC236}">
+                <a16:creationId xmlns:a16="http://schemas.microsoft.com/office/drawing/2014/main" id="{15714CD2-946A-2CF2-78CF-36BAE4FC7830}"/>
+              </a:ext>
+            </a:extLst>
+          </p:cNvPr>
+          <p:cNvCxnSpPr>
+            <a:cxnSpLocks/>
+          </p:cNvCxnSpPr>
+          <p:nvPr/>
+        </p:nvCxnSpPr>
+        <p:spPr>
+          <a:xfrm>
+            <a:off x="1851400" y="4317364"/>
+            <a:ext cx="946073" cy="384256"/>
+          </a:xfrm>
+          <a:prstGeom prst="curvedConnector4">
+            <a:avLst>
+              <a:gd name="adj1" fmla="val 45073"/>
+              <a:gd name="adj2" fmla="val 141821"/>
+            </a:avLst>
+          </a:prstGeom>
+          <a:ln>
+            <a:tailEnd type="triangle"/>
+          </a:ln>
+        </p:spPr>
+        <p:style>
+          <a:lnRef idx="1">
+            <a:schemeClr val="accent1"/>
+          </a:lnRef>
+          <a:fillRef idx="0">
+            <a:schemeClr val="accent1"/>
+          </a:fillRef>
+          <a:effectRef idx="0">
+            <a:schemeClr val="accent1"/>
+          </a:effectRef>
+          <a:fontRef idx="minor">
+            <a:schemeClr val="tx1"/>
+          </a:fontRef>
+        </p:style>
+      </p:cxnSp>
+      <p:sp>
+        <p:nvSpPr>
+          <p:cNvPr id="59" name="Ovale 58">
+            <a:extLst>
+              <a:ext uri="{FF2B5EF4-FFF2-40B4-BE49-F238E27FC236}">
+                <a16:creationId xmlns:a16="http://schemas.microsoft.com/office/drawing/2014/main" id="{A9926AC5-40E9-2CB3-CE26-0B8AC09FB736}"/>
+              </a:ext>
+            </a:extLst>
+          </p:cNvPr>
+          <p:cNvSpPr/>
+          <p:nvPr/>
+        </p:nvSpPr>
+        <p:spPr>
+          <a:xfrm>
+            <a:off x="2696526" y="4202367"/>
+            <a:ext cx="636549" cy="616018"/>
+          </a:xfrm>
+          <a:prstGeom prst="ellipse">
+            <a:avLst/>
+          </a:prstGeom>
+          <a:solidFill>
+            <a:schemeClr val="accent6">
+              <a:lumMod val="75000"/>
+            </a:schemeClr>
+          </a:solidFill>
+        </p:spPr>
+        <p:style>
+          <a:lnRef idx="2">
+            <a:schemeClr val="accent1">
+              <a:shade val="15000"/>
+            </a:schemeClr>
+          </a:lnRef>
+          <a:fillRef idx="1">
+            <a:schemeClr val="accent1"/>
+          </a:fillRef>
+          <a:effectRef idx="0">
+            <a:schemeClr val="accent1"/>
+          </a:effectRef>
+          <a:fontRef idx="minor">
+            <a:schemeClr val="lt1"/>
+          </a:fontRef>
+        </p:style>
+        <p:txBody>
+          <a:bodyPr rtlCol="0" anchor="ctr"/>
+          <a:lstStyle/>
+          <a:p>
+            <a:pPr algn="ctr"/>
+            <a:endParaRPr lang="en-GB"/>
+          </a:p>
+        </p:txBody>
+      </p:sp>
+      <p:sp>
+        <p:nvSpPr>
+          <p:cNvPr id="64" name="Ovale 63">
+            <a:extLst>
+              <a:ext uri="{FF2B5EF4-FFF2-40B4-BE49-F238E27FC236}">
+                <a16:creationId xmlns:a16="http://schemas.microsoft.com/office/drawing/2014/main" id="{CB44E34D-1202-8940-514E-0C0AB1A76279}"/>
+              </a:ext>
+            </a:extLst>
+          </p:cNvPr>
+          <p:cNvSpPr/>
+          <p:nvPr/>
+        </p:nvSpPr>
+        <p:spPr>
+          <a:xfrm>
+            <a:off x="4136338" y="4202367"/>
+            <a:ext cx="636549" cy="616018"/>
+          </a:xfrm>
+          <a:prstGeom prst="ellipse">
+            <a:avLst/>
+          </a:prstGeom>
+          <a:solidFill>
+            <a:schemeClr val="accent6">
+              <a:lumMod val="75000"/>
+            </a:schemeClr>
+          </a:solidFill>
+        </p:spPr>
+        <p:style>
+          <a:lnRef idx="2">
+            <a:schemeClr val="accent1">
+              <a:shade val="15000"/>
+            </a:schemeClr>
+          </a:lnRef>
+          <a:fillRef idx="1">
+            <a:schemeClr val="accent1"/>
+          </a:fillRef>
+          <a:effectRef idx="0">
+            <a:schemeClr val="accent1"/>
+          </a:effectRef>
+          <a:fontRef idx="minor">
+            <a:schemeClr val="lt1"/>
+          </a:fontRef>
+        </p:style>
+        <p:txBody>
+          <a:bodyPr rtlCol="0" anchor="ctr"/>
+          <a:lstStyle/>
+          <a:p>
+            <a:pPr algn="ctr"/>
+            <a:endParaRPr lang="en-GB"/>
+          </a:p>
+        </p:txBody>
+      </p:sp>
+      <p:cxnSp>
+        <p:nvCxnSpPr>
+          <p:cNvPr id="65" name="Connettore 2 64">
+            <a:extLst>
+              <a:ext uri="{FF2B5EF4-FFF2-40B4-BE49-F238E27FC236}">
+                <a16:creationId xmlns:a16="http://schemas.microsoft.com/office/drawing/2014/main" id="{EBAEF4C6-EE3F-4D97-7402-7274D1BFC8EE}"/>
+              </a:ext>
+            </a:extLst>
+          </p:cNvPr>
+          <p:cNvCxnSpPr>
+            <a:cxnSpLocks/>
+          </p:cNvCxnSpPr>
+          <p:nvPr/>
+        </p:nvCxnSpPr>
+        <p:spPr>
+          <a:xfrm flipV="1">
+            <a:off x="4454612" y="4836528"/>
+            <a:ext cx="0" cy="528973"/>
+          </a:xfrm>
+          <a:prstGeom prst="straightConnector1">
+            <a:avLst/>
+          </a:prstGeom>
+          <a:ln w="19050">
+            <a:tailEnd type="triangle"/>
+          </a:ln>
+        </p:spPr>
+        <p:style>
+          <a:lnRef idx="1">
+            <a:schemeClr val="accent1"/>
+          </a:lnRef>
+          <a:fillRef idx="0">
+            <a:schemeClr val="accent1"/>
+          </a:fillRef>
+          <a:effectRef idx="0">
+            <a:schemeClr val="accent1"/>
+          </a:effectRef>
+          <a:fontRef idx="minor">
+            <a:schemeClr val="tx1"/>
+          </a:fontRef>
+        </p:style>
+      </p:cxnSp>
+      <p:cxnSp>
+        <p:nvCxnSpPr>
+          <p:cNvPr id="69" name="Connettore curvo 68">
+            <a:extLst>
+              <a:ext uri="{FF2B5EF4-FFF2-40B4-BE49-F238E27FC236}">
+                <a16:creationId xmlns:a16="http://schemas.microsoft.com/office/drawing/2014/main" id="{4C2EAFC1-C6E2-A0C6-BF31-BF29E6A80AB2}"/>
+              </a:ext>
+            </a:extLst>
+          </p:cNvPr>
+          <p:cNvCxnSpPr>
+            <a:cxnSpLocks/>
+          </p:cNvCxnSpPr>
+          <p:nvPr/>
+        </p:nvCxnSpPr>
+        <p:spPr>
+          <a:xfrm>
+            <a:off x="3225917" y="4264969"/>
+            <a:ext cx="946073" cy="384256"/>
+          </a:xfrm>
+          <a:prstGeom prst="curvedConnector4">
+            <a:avLst>
+              <a:gd name="adj1" fmla="val 45073"/>
+              <a:gd name="adj2" fmla="val 141821"/>
+            </a:avLst>
+          </a:prstGeom>
+          <a:ln>
+            <a:tailEnd type="triangle"/>
+          </a:ln>
+        </p:spPr>
+        <p:style>
+          <a:lnRef idx="1">
+            <a:schemeClr val="accent1"/>
+          </a:lnRef>
+          <a:fillRef idx="0">
+            <a:schemeClr val="accent1"/>
+          </a:fillRef>
+          <a:effectRef idx="0">
+            <a:schemeClr val="accent1"/>
+          </a:effectRef>
+          <a:fontRef idx="minor">
+            <a:schemeClr val="tx1"/>
+          </a:fontRef>
+        </p:style>
+      </p:cxnSp>
+      <p:sp>
+        <p:nvSpPr>
+          <p:cNvPr id="70" name="Ovale 69">
+            <a:extLst>
+              <a:ext uri="{FF2B5EF4-FFF2-40B4-BE49-F238E27FC236}">
+                <a16:creationId xmlns:a16="http://schemas.microsoft.com/office/drawing/2014/main" id="{2454338D-8959-341D-781F-C8FF44B1933F}"/>
+              </a:ext>
+            </a:extLst>
+          </p:cNvPr>
+          <p:cNvSpPr/>
+          <p:nvPr/>
+        </p:nvSpPr>
+        <p:spPr>
+          <a:xfrm>
+            <a:off x="6237499" y="4202367"/>
+            <a:ext cx="636549" cy="616018"/>
+          </a:xfrm>
+          <a:prstGeom prst="ellipse">
+            <a:avLst/>
+          </a:prstGeom>
+          <a:solidFill>
+            <a:schemeClr val="accent6">
+              <a:lumMod val="75000"/>
+            </a:schemeClr>
+          </a:solidFill>
+        </p:spPr>
+        <p:style>
+          <a:lnRef idx="2">
+            <a:schemeClr val="accent1">
+              <a:shade val="15000"/>
+            </a:schemeClr>
+          </a:lnRef>
+          <a:fillRef idx="1">
+            <a:schemeClr val="accent1"/>
+          </a:fillRef>
+          <a:effectRef idx="0">
+            <a:schemeClr val="accent1"/>
+          </a:effectRef>
+          <a:fontRef idx="minor">
+            <a:schemeClr val="lt1"/>
+          </a:fontRef>
+        </p:style>
+        <p:txBody>
+          <a:bodyPr rtlCol="0" anchor="ctr"/>
+          <a:lstStyle/>
+          <a:p>
+            <a:pPr algn="ctr"/>
+            <a:endParaRPr lang="en-GB"/>
+          </a:p>
+        </p:txBody>
+      </p:sp>
+      <p:cxnSp>
+        <p:nvCxnSpPr>
+          <p:cNvPr id="73" name="Connettore curvo 72">
+            <a:extLst>
+              <a:ext uri="{FF2B5EF4-FFF2-40B4-BE49-F238E27FC236}">
+                <a16:creationId xmlns:a16="http://schemas.microsoft.com/office/drawing/2014/main" id="{6CBCAFE0-6E37-E4C7-F48D-52993A2B4304}"/>
+              </a:ext>
+            </a:extLst>
+          </p:cNvPr>
+          <p:cNvCxnSpPr>
+            <a:cxnSpLocks/>
+          </p:cNvCxnSpPr>
+          <p:nvPr/>
+        </p:nvCxnSpPr>
+        <p:spPr>
+          <a:xfrm flipV="1">
+            <a:off x="6033830" y="4653764"/>
+            <a:ext cx="282725" cy="144765"/>
+          </a:xfrm>
+          <a:prstGeom prst="curvedConnector3">
+            <a:avLst>
+              <a:gd name="adj1" fmla="val 50000"/>
+            </a:avLst>
+          </a:prstGeom>
+          <a:ln>
+            <a:tailEnd type="triangle"/>
+          </a:ln>
+        </p:spPr>
+        <p:style>
+          <a:lnRef idx="1">
+            <a:schemeClr val="accent1"/>
+          </a:lnRef>
+          <a:fillRef idx="0">
+            <a:schemeClr val="accent1"/>
+          </a:fillRef>
+          <a:effectRef idx="0">
+            <a:schemeClr val="accent1"/>
+          </a:effectRef>
+          <a:fontRef idx="minor">
+            <a:schemeClr val="tx1"/>
+          </a:fontRef>
+        </p:style>
+      </p:cxnSp>
+      <p:cxnSp>
+        <p:nvCxnSpPr>
+          <p:cNvPr id="74" name="Connettore curvo 73">
+            <a:extLst>
+              <a:ext uri="{FF2B5EF4-FFF2-40B4-BE49-F238E27FC236}">
+                <a16:creationId xmlns:a16="http://schemas.microsoft.com/office/drawing/2014/main" id="{66AA88A0-B8E6-FAB2-A02F-1B52A3EC85A3}"/>
+              </a:ext>
+            </a:extLst>
+          </p:cNvPr>
+          <p:cNvCxnSpPr>
+            <a:stCxn id="64" idx="7"/>
+          </p:cNvCxnSpPr>
+          <p:nvPr/>
+        </p:nvCxnSpPr>
+        <p:spPr>
+          <a:xfrm rot="16200000" flipH="1">
+            <a:off x="4721709" y="4250538"/>
+            <a:ext cx="629837" cy="713922"/>
+          </a:xfrm>
+          <a:prstGeom prst="curvedConnector4">
+            <a:avLst>
+              <a:gd name="adj1" fmla="val -36295"/>
+              <a:gd name="adj2" fmla="val 56529"/>
+            </a:avLst>
+          </a:prstGeom>
+        </p:spPr>
+        <p:style>
+          <a:lnRef idx="1">
+            <a:schemeClr val="accent1"/>
+          </a:lnRef>
+          <a:fillRef idx="0">
+            <a:schemeClr val="accent1"/>
+          </a:fillRef>
+          <a:effectRef idx="0">
+            <a:schemeClr val="accent1"/>
+          </a:effectRef>
+          <a:fontRef idx="minor">
+            <a:schemeClr val="tx1"/>
+          </a:fontRef>
+        </p:style>
+      </p:cxnSp>
+      <p:sp>
+        <p:nvSpPr>
+          <p:cNvPr id="75" name="CasellaDiTesto 74">
+            <a:extLst>
+              <a:ext uri="{FF2B5EF4-FFF2-40B4-BE49-F238E27FC236}">
+                <a16:creationId xmlns:a16="http://schemas.microsoft.com/office/drawing/2014/main" id="{7106D374-46B5-D888-AFBE-7AD3E5472365}"/>
+              </a:ext>
+            </a:extLst>
+          </p:cNvPr>
+          <p:cNvSpPr txBox="1"/>
+          <p:nvPr/>
+        </p:nvSpPr>
+        <p:spPr>
+          <a:xfrm>
+            <a:off x="5555992" y="4328596"/>
+            <a:ext cx="365119" cy="584172"/>
+          </a:xfrm>
+          <a:prstGeom prst="rect">
+            <a:avLst/>
+          </a:prstGeom>
+          <a:noFill/>
+        </p:spPr>
+        <p:txBody>
+          <a:bodyPr wrap="square" rtlCol="0">
+            <a:spAutoFit/>
+          </a:bodyPr>
+          <a:lstStyle/>
+          <a:p>
+            <a:endParaRPr lang="en-GB" sz="2400" dirty="0"/>
+          </a:p>
+          <a:p>
+            <a:r>
+              <a:rPr lang="en-GB" sz="2400" dirty="0">
+                <a:solidFill>
+                  <a:schemeClr val="accent1"/>
+                </a:solidFill>
+              </a:rPr>
+              <a:t>…</a:t>
+            </a:r>
+          </a:p>
+        </p:txBody>
+      </p:sp>
+      <p:cxnSp>
+        <p:nvCxnSpPr>
+          <p:cNvPr id="77" name="Connettore curvo 76">
+            <a:extLst>
+              <a:ext uri="{FF2B5EF4-FFF2-40B4-BE49-F238E27FC236}">
+                <a16:creationId xmlns:a16="http://schemas.microsoft.com/office/drawing/2014/main" id="{AD268A17-E8A0-B27F-88E0-AF60EF000BF2}"/>
+              </a:ext>
+            </a:extLst>
+          </p:cNvPr>
+          <p:cNvCxnSpPr>
+            <a:cxnSpLocks/>
+          </p:cNvCxnSpPr>
+          <p:nvPr/>
+        </p:nvCxnSpPr>
+        <p:spPr>
+          <a:xfrm flipV="1">
+            <a:off x="1087871" y="4734221"/>
+            <a:ext cx="282725" cy="144765"/>
+          </a:xfrm>
+          <a:prstGeom prst="curvedConnector3">
+            <a:avLst>
+              <a:gd name="adj1" fmla="val 50000"/>
+            </a:avLst>
+          </a:prstGeom>
+          <a:ln>
+            <a:tailEnd type="triangle"/>
+          </a:ln>
+        </p:spPr>
+        <p:style>
+          <a:lnRef idx="1">
+            <a:schemeClr val="accent1"/>
+          </a:lnRef>
+          <a:fillRef idx="0">
+            <a:schemeClr val="accent1"/>
+          </a:fillRef>
+          <a:effectRef idx="0">
+            <a:schemeClr val="accent1"/>
+          </a:effectRef>
+          <a:fontRef idx="minor">
+            <a:schemeClr val="tx1"/>
+          </a:fontRef>
+        </p:style>
+      </p:cxnSp>
+      <p:sp>
+        <p:nvSpPr>
+          <p:cNvPr id="78" name="Ovale 77">
+            <a:extLst>
+              <a:ext uri="{FF2B5EF4-FFF2-40B4-BE49-F238E27FC236}">
+                <a16:creationId xmlns:a16="http://schemas.microsoft.com/office/drawing/2014/main" id="{78C6AAFC-C863-9E66-E381-CE3B77063062}"/>
+              </a:ext>
+            </a:extLst>
+          </p:cNvPr>
+          <p:cNvSpPr/>
+          <p:nvPr/>
+        </p:nvSpPr>
+        <p:spPr>
+          <a:xfrm>
+            <a:off x="1304937" y="2363407"/>
+            <a:ext cx="636549" cy="616018"/>
+          </a:xfrm>
+          <a:prstGeom prst="ellipse">
+            <a:avLst/>
+          </a:prstGeom>
+          <a:solidFill>
+            <a:srgbClr val="FFC000"/>
+          </a:solidFill>
+        </p:spPr>
+        <p:style>
+          <a:lnRef idx="2">
+            <a:schemeClr val="accent1">
+              <a:shade val="15000"/>
+            </a:schemeClr>
+          </a:lnRef>
+          <a:fillRef idx="1">
+            <a:schemeClr val="accent1"/>
+          </a:fillRef>
+          <a:effectRef idx="0">
+            <a:schemeClr val="accent1"/>
+          </a:effectRef>
+          <a:fontRef idx="minor">
+            <a:schemeClr val="lt1"/>
+          </a:fontRef>
+        </p:style>
+        <p:txBody>
+          <a:bodyPr rtlCol="0" anchor="ctr"/>
+          <a:lstStyle/>
+          <a:p>
+            <a:pPr algn="ctr"/>
+            <a:endParaRPr lang="en-GB"/>
+          </a:p>
+        </p:txBody>
+      </p:sp>
+      <p:cxnSp>
+        <p:nvCxnSpPr>
+          <p:cNvPr id="79" name="Connettore 2 78">
+            <a:extLst>
+              <a:ext uri="{FF2B5EF4-FFF2-40B4-BE49-F238E27FC236}">
+                <a16:creationId xmlns:a16="http://schemas.microsoft.com/office/drawing/2014/main" id="{B5F720E8-CEFB-2B5E-F89B-BEF39104EE12}"/>
+              </a:ext>
+            </a:extLst>
+          </p:cNvPr>
+          <p:cNvCxnSpPr>
+            <a:cxnSpLocks/>
+          </p:cNvCxnSpPr>
+          <p:nvPr/>
+        </p:nvCxnSpPr>
+        <p:spPr>
+          <a:xfrm flipV="1">
+            <a:off x="1614944" y="1856473"/>
+            <a:ext cx="0" cy="528973"/>
+          </a:xfrm>
+          <a:prstGeom prst="straightConnector1">
+            <a:avLst/>
+          </a:prstGeom>
+          <a:ln w="19050">
+            <a:tailEnd type="triangle"/>
+          </a:ln>
+        </p:spPr>
+        <p:style>
+          <a:lnRef idx="1">
+            <a:schemeClr val="accent1"/>
+          </a:lnRef>
+          <a:fillRef idx="0">
+            <a:schemeClr val="accent1"/>
+          </a:fillRef>
+          <a:effectRef idx="0">
+            <a:schemeClr val="accent1"/>
+          </a:effectRef>
+          <a:fontRef idx="minor">
+            <a:schemeClr val="tx1"/>
+          </a:fontRef>
+        </p:style>
+      </p:cxnSp>
+      <p:cxnSp>
+        <p:nvCxnSpPr>
+          <p:cNvPr id="80" name="Connettore curvo 79">
+            <a:extLst>
+              <a:ext uri="{FF2B5EF4-FFF2-40B4-BE49-F238E27FC236}">
+                <a16:creationId xmlns:a16="http://schemas.microsoft.com/office/drawing/2014/main" id="{02A7662B-6D65-CC89-7A98-004F462D9BF8}"/>
+              </a:ext>
+            </a:extLst>
+          </p:cNvPr>
+          <p:cNvCxnSpPr>
+            <a:cxnSpLocks/>
+          </p:cNvCxnSpPr>
+          <p:nvPr/>
+        </p:nvCxnSpPr>
+        <p:spPr>
+          <a:xfrm>
+            <a:off x="1851400" y="2447924"/>
+            <a:ext cx="946073" cy="384256"/>
+          </a:xfrm>
+          <a:prstGeom prst="curvedConnector4">
+            <a:avLst>
+              <a:gd name="adj1" fmla="val 45073"/>
+              <a:gd name="adj2" fmla="val 141821"/>
+            </a:avLst>
+          </a:prstGeom>
+          <a:ln>
+            <a:tailEnd type="triangle"/>
+          </a:ln>
+        </p:spPr>
+        <p:style>
+          <a:lnRef idx="1">
+            <a:schemeClr val="accent1"/>
+          </a:lnRef>
+          <a:fillRef idx="0">
+            <a:schemeClr val="accent1"/>
+          </a:fillRef>
+          <a:effectRef idx="0">
+            <a:schemeClr val="accent1"/>
+          </a:effectRef>
+          <a:fontRef idx="minor">
+            <a:schemeClr val="tx1"/>
+          </a:fontRef>
+        </p:style>
+      </p:cxnSp>
+      <p:sp>
+        <p:nvSpPr>
+          <p:cNvPr id="81" name="Ovale 80">
+            <a:extLst>
+              <a:ext uri="{FF2B5EF4-FFF2-40B4-BE49-F238E27FC236}">
+                <a16:creationId xmlns:a16="http://schemas.microsoft.com/office/drawing/2014/main" id="{84470CE4-48CE-E5C1-89B3-D1BF3EAE5C70}"/>
+              </a:ext>
+            </a:extLst>
+          </p:cNvPr>
+          <p:cNvSpPr/>
+          <p:nvPr/>
+        </p:nvSpPr>
+        <p:spPr>
+          <a:xfrm>
+            <a:off x="2696526" y="2363407"/>
+            <a:ext cx="636549" cy="616018"/>
+          </a:xfrm>
+          <a:prstGeom prst="ellipse">
+            <a:avLst/>
+          </a:prstGeom>
+          <a:solidFill>
+            <a:srgbClr val="FFC000"/>
+          </a:solidFill>
+        </p:spPr>
+        <p:style>
+          <a:lnRef idx="2">
+            <a:schemeClr val="accent1">
+              <a:shade val="15000"/>
+            </a:schemeClr>
+          </a:lnRef>
+          <a:fillRef idx="1">
+            <a:schemeClr val="accent1"/>
+          </a:fillRef>
+          <a:effectRef idx="0">
+            <a:schemeClr val="accent1"/>
+          </a:effectRef>
+          <a:fontRef idx="minor">
+            <a:schemeClr val="lt1"/>
+          </a:fontRef>
+        </p:style>
+        <p:txBody>
+          <a:bodyPr rtlCol="0" anchor="ctr"/>
+          <a:lstStyle/>
+          <a:p>
+            <a:pPr algn="ctr"/>
+            <a:endParaRPr lang="en-GB"/>
+          </a:p>
+        </p:txBody>
+      </p:sp>
+      <p:cxnSp>
+        <p:nvCxnSpPr>
+          <p:cNvPr id="82" name="Connettore 2 81">
+            <a:extLst>
+              <a:ext uri="{FF2B5EF4-FFF2-40B4-BE49-F238E27FC236}">
+                <a16:creationId xmlns:a16="http://schemas.microsoft.com/office/drawing/2014/main" id="{359A3340-EE77-9301-A72E-E1C1497B282B}"/>
+              </a:ext>
+            </a:extLst>
+          </p:cNvPr>
+          <p:cNvCxnSpPr>
+            <a:cxnSpLocks/>
+          </p:cNvCxnSpPr>
+          <p:nvPr/>
+        </p:nvCxnSpPr>
+        <p:spPr>
+          <a:xfrm flipV="1">
+            <a:off x="3006533" y="1836153"/>
+            <a:ext cx="0" cy="528973"/>
+          </a:xfrm>
+          <a:prstGeom prst="straightConnector1">
+            <a:avLst/>
+          </a:prstGeom>
+          <a:ln w="19050">
+            <a:tailEnd type="triangle"/>
+          </a:ln>
+        </p:spPr>
+        <p:style>
+          <a:lnRef idx="1">
+            <a:schemeClr val="accent1"/>
+          </a:lnRef>
+          <a:fillRef idx="0">
+            <a:schemeClr val="accent1"/>
+          </a:fillRef>
+          <a:effectRef idx="0">
+            <a:schemeClr val="accent1"/>
+          </a:effectRef>
+          <a:fontRef idx="minor">
+            <a:schemeClr val="tx1"/>
+          </a:fontRef>
+        </p:style>
+      </p:cxnSp>
+      <p:sp>
+        <p:nvSpPr>
+          <p:cNvPr id="83" name="Ovale 82">
+            <a:extLst>
+              <a:ext uri="{FF2B5EF4-FFF2-40B4-BE49-F238E27FC236}">
+                <a16:creationId xmlns:a16="http://schemas.microsoft.com/office/drawing/2014/main" id="{5025E6A1-5E46-1CBA-DDCD-1307886E16B4}"/>
+              </a:ext>
+            </a:extLst>
+          </p:cNvPr>
+          <p:cNvSpPr/>
+          <p:nvPr/>
+        </p:nvSpPr>
+        <p:spPr>
+          <a:xfrm>
+            <a:off x="4136338" y="2363407"/>
+            <a:ext cx="636549" cy="616018"/>
+          </a:xfrm>
+          <a:prstGeom prst="ellipse">
+            <a:avLst/>
+          </a:prstGeom>
+          <a:solidFill>
+            <a:srgbClr val="FFC000"/>
+          </a:solidFill>
+        </p:spPr>
+        <p:style>
+          <a:lnRef idx="2">
+            <a:schemeClr val="accent1">
+              <a:shade val="15000"/>
+            </a:schemeClr>
+          </a:lnRef>
+          <a:fillRef idx="1">
+            <a:schemeClr val="accent1"/>
+          </a:fillRef>
+          <a:effectRef idx="0">
+            <a:schemeClr val="accent1"/>
+          </a:effectRef>
+          <a:fontRef idx="minor">
+            <a:schemeClr val="lt1"/>
+          </a:fontRef>
+        </p:style>
+        <p:txBody>
+          <a:bodyPr rtlCol="0" anchor="ctr"/>
+          <a:lstStyle/>
+          <a:p>
+            <a:pPr algn="ctr"/>
+            <a:endParaRPr lang="en-GB"/>
+          </a:p>
+        </p:txBody>
+      </p:sp>
+      <p:cxnSp>
+        <p:nvCxnSpPr>
+          <p:cNvPr id="84" name="Connettore 2 83">
+            <a:extLst>
+              <a:ext uri="{FF2B5EF4-FFF2-40B4-BE49-F238E27FC236}">
+                <a16:creationId xmlns:a16="http://schemas.microsoft.com/office/drawing/2014/main" id="{8B13A5DB-3CA0-7FA2-BDCA-7AB94E61597A}"/>
+              </a:ext>
+            </a:extLst>
+          </p:cNvPr>
+          <p:cNvCxnSpPr>
+            <a:cxnSpLocks/>
+          </p:cNvCxnSpPr>
+          <p:nvPr/>
+        </p:nvCxnSpPr>
+        <p:spPr>
+          <a:xfrm flipV="1">
+            <a:off x="4446345" y="1836153"/>
+            <a:ext cx="0" cy="528973"/>
+          </a:xfrm>
+          <a:prstGeom prst="straightConnector1">
+            <a:avLst/>
+          </a:prstGeom>
+          <a:ln w="19050">
+            <a:tailEnd type="triangle"/>
+          </a:ln>
+        </p:spPr>
+        <p:style>
+          <a:lnRef idx="1">
+            <a:schemeClr val="accent1"/>
+          </a:lnRef>
+          <a:fillRef idx="0">
+            <a:schemeClr val="accent1"/>
+          </a:fillRef>
+          <a:effectRef idx="0">
+            <a:schemeClr val="accent1"/>
+          </a:effectRef>
+          <a:fontRef idx="minor">
+            <a:schemeClr val="tx1"/>
+          </a:fontRef>
+        </p:style>
+      </p:cxnSp>
+      <p:cxnSp>
+        <p:nvCxnSpPr>
+          <p:cNvPr id="85" name="Connettore curvo 84">
+            <a:extLst>
+              <a:ext uri="{FF2B5EF4-FFF2-40B4-BE49-F238E27FC236}">
+                <a16:creationId xmlns:a16="http://schemas.microsoft.com/office/drawing/2014/main" id="{BCB4B77D-A800-2537-EA0B-32049572B8A7}"/>
+              </a:ext>
+            </a:extLst>
+          </p:cNvPr>
+          <p:cNvCxnSpPr>
+            <a:cxnSpLocks/>
+          </p:cNvCxnSpPr>
+          <p:nvPr/>
+        </p:nvCxnSpPr>
+        <p:spPr>
+          <a:xfrm>
+            <a:off x="3215757" y="2395529"/>
+            <a:ext cx="946073" cy="384256"/>
+          </a:xfrm>
+          <a:prstGeom prst="curvedConnector4">
+            <a:avLst>
+              <a:gd name="adj1" fmla="val 45073"/>
+              <a:gd name="adj2" fmla="val 141821"/>
+            </a:avLst>
+          </a:prstGeom>
+          <a:ln>
+            <a:tailEnd type="triangle"/>
+          </a:ln>
+        </p:spPr>
+        <p:style>
+          <a:lnRef idx="1">
+            <a:schemeClr val="accent1"/>
+          </a:lnRef>
+          <a:fillRef idx="0">
+            <a:schemeClr val="accent1"/>
+          </a:fillRef>
+          <a:effectRef idx="0">
+            <a:schemeClr val="accent1"/>
+          </a:effectRef>
+          <a:fontRef idx="minor">
+            <a:schemeClr val="tx1"/>
+          </a:fontRef>
+        </p:style>
+      </p:cxnSp>
+      <p:sp>
+        <p:nvSpPr>
+          <p:cNvPr id="86" name="Ovale 85">
+            <a:extLst>
+              <a:ext uri="{FF2B5EF4-FFF2-40B4-BE49-F238E27FC236}">
+                <a16:creationId xmlns:a16="http://schemas.microsoft.com/office/drawing/2014/main" id="{FB31463F-57E0-0B42-8091-4CAC569CD41C}"/>
+              </a:ext>
+            </a:extLst>
+          </p:cNvPr>
+          <p:cNvSpPr/>
+          <p:nvPr/>
+        </p:nvSpPr>
+        <p:spPr>
+          <a:xfrm>
+            <a:off x="6237499" y="2363407"/>
+            <a:ext cx="636549" cy="616018"/>
+          </a:xfrm>
+          <a:prstGeom prst="ellipse">
+            <a:avLst/>
+          </a:prstGeom>
+          <a:solidFill>
+            <a:srgbClr val="FFC000"/>
+          </a:solidFill>
+        </p:spPr>
+        <p:style>
+          <a:lnRef idx="2">
+            <a:schemeClr val="accent1">
+              <a:shade val="15000"/>
+            </a:schemeClr>
+          </a:lnRef>
+          <a:fillRef idx="1">
+            <a:schemeClr val="accent1"/>
+          </a:fillRef>
+          <a:effectRef idx="0">
+            <a:schemeClr val="accent1"/>
+          </a:effectRef>
+          <a:fontRef idx="minor">
+            <a:schemeClr val="lt1"/>
+          </a:fontRef>
+        </p:style>
+        <p:txBody>
+          <a:bodyPr rtlCol="0" anchor="ctr"/>
+          <a:lstStyle/>
+          <a:p>
+            <a:pPr algn="ctr"/>
+            <a:endParaRPr lang="en-GB"/>
+          </a:p>
+        </p:txBody>
+      </p:sp>
+      <p:cxnSp>
+        <p:nvCxnSpPr>
+          <p:cNvPr id="87" name="Connettore curvo 86">
+            <a:extLst>
+              <a:ext uri="{FF2B5EF4-FFF2-40B4-BE49-F238E27FC236}">
+                <a16:creationId xmlns:a16="http://schemas.microsoft.com/office/drawing/2014/main" id="{F9A2CB5C-CD92-43D7-B249-DE2CB90D2DF1}"/>
+              </a:ext>
+            </a:extLst>
+          </p:cNvPr>
+          <p:cNvCxnSpPr>
+            <a:cxnSpLocks/>
+          </p:cNvCxnSpPr>
+          <p:nvPr/>
+        </p:nvCxnSpPr>
+        <p:spPr>
+          <a:xfrm flipV="1">
+            <a:off x="6003350" y="2784324"/>
+            <a:ext cx="282725" cy="144765"/>
+          </a:xfrm>
+          <a:prstGeom prst="curvedConnector3">
+            <a:avLst>
+              <a:gd name="adj1" fmla="val 50000"/>
+            </a:avLst>
+          </a:prstGeom>
+          <a:ln>
+            <a:tailEnd type="triangle"/>
+          </a:ln>
+        </p:spPr>
+        <p:style>
+          <a:lnRef idx="1">
+            <a:schemeClr val="accent1"/>
+          </a:lnRef>
+          <a:fillRef idx="0">
+            <a:schemeClr val="accent1"/>
+          </a:fillRef>
+          <a:effectRef idx="0">
+            <a:schemeClr val="accent1"/>
+          </a:effectRef>
+          <a:fontRef idx="minor">
+            <a:schemeClr val="tx1"/>
+          </a:fontRef>
+        </p:style>
+      </p:cxnSp>
+      <p:cxnSp>
+        <p:nvCxnSpPr>
+          <p:cNvPr id="88" name="Connettore curvo 87">
+            <a:extLst>
+              <a:ext uri="{FF2B5EF4-FFF2-40B4-BE49-F238E27FC236}">
+                <a16:creationId xmlns:a16="http://schemas.microsoft.com/office/drawing/2014/main" id="{79778581-148F-7203-2D28-66787FFE3CDF}"/>
+              </a:ext>
+            </a:extLst>
+          </p:cNvPr>
+          <p:cNvCxnSpPr>
+            <a:stCxn id="83" idx="7"/>
+          </p:cNvCxnSpPr>
+          <p:nvPr/>
+        </p:nvCxnSpPr>
+        <p:spPr>
+          <a:xfrm rot="16200000" flipH="1">
+            <a:off x="4721709" y="2411579"/>
+            <a:ext cx="629836" cy="713921"/>
+          </a:xfrm>
+          <a:prstGeom prst="curvedConnector4">
+            <a:avLst>
+              <a:gd name="adj1" fmla="val -36295"/>
+              <a:gd name="adj2" fmla="val 56529"/>
+            </a:avLst>
+          </a:prstGeom>
+        </p:spPr>
+        <p:style>
+          <a:lnRef idx="1">
+            <a:schemeClr val="accent1"/>
+          </a:lnRef>
+          <a:fillRef idx="0">
+            <a:schemeClr val="accent1"/>
+          </a:fillRef>
+          <a:effectRef idx="0">
+            <a:schemeClr val="accent1"/>
+          </a:effectRef>
+          <a:fontRef idx="minor">
+            <a:schemeClr val="tx1"/>
+          </a:fontRef>
+        </p:style>
+      </p:cxnSp>
+      <p:sp>
+        <p:nvSpPr>
+          <p:cNvPr id="89" name="CasellaDiTesto 88">
+            <a:extLst>
+              <a:ext uri="{FF2B5EF4-FFF2-40B4-BE49-F238E27FC236}">
+                <a16:creationId xmlns:a16="http://schemas.microsoft.com/office/drawing/2014/main" id="{B24DBAC6-F825-403D-E4BD-1A7C77CA683B}"/>
+              </a:ext>
+            </a:extLst>
+          </p:cNvPr>
+          <p:cNvSpPr txBox="1"/>
+          <p:nvPr/>
+        </p:nvSpPr>
+        <p:spPr>
+          <a:xfrm>
+            <a:off x="5555992" y="2459156"/>
+            <a:ext cx="365119" cy="584172"/>
+          </a:xfrm>
+          <a:prstGeom prst="rect">
+            <a:avLst/>
+          </a:prstGeom>
+          <a:noFill/>
+        </p:spPr>
+        <p:txBody>
+          <a:bodyPr wrap="square" rtlCol="0">
+            <a:spAutoFit/>
+          </a:bodyPr>
+          <a:lstStyle/>
+          <a:p>
+            <a:endParaRPr lang="en-GB" sz="2400" dirty="0"/>
+          </a:p>
+          <a:p>
+            <a:r>
+              <a:rPr lang="en-GB" sz="2400" dirty="0">
+                <a:solidFill>
+                  <a:schemeClr val="accent1"/>
+                </a:solidFill>
+              </a:rPr>
+              <a:t>…</a:t>
+            </a:r>
+          </a:p>
+        </p:txBody>
+      </p:sp>
+      <p:cxnSp>
+        <p:nvCxnSpPr>
+          <p:cNvPr id="90" name="Connettore curvo 89">
+            <a:extLst>
+              <a:ext uri="{FF2B5EF4-FFF2-40B4-BE49-F238E27FC236}">
+                <a16:creationId xmlns:a16="http://schemas.microsoft.com/office/drawing/2014/main" id="{DF2F3444-7681-A0C5-41A3-603B84E19077}"/>
+              </a:ext>
+            </a:extLst>
+          </p:cNvPr>
+          <p:cNvCxnSpPr>
+            <a:cxnSpLocks/>
+          </p:cNvCxnSpPr>
+          <p:nvPr/>
+        </p:nvCxnSpPr>
+        <p:spPr>
+          <a:xfrm flipV="1">
+            <a:off x="1087871" y="2864781"/>
+            <a:ext cx="282725" cy="144765"/>
+          </a:xfrm>
+          <a:prstGeom prst="curvedConnector3">
+            <a:avLst>
+              <a:gd name="adj1" fmla="val 50000"/>
+            </a:avLst>
+          </a:prstGeom>
+          <a:ln>
+            <a:tailEnd type="triangle"/>
+          </a:ln>
+        </p:spPr>
+        <p:style>
+          <a:lnRef idx="1">
+            <a:schemeClr val="accent1"/>
+          </a:lnRef>
+          <a:fillRef idx="0">
+            <a:schemeClr val="accent1"/>
+          </a:fillRef>
+          <a:effectRef idx="0">
+            <a:schemeClr val="accent1"/>
+          </a:effectRef>
+          <a:fontRef idx="minor">
+            <a:schemeClr val="tx1"/>
+          </a:fontRef>
+        </p:style>
+      </p:cxnSp>
+      <p:cxnSp>
+        <p:nvCxnSpPr>
+          <p:cNvPr id="91" name="Connettore 2 90">
+            <a:extLst>
+              <a:ext uri="{FF2B5EF4-FFF2-40B4-BE49-F238E27FC236}">
+                <a16:creationId xmlns:a16="http://schemas.microsoft.com/office/drawing/2014/main" id="{0BCD7F15-04FE-E9FA-519D-999A724D2663}"/>
+              </a:ext>
+            </a:extLst>
+          </p:cNvPr>
+          <p:cNvCxnSpPr>
+            <a:cxnSpLocks/>
+          </p:cNvCxnSpPr>
+          <p:nvPr/>
+        </p:nvCxnSpPr>
+        <p:spPr>
+          <a:xfrm flipV="1">
+            <a:off x="6547506" y="1836153"/>
+            <a:ext cx="0" cy="528973"/>
+          </a:xfrm>
+          <a:prstGeom prst="straightConnector1">
+            <a:avLst/>
+          </a:prstGeom>
+          <a:ln w="19050">
+            <a:tailEnd type="triangle"/>
+          </a:ln>
+        </p:spPr>
+        <p:style>
+          <a:lnRef idx="1">
+            <a:schemeClr val="accent1"/>
+          </a:lnRef>
+          <a:fillRef idx="0">
+            <a:schemeClr val="accent1"/>
+          </a:fillRef>
+          <a:effectRef idx="0">
+            <a:schemeClr val="accent1"/>
+          </a:effectRef>
+          <a:fontRef idx="minor">
+            <a:schemeClr val="tx1"/>
+          </a:fontRef>
+        </p:style>
+      </p:cxnSp>
+      <p:cxnSp>
+        <p:nvCxnSpPr>
+          <p:cNvPr id="94" name="Connettore 2 93">
+            <a:extLst>
+              <a:ext uri="{FF2B5EF4-FFF2-40B4-BE49-F238E27FC236}">
+                <a16:creationId xmlns:a16="http://schemas.microsoft.com/office/drawing/2014/main" id="{2F2424BF-92C7-F12E-8189-DDBD1987922C}"/>
+              </a:ext>
+            </a:extLst>
+          </p:cNvPr>
+          <p:cNvCxnSpPr>
+            <a:cxnSpLocks/>
+          </p:cNvCxnSpPr>
+          <p:nvPr/>
+        </p:nvCxnSpPr>
+        <p:spPr>
+          <a:xfrm flipV="1">
+            <a:off x="3006533" y="2979550"/>
+            <a:ext cx="0" cy="280676"/>
+          </a:xfrm>
+          <a:prstGeom prst="straightConnector1">
+            <a:avLst/>
+          </a:prstGeom>
+          <a:ln w="19050">
+            <a:tailEnd type="triangle"/>
+          </a:ln>
+        </p:spPr>
+        <p:style>
+          <a:lnRef idx="1">
+            <a:schemeClr val="accent1"/>
+          </a:lnRef>
+          <a:fillRef idx="0">
+            <a:schemeClr val="accent1"/>
+          </a:fillRef>
+          <a:effectRef idx="0">
+            <a:schemeClr val="accent1"/>
+          </a:effectRef>
+          <a:fontRef idx="minor">
+            <a:schemeClr val="tx1"/>
+          </a:fontRef>
+        </p:style>
+      </p:cxnSp>
+      <p:cxnSp>
+        <p:nvCxnSpPr>
+          <p:cNvPr id="97" name="Connettore 2 96">
+            <a:extLst>
+              <a:ext uri="{FF2B5EF4-FFF2-40B4-BE49-F238E27FC236}">
+                <a16:creationId xmlns:a16="http://schemas.microsoft.com/office/drawing/2014/main" id="{C7528D9D-2705-3AAE-3099-C2167EFFCE42}"/>
+              </a:ext>
+            </a:extLst>
+          </p:cNvPr>
+          <p:cNvCxnSpPr>
+            <a:cxnSpLocks/>
+          </p:cNvCxnSpPr>
+          <p:nvPr/>
+        </p:nvCxnSpPr>
+        <p:spPr>
+          <a:xfrm flipV="1">
+            <a:off x="4454612" y="2979550"/>
+            <a:ext cx="0" cy="280676"/>
+          </a:xfrm>
+          <a:prstGeom prst="straightConnector1">
+            <a:avLst/>
+          </a:prstGeom>
+          <a:ln w="19050">
+            <a:tailEnd type="triangle"/>
+          </a:ln>
+        </p:spPr>
+        <p:style>
+          <a:lnRef idx="1">
+            <a:schemeClr val="accent1"/>
+          </a:lnRef>
+          <a:fillRef idx="0">
+            <a:schemeClr val="accent1"/>
+          </a:fillRef>
+          <a:effectRef idx="0">
+            <a:schemeClr val="accent1"/>
+          </a:effectRef>
+          <a:fontRef idx="minor">
+            <a:schemeClr val="tx1"/>
+          </a:fontRef>
+        </p:style>
+      </p:cxnSp>
+      <p:cxnSp>
+        <p:nvCxnSpPr>
+          <p:cNvPr id="98" name="Connettore 2 97">
+            <a:extLst>
+              <a:ext uri="{FF2B5EF4-FFF2-40B4-BE49-F238E27FC236}">
+                <a16:creationId xmlns:a16="http://schemas.microsoft.com/office/drawing/2014/main" id="{22298B0C-7800-CCAA-3569-931ABB7BA6E2}"/>
+              </a:ext>
+            </a:extLst>
+          </p:cNvPr>
+          <p:cNvCxnSpPr>
+            <a:cxnSpLocks/>
+          </p:cNvCxnSpPr>
+          <p:nvPr/>
+        </p:nvCxnSpPr>
+        <p:spPr>
+          <a:xfrm flipV="1">
+            <a:off x="1614944" y="2979550"/>
+            <a:ext cx="0" cy="280676"/>
+          </a:xfrm>
+          <a:prstGeom prst="straightConnector1">
+            <a:avLst/>
+          </a:prstGeom>
+          <a:ln w="19050">
+            <a:tailEnd type="triangle"/>
+          </a:ln>
+        </p:spPr>
+        <p:style>
+          <a:lnRef idx="1">
+            <a:schemeClr val="accent1"/>
+          </a:lnRef>
+          <a:fillRef idx="0">
+            <a:schemeClr val="accent1"/>
+          </a:fillRef>
+          <a:effectRef idx="0">
+            <a:schemeClr val="accent1"/>
+          </a:effectRef>
+          <a:fontRef idx="minor">
+            <a:schemeClr val="tx1"/>
+          </a:fontRef>
+        </p:style>
+      </p:cxnSp>
+      <p:cxnSp>
+        <p:nvCxnSpPr>
+          <p:cNvPr id="99" name="Connettore 2 98">
+            <a:extLst>
+              <a:ext uri="{FF2B5EF4-FFF2-40B4-BE49-F238E27FC236}">
+                <a16:creationId xmlns:a16="http://schemas.microsoft.com/office/drawing/2014/main" id="{9466FD11-3353-5EC8-A5D1-87979B9C9F51}"/>
+              </a:ext>
+            </a:extLst>
+          </p:cNvPr>
+          <p:cNvCxnSpPr>
+            <a:cxnSpLocks/>
+          </p:cNvCxnSpPr>
+          <p:nvPr/>
+        </p:nvCxnSpPr>
+        <p:spPr>
+          <a:xfrm flipV="1">
+            <a:off x="6547506" y="2979550"/>
+            <a:ext cx="0" cy="280676"/>
+          </a:xfrm>
+          <a:prstGeom prst="straightConnector1">
+            <a:avLst/>
+          </a:prstGeom>
+          <a:ln w="19050">
+            <a:tailEnd type="triangle"/>
+          </a:ln>
+        </p:spPr>
+        <p:style>
+          <a:lnRef idx="1">
+            <a:schemeClr val="accent1"/>
+          </a:lnRef>
+          <a:fillRef idx="0">
+            <a:schemeClr val="accent1"/>
+          </a:fillRef>
+          <a:effectRef idx="0">
+            <a:schemeClr val="accent1"/>
+          </a:effectRef>
+          <a:fontRef idx="minor">
+            <a:schemeClr val="tx1"/>
+          </a:fontRef>
+        </p:style>
+      </p:cxnSp>
+      <p:cxnSp>
+        <p:nvCxnSpPr>
+          <p:cNvPr id="100" name="Connettore 2 99">
+            <a:extLst>
+              <a:ext uri="{FF2B5EF4-FFF2-40B4-BE49-F238E27FC236}">
+                <a16:creationId xmlns:a16="http://schemas.microsoft.com/office/drawing/2014/main" id="{9A09EE08-05B4-08C3-C37A-FBDF3D97E18B}"/>
+              </a:ext>
+            </a:extLst>
+          </p:cNvPr>
+          <p:cNvCxnSpPr>
+            <a:cxnSpLocks/>
+          </p:cNvCxnSpPr>
+          <p:nvPr/>
+        </p:nvCxnSpPr>
+        <p:spPr>
+          <a:xfrm flipV="1">
+            <a:off x="1614944" y="3916680"/>
+            <a:ext cx="0" cy="280676"/>
+          </a:xfrm>
+          <a:prstGeom prst="straightConnector1">
+            <a:avLst/>
+          </a:prstGeom>
+          <a:ln w="19050">
+            <a:tailEnd type="triangle"/>
+          </a:ln>
+        </p:spPr>
+        <p:style>
+          <a:lnRef idx="1">
+            <a:schemeClr val="accent1"/>
+          </a:lnRef>
+          <a:fillRef idx="0">
+            <a:schemeClr val="accent1"/>
+          </a:fillRef>
+          <a:effectRef idx="0">
+            <a:schemeClr val="accent1"/>
+          </a:effectRef>
+          <a:fontRef idx="minor">
+            <a:schemeClr val="tx1"/>
+          </a:fontRef>
+        </p:style>
+      </p:cxnSp>
+      <p:cxnSp>
+        <p:nvCxnSpPr>
+          <p:cNvPr id="102" name="Connettore 2 101">
+            <a:extLst>
+              <a:ext uri="{FF2B5EF4-FFF2-40B4-BE49-F238E27FC236}">
+                <a16:creationId xmlns:a16="http://schemas.microsoft.com/office/drawing/2014/main" id="{A799D370-DF67-937D-94BB-9C9B84353626}"/>
+              </a:ext>
+            </a:extLst>
+          </p:cNvPr>
+          <p:cNvCxnSpPr>
+            <a:cxnSpLocks/>
+          </p:cNvCxnSpPr>
+          <p:nvPr/>
+        </p:nvCxnSpPr>
+        <p:spPr>
+          <a:xfrm flipV="1">
+            <a:off x="3006533" y="3916680"/>
+            <a:ext cx="0" cy="280676"/>
+          </a:xfrm>
+          <a:prstGeom prst="straightConnector1">
+            <a:avLst/>
+          </a:prstGeom>
+          <a:ln w="19050">
+            <a:tailEnd type="triangle"/>
+          </a:ln>
+        </p:spPr>
+        <p:style>
+          <a:lnRef idx="1">
+            <a:schemeClr val="accent1"/>
+          </a:lnRef>
+          <a:fillRef idx="0">
+            <a:schemeClr val="accent1"/>
+          </a:fillRef>
+          <a:effectRef idx="0">
+            <a:schemeClr val="accent1"/>
+          </a:effectRef>
+          <a:fontRef idx="minor">
+            <a:schemeClr val="tx1"/>
+          </a:fontRef>
+        </p:style>
+      </p:cxnSp>
+      <p:cxnSp>
+        <p:nvCxnSpPr>
+          <p:cNvPr id="103" name="Connettore 2 102">
+            <a:extLst>
+              <a:ext uri="{FF2B5EF4-FFF2-40B4-BE49-F238E27FC236}">
+                <a16:creationId xmlns:a16="http://schemas.microsoft.com/office/drawing/2014/main" id="{774D6403-5967-7638-37F9-093A7FA5B801}"/>
+              </a:ext>
+            </a:extLst>
+          </p:cNvPr>
+          <p:cNvCxnSpPr>
+            <a:cxnSpLocks/>
+          </p:cNvCxnSpPr>
+          <p:nvPr/>
+        </p:nvCxnSpPr>
+        <p:spPr>
+          <a:xfrm flipV="1">
+            <a:off x="4454612" y="3916680"/>
+            <a:ext cx="0" cy="280676"/>
+          </a:xfrm>
+          <a:prstGeom prst="straightConnector1">
+            <a:avLst/>
+          </a:prstGeom>
+          <a:ln w="19050">
+            <a:tailEnd type="triangle"/>
+          </a:ln>
+        </p:spPr>
+        <p:style>
+          <a:lnRef idx="1">
+            <a:schemeClr val="accent1"/>
+          </a:lnRef>
+          <a:fillRef idx="0">
+            <a:schemeClr val="accent1"/>
+          </a:fillRef>
+          <a:effectRef idx="0">
+            <a:schemeClr val="accent1"/>
+          </a:effectRef>
+          <a:fontRef idx="minor">
+            <a:schemeClr val="tx1"/>
+          </a:fontRef>
+        </p:style>
+      </p:cxnSp>
+      <p:cxnSp>
+        <p:nvCxnSpPr>
+          <p:cNvPr id="104" name="Connettore 2 103">
+            <a:extLst>
+              <a:ext uri="{FF2B5EF4-FFF2-40B4-BE49-F238E27FC236}">
+                <a16:creationId xmlns:a16="http://schemas.microsoft.com/office/drawing/2014/main" id="{9E9A3CFF-0E7E-CBF4-D412-2DE2848AA5D5}"/>
+              </a:ext>
+            </a:extLst>
+          </p:cNvPr>
+          <p:cNvCxnSpPr>
+            <a:cxnSpLocks/>
+          </p:cNvCxnSpPr>
+          <p:nvPr/>
+        </p:nvCxnSpPr>
+        <p:spPr>
+          <a:xfrm flipV="1">
+            <a:off x="6547506" y="3916680"/>
+            <a:ext cx="0" cy="280676"/>
+          </a:xfrm>
+          <a:prstGeom prst="straightConnector1">
+            <a:avLst/>
+          </a:prstGeom>
+          <a:ln w="19050">
+            <a:tailEnd type="triangle"/>
+          </a:ln>
+        </p:spPr>
+        <p:style>
+          <a:lnRef idx="1">
+            <a:schemeClr val="accent1"/>
+          </a:lnRef>
+          <a:fillRef idx="0">
+            <a:schemeClr val="accent1"/>
+          </a:fillRef>
+          <a:effectRef idx="0">
+            <a:schemeClr val="accent1"/>
+          </a:effectRef>
+          <a:fontRef idx="minor">
+            <a:schemeClr val="tx1"/>
+          </a:fontRef>
+        </p:style>
+      </p:cxnSp>
+      <p:sp>
+        <p:nvSpPr>
+          <p:cNvPr id="105" name="CasellaDiTesto 104">
+            <a:extLst>
+              <a:ext uri="{FF2B5EF4-FFF2-40B4-BE49-F238E27FC236}">
+                <a16:creationId xmlns:a16="http://schemas.microsoft.com/office/drawing/2014/main" id="{6E892699-E6A0-0852-485B-7F44A0E7CF27}"/>
+              </a:ext>
+            </a:extLst>
+          </p:cNvPr>
+          <p:cNvSpPr txBox="1"/>
+          <p:nvPr/>
+        </p:nvSpPr>
+        <p:spPr>
+          <a:xfrm>
+            <a:off x="246581" y="-8806"/>
+            <a:ext cx="11743362" cy="646331"/>
+          </a:xfrm>
+          <a:prstGeom prst="rect">
+            <a:avLst/>
+          </a:prstGeom>
+          <a:noFill/>
+        </p:spPr>
+        <p:txBody>
+          <a:bodyPr rot="0" spcFirstLastPara="0" vertOverflow="overflow" horzOverflow="overflow" vert="horz" wrap="square" lIns="91440" tIns="45720" rIns="91440" bIns="45720" numCol="1" spcCol="0" rtlCol="0" fromWordArt="0" anchor="t" anchorCtr="0" forceAA="0" compatLnSpc="1">
+            <a:prstTxWarp prst="textNoShape">
+              <a:avLst/>
+            </a:prstTxWarp>
+            <a:spAutoFit/>
+          </a:bodyPr>
+          <a:lstStyle/>
+          <a:p>
+            <a:r>
+              <a:rPr lang="en-US" sz="3600" dirty="0">
+                <a:solidFill>
+                  <a:schemeClr val="accent1"/>
+                </a:solidFill>
+              </a:rPr>
+              <a:t>Multi-layer RNN</a:t>
+            </a:r>
+          </a:p>
+        </p:txBody>
+      </p:sp>
+      <p:sp>
+        <p:nvSpPr>
+          <p:cNvPr id="106" name="CasellaDiTesto 105">
+            <a:extLst>
+              <a:ext uri="{FF2B5EF4-FFF2-40B4-BE49-F238E27FC236}">
+                <a16:creationId xmlns:a16="http://schemas.microsoft.com/office/drawing/2014/main" id="{A3376D07-F390-4720-984F-C859E602CC46}"/>
+              </a:ext>
+            </a:extLst>
+          </p:cNvPr>
+          <p:cNvSpPr txBox="1"/>
+          <p:nvPr/>
+        </p:nvSpPr>
+        <p:spPr>
+          <a:xfrm>
+            <a:off x="1349908" y="3093200"/>
+            <a:ext cx="572301" cy="707886"/>
+          </a:xfrm>
+          <a:prstGeom prst="rect">
+            <a:avLst/>
+          </a:prstGeom>
+          <a:noFill/>
+        </p:spPr>
+        <p:txBody>
+          <a:bodyPr wrap="square" rtlCol="0">
+            <a:spAutoFit/>
+          </a:bodyPr>
+          <a:lstStyle/>
+          <a:p>
+            <a:r>
+              <a:rPr lang="en-GB" sz="4000" dirty="0"/>
+              <a:t>…</a:t>
+            </a:r>
+            <a:endParaRPr lang="en-GB" sz="1200" dirty="0"/>
+          </a:p>
+        </p:txBody>
+      </p:sp>
+      <p:sp>
+        <p:nvSpPr>
+          <p:cNvPr id="107" name="CasellaDiTesto 106">
+            <a:extLst>
+              <a:ext uri="{FF2B5EF4-FFF2-40B4-BE49-F238E27FC236}">
+                <a16:creationId xmlns:a16="http://schemas.microsoft.com/office/drawing/2014/main" id="{7E1103BE-BB6F-6430-9714-AA69C846FC6C}"/>
+              </a:ext>
+            </a:extLst>
+          </p:cNvPr>
+          <p:cNvSpPr txBox="1"/>
+          <p:nvPr/>
+        </p:nvSpPr>
+        <p:spPr>
+          <a:xfrm>
+            <a:off x="2748628" y="3093200"/>
+            <a:ext cx="572301" cy="707886"/>
+          </a:xfrm>
+          <a:prstGeom prst="rect">
+            <a:avLst/>
+          </a:prstGeom>
+          <a:noFill/>
+        </p:spPr>
+        <p:txBody>
+          <a:bodyPr wrap="square" rtlCol="0">
+            <a:spAutoFit/>
+          </a:bodyPr>
+          <a:lstStyle/>
+          <a:p>
+            <a:r>
+              <a:rPr lang="en-GB" sz="4000" dirty="0"/>
+              <a:t>…</a:t>
+            </a:r>
+            <a:endParaRPr lang="en-GB" sz="1200" dirty="0"/>
+          </a:p>
+        </p:txBody>
+      </p:sp>
+      <p:sp>
+        <p:nvSpPr>
+          <p:cNvPr id="108" name="CasellaDiTesto 107">
+            <a:extLst>
+              <a:ext uri="{FF2B5EF4-FFF2-40B4-BE49-F238E27FC236}">
+                <a16:creationId xmlns:a16="http://schemas.microsoft.com/office/drawing/2014/main" id="{4184E08F-BF90-141C-CDDB-733637694C4C}"/>
+              </a:ext>
+            </a:extLst>
+          </p:cNvPr>
+          <p:cNvSpPr txBox="1"/>
+          <p:nvPr/>
+        </p:nvSpPr>
+        <p:spPr>
+          <a:xfrm>
+            <a:off x="4204868" y="3093200"/>
+            <a:ext cx="572301" cy="707886"/>
+          </a:xfrm>
+          <a:prstGeom prst="rect">
+            <a:avLst/>
+          </a:prstGeom>
+          <a:noFill/>
+        </p:spPr>
+        <p:txBody>
+          <a:bodyPr wrap="square" rtlCol="0">
+            <a:spAutoFit/>
+          </a:bodyPr>
+          <a:lstStyle/>
+          <a:p>
+            <a:r>
+              <a:rPr lang="en-GB" sz="4000" dirty="0"/>
+              <a:t>…</a:t>
+            </a:r>
+            <a:endParaRPr lang="en-GB" sz="1200" dirty="0"/>
+          </a:p>
+        </p:txBody>
+      </p:sp>
+      <p:sp>
+        <p:nvSpPr>
+          <p:cNvPr id="109" name="CasellaDiTesto 108">
+            <a:extLst>
+              <a:ext uri="{FF2B5EF4-FFF2-40B4-BE49-F238E27FC236}">
+                <a16:creationId xmlns:a16="http://schemas.microsoft.com/office/drawing/2014/main" id="{68ED7663-5FD7-F9AD-954D-AAEC1B940198}"/>
+              </a:ext>
+            </a:extLst>
+          </p:cNvPr>
+          <p:cNvSpPr txBox="1"/>
+          <p:nvPr/>
+        </p:nvSpPr>
+        <p:spPr>
+          <a:xfrm>
+            <a:off x="6261355" y="3093200"/>
+            <a:ext cx="572301" cy="707886"/>
+          </a:xfrm>
+          <a:prstGeom prst="rect">
+            <a:avLst/>
+          </a:prstGeom>
+          <a:noFill/>
+        </p:spPr>
+        <p:txBody>
+          <a:bodyPr wrap="square" rtlCol="0">
+            <a:spAutoFit/>
+          </a:bodyPr>
+          <a:lstStyle/>
+          <a:p>
+            <a:r>
+              <a:rPr lang="en-GB" sz="4000" dirty="0"/>
+              <a:t>…</a:t>
+            </a:r>
+            <a:endParaRPr lang="en-GB" sz="1200" dirty="0"/>
+          </a:p>
+        </p:txBody>
+      </p:sp>
+      <p:sp>
+        <p:nvSpPr>
+          <p:cNvPr id="110" name="CasellaDiTesto 109">
+            <a:extLst>
+              <a:ext uri="{FF2B5EF4-FFF2-40B4-BE49-F238E27FC236}">
+                <a16:creationId xmlns:a16="http://schemas.microsoft.com/office/drawing/2014/main" id="{B89967CC-A785-0875-74A8-1B6620829025}"/>
+              </a:ext>
+            </a:extLst>
+          </p:cNvPr>
+          <p:cNvSpPr txBox="1"/>
+          <p:nvPr/>
+        </p:nvSpPr>
+        <p:spPr>
+          <a:xfrm>
+            <a:off x="8317842" y="3349132"/>
+            <a:ext cx="3179329" cy="707886"/>
+          </a:xfrm>
+          <a:prstGeom prst="rect">
+            <a:avLst/>
+          </a:prstGeom>
+          <a:noFill/>
+          <a:ln>
+            <a:solidFill>
+              <a:srgbClr val="0070C0"/>
+            </a:solidFill>
+          </a:ln>
+        </p:spPr>
+        <p:txBody>
+          <a:bodyPr wrap="square" rtlCol="0">
+            <a:spAutoFit/>
+          </a:bodyPr>
+          <a:lstStyle/>
+          <a:p>
+            <a:pPr algn="ctr"/>
+            <a:r>
+              <a:rPr lang="en-GB" sz="2000" dirty="0"/>
+              <a:t>Hidden states of a layer are also inputs of the next layer</a:t>
+            </a:r>
+          </a:p>
+        </p:txBody>
+      </p:sp>
+      <p:sp>
+        <p:nvSpPr>
+          <p:cNvPr id="111" name="CasellaDiTesto 110">
+            <a:extLst>
+              <a:ext uri="{FF2B5EF4-FFF2-40B4-BE49-F238E27FC236}">
+                <a16:creationId xmlns:a16="http://schemas.microsoft.com/office/drawing/2014/main" id="{B6DB941B-AB33-D6CF-455F-202EB0392D77}"/>
+              </a:ext>
+            </a:extLst>
+          </p:cNvPr>
+          <p:cNvSpPr txBox="1"/>
+          <p:nvPr/>
+        </p:nvSpPr>
+        <p:spPr>
+          <a:xfrm>
+            <a:off x="4503210" y="6220155"/>
+            <a:ext cx="892061" cy="259632"/>
+          </a:xfrm>
+          <a:prstGeom prst="rect">
+            <a:avLst/>
+          </a:prstGeom>
+          <a:noFill/>
+        </p:spPr>
+        <p:txBody>
+          <a:bodyPr wrap="square" rtlCol="0">
+            <a:spAutoFit/>
+          </a:bodyPr>
+          <a:lstStyle/>
+          <a:p>
+            <a:r>
+              <a:rPr lang="en-GB" dirty="0"/>
+              <a:t>u(t+2)</a:t>
+            </a:r>
+          </a:p>
+        </p:txBody>
+      </p:sp>
+      <p:sp>
+        <p:nvSpPr>
+          <p:cNvPr id="112" name="CasellaDiTesto 111">
+            <a:extLst>
+              <a:ext uri="{FF2B5EF4-FFF2-40B4-BE49-F238E27FC236}">
+                <a16:creationId xmlns:a16="http://schemas.microsoft.com/office/drawing/2014/main" id="{1AEC2042-E58C-DA7A-4FAF-C7B5175329A2}"/>
+              </a:ext>
+            </a:extLst>
+          </p:cNvPr>
+          <p:cNvSpPr txBox="1"/>
+          <p:nvPr/>
+        </p:nvSpPr>
+        <p:spPr>
+          <a:xfrm>
+            <a:off x="6606628" y="6226201"/>
+            <a:ext cx="892061" cy="369332"/>
+          </a:xfrm>
+          <a:prstGeom prst="rect">
+            <a:avLst/>
+          </a:prstGeom>
+          <a:noFill/>
+        </p:spPr>
+        <p:txBody>
+          <a:bodyPr wrap="square" rtlCol="0">
+            <a:spAutoFit/>
+          </a:bodyPr>
+          <a:lstStyle/>
+          <a:p>
+            <a:r>
+              <a:rPr lang="en-GB" dirty="0"/>
+              <a:t>u(</a:t>
+            </a:r>
+            <a:r>
+              <a:rPr lang="en-GB" dirty="0" err="1"/>
+              <a:t>t+T</a:t>
+            </a:r>
+            <a:r>
+              <a:rPr lang="en-GB" dirty="0"/>
+              <a:t>)</a:t>
+            </a:r>
+          </a:p>
+        </p:txBody>
+      </p:sp>
+    </p:spTree>
+    <p:extLst>
+      <p:ext uri="{BB962C8B-B14F-4D97-AF65-F5344CB8AC3E}">
+        <p14:creationId xmlns:p14="http://schemas.microsoft.com/office/powerpoint/2010/main" val="2801019353"/>
+      </p:ext>
+    </p:extLst>
+  </p:cSld>
+  <p:clrMapOvr>
+    <a:masterClrMapping/>
+  </p:clrMapOvr>
+</p:sld>
+</file>
+
 <file path=ppt/tags/tag1.xml><?xml version="1.0" encoding="utf-8"?>
 <p:tagLst xmlns:a="http://schemas.openxmlformats.org/drawingml/2006/main" xmlns:r="http://schemas.openxmlformats.org/officeDocument/2006/relationships" xmlns:p="http://schemas.openxmlformats.org/presentationml/2006/main">
   <p:tag name="OUTPUTDPI" val="2000"/>
